--- a/docs/testbed_workflow.pptx
+++ b/docs/testbed_workflow.pptx
@@ -124,13 +124,13 @@
   <p:extLst>
     <p:ext uri="{521415D9-36F7-43E2-AB2F-B90AF26B5E84}">
       <p14:sectionLst xmlns:p14="http://schemas.microsoft.com/office/powerpoint/2010/main">
-        <p14:section name="Introduction" id="{d2a6009a-01d5-8fc9-43cc-eac6396cc3bf}">
+        <p14:section name="Introduction" id="{36fd1e23-26b5-58b5-7934-af16f05e5f9f}">
           <p14:sldIdLst>
             <p14:sldId id="256"/>
             <p14:sldId id="257"/>
           </p14:sldIdLst>
         </p14:section>
-        <p14:section name="Part 1: The physics chain" id="{747c0f7f-ad1c-5574-a543-0fb0e13721b0}">
+        <p14:section name="Part 1: The physics chain" id="{c375403c-a3a3-3f01-6c5c-68a8f2da66de}">
           <p14:sldIdLst>
             <p14:sldId id="258"/>
             <p14:sldId id="259"/>
@@ -140,7 +140,7 @@
             <p14:sldId id="263"/>
           </p14:sldIdLst>
         </p14:section>
-        <p14:section name="Part 2: The headline experiment" id="{b7fccae7-4c39-7741-70a4-daf2c84a0056}">
+        <p14:section name="Part 2: The headline experiment" id="{48ef0341-ceda-fe8b-00e1-ce86418bfc47}">
           <p14:sldIdLst>
             <p14:sldId id="264"/>
             <p14:sldId id="265"/>
@@ -150,14 +150,14 @@
             <p14:sldId id="269"/>
           </p14:sldIdLst>
         </p14:section>
-        <p14:section name="Part 3: From code to figures" id="{36095802-124c-7eef-c121-a1f57e927896}">
+        <p14:section name="Part 3: From code to figures" id="{c7340386-96db-1603-48e2-355517ad2848}">
           <p14:sldIdLst>
             <p14:sldId id="270"/>
             <p14:sldId id="271"/>
             <p14:sldId id="272"/>
           </p14:sldIdLst>
         </p14:section>
-        <p14:section name="Reproduce" id="{bba506a3-5fdb-70b7-c7ae-b6aed95734fd}">
+        <p14:section name="Reproduce" id="{7c8e4697-5e56-f5cd-8189-d5d23f93a99f}">
           <p14:sldIdLst>
             <p14:sldId id="273"/>
           </p14:sldIdLst>
@@ -1006,7 +1006,7 @@
           <a:p>
             <a:r>
               <a:rPr lang="en-US" dirty="0"/>
-              <a:t>The harder scene: a single 30 m wing with four named fittings, four network tie points so stations near one end can still pin their own pose, and a support tower that blocks some sightlines. Grid search is combinatorially out of reach here, so each objective runs the GA. The objectives run in sequence and each later search is seeded with every earlier winner, a standard GA technique. That was adopted only after cross-checking caught two unseeded searches converging to clearly worse plans by their own measure. Without the tower, risk falls monotonically A0 → A1 → B → C, 18.7% overall. With it, A0, A1 and B land on the same plan and only C finds a better one, 6.6% lower risk.</a:t>
+              <a:t>The harder scene: a single 30 m wing with four named fittings, four network tie points so stations near one end can still pin their own pose, and a support tower that blocks some sightlines. Grid search is combinatorially out of reach here, so each objective runs the GA. The objectives run in sequence and each later search is seeded with every earlier winner, a standard GA technique. That was adopted only after cross-checking caught two unseeded searches converging to clearly worse plans by their own measure. Correction: an earlier version of this slide reported 18.7% and 6.6% risk reductions. Those were wrong. The planner accepted stations that shared only one target with the network, which leaves that station free to rotate, and the covariance solve reports such a direction as zero variance. The search learned to exploit it. With rigid connectivity enforced, the four objectives are within 1.6% of each other, which is about the size of the GA's own imprecision. Three stations over 30 m leaves the uncertainty at 13 to 47 micrometres against a 50 micrometre tolerance, so total risk is about 0.8 for every objective.</a:t>
             </a:r>
             <a:endParaRPr lang="en-US" dirty="0"/>
           </a:p>
@@ -1270,7 +1270,7 @@
           <a:p>
             <a:r>
               <a:rPr lang="en-US" dirty="0"/>
-              <a:t>Four layers of checking. First, the test suite: every physical claim gets a test against a reference number where one exists, and every build step has a gate that must pass before the next begins. Second, determinism: the main figures reproduce exactly. Third, the shortcut step 6 relies on, noiseless observations, is pinned to a genuinely noisy solve by its own test. Fourth, GA results are never taken on trust: each objective's winning plan is scored under every other objective's formula. In the wing scenario this caught two searches that had converged to clearly worse plans, which is what led to population seeding.</a:t>
+              <a:t>Four layers of checking. First, the test suite: every physical claim gets a test against a reference number where one exists, and every build step has a gate that must pass before the next begins. Second, determinism: the main figures reproduce exactly. Third, the shortcut step 6 relies on, noiseless observations, is pinned to a genuinely noisy solve by its own test. Fourth, GA results are never taken on trust: each objective's winning plan is scored under every other objective's formula. In the wing scenario this caught two searches that had converged to clearly worse plans, which is what led to population seeding. Re-scoring the saved plans with a faster evaluator later exposed a feasibility loophole, stations tied to the network by a single target, and the wing numbers were corrected.</a:t>
             </a:r>
             <a:endParaRPr lang="en-US" dirty="0"/>
           </a:p>
@@ -9144,7 +9144,7 @@
         <p:spPr>
           <a:xfrm>
             <a:off x="548640" y="2880360"/>
-            <a:ext cx="5486400" cy="2991274"/>
+            <a:ext cx="5486400" cy="2933750"/>
           </a:xfrm>
           <a:prstGeom prst="rect">
             <a:avLst/>
@@ -9160,7 +9160,7 @@
         <p:spPr>
           <a:xfrm>
             <a:off x="548640" y="2880360"/>
-            <a:ext cx="5486400" cy="2991274"/>
+            <a:ext cx="5486400" cy="2933750"/>
           </a:xfrm>
           <a:prstGeom prst="rect">
             <a:avLst/>
@@ -9305,7 +9305,7 @@
                   <a:schemeClr val="tx1"/>
                 </a:solidFill>
               </a:rPr>
-              <a:t>every winner is scored under every other objective's formula; two unseeded searches failed this before seeding fixed them</a:t>
+              <a:t>every winner is scored under every other objective's formula. An earlier −18.7% / −6.6% was withdrawn: it came from stations not rigidly tied to the network</a:t>
             </a:r>
             <a:endParaRPr lang="en-US" sz="1200" dirty="0"/>
           </a:p>
@@ -9366,7 +9366,7 @@
                 <a:ea typeface="Cambria" pitchFamily="34" charset="-122"/>
                 <a:cs typeface="Cambria" pitchFamily="34" charset="-120"/>
               </a:rPr>
-              <a:t>−18.7%</a:t>
+              <a:t>−1.6%</a:t>
             </a:r>
             <a:endParaRPr lang="en-US" sz="3200" dirty="0"/>
           </a:p>
@@ -9402,7 +9402,7 @@
                   <a:schemeClr val="tx2"/>
                 </a:solidFill>
               </a:rPr>
-              <a:t>risk, A0 → C, without the tower</a:t>
+              <a:t>risk, A0 → C, without the tower (GA noise ~1%)</a:t>
             </a:r>
             <a:endParaRPr lang="en-US" sz="1200" dirty="0"/>
           </a:p>
@@ -9463,7 +9463,7 @@
                 <a:ea typeface="Cambria" pitchFamily="34" charset="-122"/>
                 <a:cs typeface="Cambria" pitchFamily="34" charset="-120"/>
               </a:rPr>
-              <a:t>−6.6%</a:t>
+              <a:t>−0.7%</a:t>
             </a:r>
             <a:endParaRPr lang="en-US" sz="3200" dirty="0"/>
           </a:p>
@@ -9499,7 +9499,7 @@
                   <a:schemeClr val="tx2"/>
                 </a:solidFill>
               </a:rPr>
-              <a:t>risk, A0 → C, with the tower</a:t>
+              <a:t>risk, A0 → C, with the tower (GA noise ~1%)</a:t>
             </a:r>
             <a:endParaRPr lang="en-US" sz="1200" dirty="0"/>
           </a:p>
@@ -11259,7 +11259,7 @@
                 <a:ea typeface="Cambria" pitchFamily="34" charset="-122"/>
                 <a:cs typeface="Cambria" pitchFamily="34" charset="-120"/>
               </a:rPr>
-              <a:t>129</a:t>
+              <a:t>174</a:t>
             </a:r>
             <a:endParaRPr lang="en-US" sz="5400" dirty="0"/>
           </a:p>
@@ -11730,7 +11730,7 @@
                   <a:schemeClr val="tx2"/>
                 </a:solidFill>
               </a:rPr>
-              <a:t>Each of 4 winning plans scored under all 4 objectives' formulas; this caught two wrong searches.</a:t>
+              <a:t>Each of 4 winning plans scored under all 4 objectives' formulas. This caught two wrong searches, and re-scoring later exposed an invalid-network loophole.</a:t>
             </a:r>
             <a:endParaRPr lang="en-US" sz="1400" dirty="0"/>
           </a:p>
@@ -11959,7 +11959,7 @@
                 <a:ea typeface="Courier New" pitchFamily="34" charset="-122"/>
                 <a:cs typeface="Courier New" pitchFamily="34" charset="-120"/>
               </a:rPr>
-              <a:t>   # 129 tests, about a minute</a:t>
+              <a:t>   # 174 tests, about three minutes</a:t>
             </a:r>
             <a:endParaRPr lang="en-US" sz="1500" dirty="0"/>
           </a:p>

--- a/docs/testbed_workflow.pptx
+++ b/docs/testbed_workflow.pptx
@@ -23,9 +23,12 @@
     <p:sldId id="271" r:id="rId17"/>
     <p:sldId id="272" r:id="rId18"/>
     <p:sldId id="273" r:id="rId19"/>
+    <p:sldId id="274" r:id="rId20"/>
+    <p:sldId id="275" r:id="rId21"/>
+    <p:sldId id="276" r:id="rId22"/>
   </p:sldIdLst>
   <p:notesMasterIdLst>
-    <p:notesMasterId r:id="rId20"/>
+    <p:notesMasterId r:id="rId23"/>
   </p:notesMasterIdLst>
   <p:sldSz cx="12192000" cy="6858000"/>
   <p:notesSz cx="6858000" cy="12192000"/>
@@ -124,13 +127,13 @@
   <p:extLst>
     <p:ext uri="{521415D9-36F7-43E2-AB2F-B90AF26B5E84}">
       <p14:sectionLst xmlns:p14="http://schemas.microsoft.com/office/powerpoint/2010/main">
-        <p14:section name="Introduction" id="{36fd1e23-26b5-58b5-7934-af16f05e5f9f}">
+        <p14:section name="Introduction" id="{cbf04940-399f-6486-a992-fa5d36baff85}">
           <p14:sldIdLst>
             <p14:sldId id="256"/>
             <p14:sldId id="257"/>
           </p14:sldIdLst>
         </p14:section>
-        <p14:section name="Part 1: The physics chain" id="{c375403c-a3a3-3f01-6c5c-68a8f2da66de}">
+        <p14:section name="Part 1: The physics chain" id="{e7012341-356d-b611-9027-368a66071618}">
           <p14:sldIdLst>
             <p14:sldId id="258"/>
             <p14:sldId id="259"/>
@@ -140,7 +143,7 @@
             <p14:sldId id="263"/>
           </p14:sldIdLst>
         </p14:section>
-        <p14:section name="Part 2: The headline experiment" id="{48ef0341-ceda-fe8b-00e1-ce86418bfc47}">
+        <p14:section name="Part 2: The headline experiment" id="{45aaf5e7-8106-a2e6-ccb7-2becc65a675a}">
           <p14:sldIdLst>
             <p14:sldId id="264"/>
             <p14:sldId id="265"/>
@@ -148,18 +151,21 @@
             <p14:sldId id="267"/>
             <p14:sldId id="268"/>
             <p14:sldId id="269"/>
-          </p14:sldIdLst>
-        </p14:section>
-        <p14:section name="Part 3: From code to figures" id="{c7340386-96db-1603-48e2-355517ad2848}">
-          <p14:sldIdLst>
             <p14:sldId id="270"/>
             <p14:sldId id="271"/>
             <p14:sldId id="272"/>
           </p14:sldIdLst>
         </p14:section>
-        <p14:section name="Reproduce" id="{7c8e4697-5e56-f5cd-8189-d5d23f93a99f}">
+        <p14:section name="Part 3: From code to figures" id="{e02468fc-37ab-0cea-e4be-1132b05ea2c8}">
           <p14:sldIdLst>
             <p14:sldId id="273"/>
+            <p14:sldId id="274"/>
+            <p14:sldId id="275"/>
+          </p14:sldIdLst>
+        </p14:section>
+        <p14:section name="Reproduce" id="{1450d732-c471-73e6-6c09-095970fa188f}">
+          <p14:sldIdLst>
+            <p14:sldId id="276"/>
           </p14:sldIdLst>
         </p14:section>
       </p14:sectionLst>
@@ -1094,7 +1100,7 @@
           <a:p>
             <a:r>
               <a:rPr lang="en-US" dirty="0"/>
-              <a:t/>
+              <a:t>A separate experiment on a roughly 500 point wing box with six inspection tasks. The part is a synthetic stand-in because no CAD or point list was available. The chain is the project's own: visibility, then the covariance from the block-diagonal network form, then uncertainty along the surface normal, then JCGM 106 risk per point. Plan U is the conventional planner: every point measured, mean variance minimised, stations taken from where one more stops paying. Plan R minimises stations subject to a risk limit and may leave a point unmeasured, in which case it carries its process's own escape probability. No published acceptable false accept limit for safety critical aerospace inspection was found, so R is held to the risk plan U actually delivers. On the stand-in, U needs 9 stations and R needs 3, with fewer shots and about 29 times fewer expected false rejections. The hard TUR 4 to 1 rule could not be met at all.</a:t>
             </a:r>
             <a:endParaRPr lang="en-US" dirty="0"/>
           </a:p>
@@ -1182,7 +1188,7 @@
           <a:p>
             <a:r>
               <a:rPr lang="en-US" dirty="0"/>
-              <a:t>Two commands produce every figure. python -m viz.make_figures runs panels 1 to 8 in about two to three minutes. Steps 1 to 5 use fixed random seeds and step 6 uses noiseless exact observations, so there is no randomness anywhere and re-running leaves the committed figures byte-for-byte unchanged. python -m viz.make_wing_figures runs the wing scenario's GA searches, about 14 minutes with every BLAS library pinned to one thread; it is kept separate because it is slow and, being a GA, not guaranteed bit-identical across machines. viz/ only ever imports from src/, never the other way round, so no plotting code lives inside the physics.</a:t>
+              <a:t>The headline depends on specific things, and the sensitivity panel says which. It does not depend on the tolerance or the shape of the process prior. It does depend on the confidence in the cluster assignment, and it disappears if the points that are expensive to see are the marginal ones, or if a sampling policy forces those points to be measured. A stricter risk limit than plan U delivers cannot be met by any plan, because the escape probability has a floor set by the process. These are exactly the quantities that need real data.</a:t>
             </a:r>
             <a:endParaRPr lang="en-US" dirty="0"/>
           </a:p>
@@ -1270,7 +1276,7 @@
           <a:p>
             <a:r>
               <a:rPr lang="en-US" dirty="0"/>
-              <a:t>Four layers of checking. First, the test suite: every physical claim gets a test against a reference number where one exists, and every build step has a gate that must pass before the next begins. Second, determinism: the main figures reproduce exactly. Third, the shortcut step 6 relies on, noiseless observations, is pinned to a genuinely noisy solve by its own test. Fourth, GA results are never taken on trust: each objective's winning plan is scored under every other objective's formula. In the wing scenario this caught two searches that had converged to clearly worse plans, which is what led to population seeding. Re-scoring the saved plans with a faster evaluator later exposed a feasibility loophole, stations tied to the network by a single target, and the wing numbers were corrected.</a:t>
+              <a:t>The brief asked for an ML model. The physics is known, so the model is a surrogate of the digital twin: given a station layout it predicts coverage, escape probability, expected false rejections and whether the network is rigid. The split is by base layout, because small perturbations of one layout are near-duplicates and a random split would leak. A second test holds out a whole region of the station box. Coverage and escape probability are predicted well; expected false rejections are not, outside the bulk. Used as the optimiser's objective, the surrogate is exploited, so the search re-scores a shortlist exactly and retrains. That reaches the same station counts with 29 to 61 times fewer exact evaluations, but not faster in wall-clock terms, because the exact evaluator is already fast. The value is later: slower physics, and real measurement data in the training set.</a:t>
             </a:r>
             <a:endParaRPr lang="en-US" dirty="0"/>
           </a:p>
@@ -1358,7 +1364,7 @@
           <a:p>
             <a:r>
               <a:rPr lang="en-US" dirty="0"/>
-              <a:t>Everything in this deck can be regenerated from a fresh clone with these commands. The first three take a few minutes in total; the wing-scenario figures take about fourteen minutes and need the BLAS libraries pinned to one thread per process so the parallel GA is actually faster rather than slower. The docs folder has a write-up per build step, including every result quoted here and the caveats that come with them.</a:t>
+              <a:t/>
             </a:r>
             <a:endParaRPr lang="en-US" dirty="0"/>
           </a:p>
@@ -1382,6 +1388,94 @@
             <a:fld id="{F7021451-1387-4CA6-816F-3879F97B5CBC}" type="slidenum">
               <a:rPr lang="en-US"/>
               <a:t>18</a:t>
+            </a:fld>
+            <a:endParaRPr lang="en-US"/>
+          </a:p>
+        </p:txBody>
+      </p:sp>
+    </p:spTree>
+    <p:extLst>
+      <p:ext uri="{BB962C8B-B14F-4D97-AF65-F5344CB8AC3E}">
+        <p14:creationId xmlns:p14="http://schemas.microsoft.com/office/powerpoint/2010/main" val="1024086991"/>
+      </p:ext>
+    </p:extLst>
+  </p:cSld>
+  <p:clrMapOvr>
+    <a:masterClrMapping/>
+  </p:clrMapOvr>
+</p:notes>
+</file>
+
+<file path=ppt/notesSlides/notesSlide19.xml><?xml version="1.0" encoding="utf-8"?>
+<p:notes xmlns:a="http://schemas.openxmlformats.org/drawingml/2006/main" xmlns:r="http://schemas.openxmlformats.org/officeDocument/2006/relationships" xmlns:p="http://schemas.openxmlformats.org/presentationml/2006/main">
+  <p:cSld>
+    <p:spTree>
+      <p:nvGrpSpPr>
+        <p:cNvPr id="1" name=""/>
+        <p:cNvGrpSpPr/>
+        <p:nvPr/>
+      </p:nvGrpSpPr>
+      <p:grpSpPr>
+        <a:xfrm>
+          <a:off x="0" y="0"/>
+          <a:ext cx="0" cy="0"/>
+          <a:chOff x="0" y="0"/>
+          <a:chExt cx="0" cy="0"/>
+        </a:xfrm>
+      </p:grpSpPr>
+      <p:sp>
+        <p:nvSpPr>
+          <p:cNvPr id="2" name="Slide Image Placeholder 1"/>
+          <p:cNvSpPr>
+            <a:spLocks noGrp="1" noRot="1" noChangeAspect="1"/>
+          </p:cNvSpPr>
+          <p:nvPr>
+            <p:ph type="sldImg"/>
+          </p:nvPr>
+        </p:nvSpPr>
+        <p:spPr/>
+      </p:sp>
+      <p:sp>
+        <p:nvSpPr>
+          <p:cNvPr id="3" name="Notes Placeholder 2"/>
+          <p:cNvSpPr>
+            <a:spLocks noGrp="1"/>
+          </p:cNvSpPr>
+          <p:nvPr>
+            <p:ph type="body" idx="1"/>
+          </p:nvPr>
+        </p:nvSpPr>
+        <p:spPr/>
+        <p:txBody>
+          <a:bodyPr/>
+          <a:lstStyle/>
+          <a:p>
+            <a:r>
+              <a:rPr lang="en-US" dirty="0"/>
+              <a:t>Two commands produce every figure. python -m viz.make_figures runs panels 1 to 8 in about two to three minutes. Steps 1 to 5 use fixed random seeds and step 6 uses noiseless exact observations, so there is no randomness anywhere and re-running leaves the committed figures byte-for-byte unchanged. python -m viz.make_wing_figures runs the wing scenario's GA searches, about 14 minutes with every BLAS library pinned to one thread; it is kept separate because it is slow and, being a GA, not guaranteed bit-identical across machines. python -m viz.make_wingbox_figures runs the wing-box experiment in stages (experiment, seeds, surrogate, figures), about two and a half hours in all. viz/ only ever imports from src/, never the other way round, so no plotting code lives inside the physics.</a:t>
+            </a:r>
+            <a:endParaRPr lang="en-US" dirty="0"/>
+          </a:p>
+        </p:txBody>
+      </p:sp>
+      <p:sp>
+        <p:nvSpPr>
+          <p:cNvPr id="4" name="Slide Number Placeholder 3"/>
+          <p:cNvSpPr>
+            <a:spLocks noGrp="1"/>
+          </p:cNvSpPr>
+          <p:nvPr>
+            <p:ph type="sldNum" sz="quarter" idx="10"/>
+          </p:nvPr>
+        </p:nvSpPr>
+        <p:spPr/>
+        <p:txBody>
+          <a:bodyPr/>
+          <a:lstStyle/>
+          <a:p>
+            <a:fld id="{F7021451-1387-4CA6-816F-3879F97B5CBC}" type="slidenum">
+              <a:rPr lang="en-US"/>
+              <a:t>19</a:t>
             </a:fld>
             <a:endParaRPr lang="en-US"/>
           </a:p>
@@ -1470,6 +1564,182 @@
             <a:fld id="{F7021451-1387-4CA6-816F-3879F97B5CBC}" type="slidenum">
               <a:rPr lang="en-US"/>
               <a:t>2</a:t>
+            </a:fld>
+            <a:endParaRPr lang="en-US"/>
+          </a:p>
+        </p:txBody>
+      </p:sp>
+    </p:spTree>
+    <p:extLst>
+      <p:ext uri="{BB962C8B-B14F-4D97-AF65-F5344CB8AC3E}">
+        <p14:creationId xmlns:p14="http://schemas.microsoft.com/office/powerpoint/2010/main" val="1024086991"/>
+      </p:ext>
+    </p:extLst>
+  </p:cSld>
+  <p:clrMapOvr>
+    <a:masterClrMapping/>
+  </p:clrMapOvr>
+</p:notes>
+</file>
+
+<file path=ppt/notesSlides/notesSlide20.xml><?xml version="1.0" encoding="utf-8"?>
+<p:notes xmlns:a="http://schemas.openxmlformats.org/drawingml/2006/main" xmlns:r="http://schemas.openxmlformats.org/officeDocument/2006/relationships" xmlns:p="http://schemas.openxmlformats.org/presentationml/2006/main">
+  <p:cSld>
+    <p:spTree>
+      <p:nvGrpSpPr>
+        <p:cNvPr id="1" name=""/>
+        <p:cNvGrpSpPr/>
+        <p:nvPr/>
+      </p:nvGrpSpPr>
+      <p:grpSpPr>
+        <a:xfrm>
+          <a:off x="0" y="0"/>
+          <a:ext cx="0" cy="0"/>
+          <a:chOff x="0" y="0"/>
+          <a:chExt cx="0" cy="0"/>
+        </a:xfrm>
+      </p:grpSpPr>
+      <p:sp>
+        <p:nvSpPr>
+          <p:cNvPr id="2" name="Slide Image Placeholder 1"/>
+          <p:cNvSpPr>
+            <a:spLocks noGrp="1" noRot="1" noChangeAspect="1"/>
+          </p:cNvSpPr>
+          <p:nvPr>
+            <p:ph type="sldImg"/>
+          </p:nvPr>
+        </p:nvSpPr>
+        <p:spPr/>
+      </p:sp>
+      <p:sp>
+        <p:nvSpPr>
+          <p:cNvPr id="3" name="Notes Placeholder 2"/>
+          <p:cNvSpPr>
+            <a:spLocks noGrp="1"/>
+          </p:cNvSpPr>
+          <p:nvPr>
+            <p:ph type="body" idx="1"/>
+          </p:nvPr>
+        </p:nvSpPr>
+        <p:spPr/>
+        <p:txBody>
+          <a:bodyPr/>
+          <a:lstStyle/>
+          <a:p>
+            <a:r>
+              <a:rPr lang="en-US" dirty="0"/>
+              <a:t>Four layers of checking. First, the test suite: every physical claim gets a test against a reference number where one exists, and every build step has a gate that must pass before the next begins. Second, determinism: the main figures reproduce exactly. Third, the shortcut step 6 relies on, noiseless observations, is pinned to a genuinely noisy solve by its own test. Fourth, GA results are never taken on trust: each objective's winning plan is scored under every other objective's formula. In the wing scenario this caught two searches that had converged to clearly worse plans, which is what led to population seeding. Re-scoring the saved plans with a faster evaluator later exposed a feasibility loophole, stations tied to the network by a single target, and the wing numbers were corrected.</a:t>
+            </a:r>
+            <a:endParaRPr lang="en-US" dirty="0"/>
+          </a:p>
+        </p:txBody>
+      </p:sp>
+      <p:sp>
+        <p:nvSpPr>
+          <p:cNvPr id="4" name="Slide Number Placeholder 3"/>
+          <p:cNvSpPr>
+            <a:spLocks noGrp="1"/>
+          </p:cNvSpPr>
+          <p:nvPr>
+            <p:ph type="sldNum" sz="quarter" idx="10"/>
+          </p:nvPr>
+        </p:nvSpPr>
+        <p:spPr/>
+        <p:txBody>
+          <a:bodyPr/>
+          <a:lstStyle/>
+          <a:p>
+            <a:fld id="{F7021451-1387-4CA6-816F-3879F97B5CBC}" type="slidenum">
+              <a:rPr lang="en-US"/>
+              <a:t>20</a:t>
+            </a:fld>
+            <a:endParaRPr lang="en-US"/>
+          </a:p>
+        </p:txBody>
+      </p:sp>
+    </p:spTree>
+    <p:extLst>
+      <p:ext uri="{BB962C8B-B14F-4D97-AF65-F5344CB8AC3E}">
+        <p14:creationId xmlns:p14="http://schemas.microsoft.com/office/powerpoint/2010/main" val="1024086991"/>
+      </p:ext>
+    </p:extLst>
+  </p:cSld>
+  <p:clrMapOvr>
+    <a:masterClrMapping/>
+  </p:clrMapOvr>
+</p:notes>
+</file>
+
+<file path=ppt/notesSlides/notesSlide21.xml><?xml version="1.0" encoding="utf-8"?>
+<p:notes xmlns:a="http://schemas.openxmlformats.org/drawingml/2006/main" xmlns:r="http://schemas.openxmlformats.org/officeDocument/2006/relationships" xmlns:p="http://schemas.openxmlformats.org/presentationml/2006/main">
+  <p:cSld>
+    <p:spTree>
+      <p:nvGrpSpPr>
+        <p:cNvPr id="1" name=""/>
+        <p:cNvGrpSpPr/>
+        <p:nvPr/>
+      </p:nvGrpSpPr>
+      <p:grpSpPr>
+        <a:xfrm>
+          <a:off x="0" y="0"/>
+          <a:ext cx="0" cy="0"/>
+          <a:chOff x="0" y="0"/>
+          <a:chExt cx="0" cy="0"/>
+        </a:xfrm>
+      </p:grpSpPr>
+      <p:sp>
+        <p:nvSpPr>
+          <p:cNvPr id="2" name="Slide Image Placeholder 1"/>
+          <p:cNvSpPr>
+            <a:spLocks noGrp="1" noRot="1" noChangeAspect="1"/>
+          </p:cNvSpPr>
+          <p:nvPr>
+            <p:ph type="sldImg"/>
+          </p:nvPr>
+        </p:nvSpPr>
+        <p:spPr/>
+      </p:sp>
+      <p:sp>
+        <p:nvSpPr>
+          <p:cNvPr id="3" name="Notes Placeholder 2"/>
+          <p:cNvSpPr>
+            <a:spLocks noGrp="1"/>
+          </p:cNvSpPr>
+          <p:nvPr>
+            <p:ph type="body" idx="1"/>
+          </p:nvPr>
+        </p:nvSpPr>
+        <p:spPr/>
+        <p:txBody>
+          <a:bodyPr/>
+          <a:lstStyle/>
+          <a:p>
+            <a:r>
+              <a:rPr lang="en-US" dirty="0"/>
+              <a:t>Everything in this deck can be regenerated from a fresh clone with these commands. The first three take a few minutes in total; the wing-scenario figures take about fourteen minutes and need the BLAS libraries pinned to one thread per process so the parallel GA is actually faster rather than slower. The docs folder has a write-up per build step, including every result quoted here and the caveats that come with them.</a:t>
+            </a:r>
+            <a:endParaRPr lang="en-US" dirty="0"/>
+          </a:p>
+        </p:txBody>
+      </p:sp>
+      <p:sp>
+        <p:nvSpPr>
+          <p:cNvPr id="4" name="Slide Number Placeholder 3"/>
+          <p:cNvSpPr>
+            <a:spLocks noGrp="1"/>
+          </p:cNvSpPr>
+          <p:nvPr>
+            <p:ph type="sldNum" sz="quarter" idx="10"/>
+          </p:nvPr>
+        </p:nvSpPr>
+        <p:spPr/>
+        <p:txBody>
+          <a:bodyPr/>
+          <a:lstStyle/>
+          <a:p>
+            <a:fld id="{F7021451-1387-4CA6-816F-3879F97B5CBC}" type="slidenum">
+              <a:rPr lang="en-US"/>
+              <a:t>21</a:t>
             </a:fld>
             <a:endParaRPr lang="en-US"/>
           </a:p>
@@ -9580,36 +9850,36 @@
           <p:cNvPr id="2" name="Text 0"/>
           <p:cNvSpPr/>
           <p:nvPr>
-            <p:ph idx="100" type="body" hasCustomPrompt="1"/>
+            <p:ph idx="100" type="title" hasCustomPrompt="1"/>
           </p:nvPr>
         </p:nvSpPr>
         <p:spPr>
           <a:xfrm>
-            <a:off x="731520" y="2148840"/>
-            <a:ext cx="7132320" cy="457200"/>
-          </a:xfrm>
-          <a:prstGeom prst="rect">
-            <a:avLst/>
-          </a:prstGeom>
-          <a:noFill/>
-          <a:ln/>
-        </p:spPr>
-        <p:txBody>
-          <a:bodyPr wrap="square" rtlCol="0" anchor="b"/>
-          <a:lstStyle/>
-          <a:p>
-            <a:pPr indent="0" marL="0">
-              <a:buNone/>
-            </a:pPr>
-            <a:r>
-              <a:rPr lang="en-US" sz="1600" b="1" dirty="0">
-                <a:solidFill>
-                  <a:schemeClr val="accent2"/>
-                </a:solidFill>
-              </a:rPr>
-              <a:t>PART 3</a:t>
-            </a:r>
-            <a:endParaRPr lang="en-US" sz="1600" dirty="0"/>
+            <a:off x="548640" y="274320"/>
+            <a:ext cx="9966960" cy="685800"/>
+          </a:xfrm>
+          <a:prstGeom prst="rect">
+            <a:avLst/>
+          </a:prstGeom>
+          <a:noFill/>
+          <a:ln/>
+        </p:spPr>
+        <p:txBody>
+          <a:bodyPr wrap="square" rtlCol="0" anchor="ctr"/>
+          <a:lstStyle/>
+          <a:p>
+            <a:pPr algn="l" indent="0" marL="0">
+              <a:buNone/>
+            </a:pPr>
+            <a:r>
+              <a:rPr lang="en-US" sz="3400" b="1" dirty="0">
+                <a:solidFill>
+                  <a:schemeClr val="tx1"/>
+                </a:solidFill>
+              </a:rPr>
+              <a:t>Wing box: uncertainty-driven vs risk-driven</a:t>
+            </a:r>
+            <a:endParaRPr lang="en-US" sz="3400" dirty="0"/>
           </a:p>
         </p:txBody>
       </p:sp>
@@ -9618,13 +9888,13 @@
           <p:cNvPr id="3" name="Text 0"/>
           <p:cNvSpPr/>
           <p:nvPr>
-            <p:ph idx="101" type="title" hasCustomPrompt="1"/>
+            <p:ph idx="101" type="body" hasCustomPrompt="1"/>
           </p:nvPr>
         </p:nvSpPr>
         <p:spPr>
           <a:xfrm>
-            <a:off x="731520" y="2651760"/>
-            <a:ext cx="7680960" cy="1097280"/>
+            <a:off x="548640" y="941832"/>
+            <a:ext cx="9966960" cy="411480"/>
           </a:xfrm>
           <a:prstGeom prst="rect">
             <a:avLst/>
@@ -9636,85 +9906,666 @@
           <a:bodyPr wrap="square" rtlCol="0" anchor="ctr"/>
           <a:lstStyle/>
           <a:p>
+            <a:pPr indent="0" marL="0">
+              <a:buNone/>
+            </a:pPr>
+            <a:r>
+              <a:rPr lang="en-US" sz="1600" i="1" dirty="0">
+                <a:solidFill>
+                  <a:schemeClr val="tx2"/>
+                </a:solidFill>
+              </a:rPr>
+              <a:t>run_inspection_experiment() → panel 10 · a separate experiment, outside the six-step ladder (CLAUDE.md §5)</a:t>
+            </a:r>
+            <a:endParaRPr lang="en-US" sz="1600" dirty="0"/>
+          </a:p>
+        </p:txBody>
+      </p:sp>
+      <p:sp>
+        <p:nvSpPr>
+          <p:cNvPr id="4" name="build_wing_box_part()"/>
+          <p:cNvSpPr txBox="1"/>
+          <p:nvPr/>
+        </p:nvSpPr>
+        <p:spPr>
+          <a:xfrm>
+            <a:off x="548640" y="1554480"/>
+            <a:ext cx="1920240" cy="868680"/>
+          </a:xfrm>
+          <a:prstGeom prst="rect">
+            <a:avLst/>
+          </a:prstGeom>
+          <a:solidFill>
+            <a:schemeClr val="bg2"/>
+          </a:solidFill>
+          <a:ln w="12700">
+            <a:solidFill>
+              <a:schemeClr val="accent4"/>
+            </a:solidFill>
+          </a:ln>
+        </p:spPr>
+        <p:txBody>
+          <a:bodyPr wrap="square" lIns="63500" tIns="63500" rIns="63500" bIns="63500" rtlCol="0" anchor="ctr"/>
+          <a:lstStyle/>
+          <a:p>
+            <a:pPr algn="ctr" indent="0" marL="0">
+              <a:buNone/>
+            </a:pPr>
+            <a:r>
+              <a:rPr lang="en-US" sz="1100" b="1" dirty="0">
+                <a:solidFill>
+                  <a:schemeClr val="tx1"/>
+                </a:solidFill>
+                <a:latin typeface="Courier New" pitchFamily="34" charset="0"/>
+                <a:ea typeface="Courier New" pitchFamily="34" charset="-122"/>
+                <a:cs typeface="Courier New" pitchFamily="34" charset="-120"/>
+              </a:rPr>
+              <a:t>build_wing_box_part()</a:t>
+            </a:r>
+            <a:endParaRPr lang="en-US" sz="1100" dirty="0"/>
+          </a:p>
+          <a:p>
+            <a:pPr algn="ctr" indent="0" marL="0">
+              <a:buNone/>
+            </a:pPr>
+            <a:r>
+              <a:rPr lang="en-US" sz="1050" dirty="0">
+                <a:solidFill>
+                  <a:schemeClr val="tx2"/>
+                </a:solidFill>
+              </a:rPr>
+              <a:t>500 points · 6 tasks · synthetic stand-in</a:t>
+            </a:r>
+            <a:endParaRPr lang="en-US" sz="1100" dirty="0"/>
+          </a:p>
+        </p:txBody>
+      </p:sp>
+      <p:sp>
+        <p:nvSpPr>
+          <p:cNvPr id="5" name="visibility_matrix()"/>
+          <p:cNvSpPr txBox="1"/>
+          <p:nvPr/>
+        </p:nvSpPr>
+        <p:spPr>
+          <a:xfrm>
+            <a:off x="2606040" y="1554480"/>
+            <a:ext cx="1920240" cy="868680"/>
+          </a:xfrm>
+          <a:prstGeom prst="roundRect">
+            <a:avLst>
+              <a:gd name="adj" fmla="val 8421"/>
+            </a:avLst>
+          </a:prstGeom>
+          <a:solidFill>
+            <a:schemeClr val="accent1"/>
+          </a:solidFill>
+          <a:ln/>
+        </p:spPr>
+        <p:txBody>
+          <a:bodyPr wrap="square" lIns="38100" tIns="38100" rIns="38100" bIns="38100" rtlCol="0" anchor="ctr"/>
+          <a:lstStyle/>
+          <a:p>
+            <a:pPr algn="ctr" indent="0" marL="0">
+              <a:buNone/>
+            </a:pPr>
+            <a:r>
+              <a:rPr lang="en-US" sz="850" b="1" dirty="0">
+                <a:solidFill>
+                  <a:schemeClr val="bg1"/>
+                </a:solidFill>
+                <a:latin typeface="Courier New" pitchFamily="34" charset="0"/>
+                <a:ea typeface="Courier New" pitchFamily="34" charset="-122"/>
+                <a:cs typeface="Courier New" pitchFamily="34" charset="-120"/>
+              </a:rPr>
+              <a:t>visibility_matrix()</a:t>
+            </a:r>
+            <a:endParaRPr lang="en-US" sz="850" dirty="0"/>
+          </a:p>
+          <a:p>
+            <a:pPr algn="ctr" indent="0" marL="0">
+              <a:buNone/>
+            </a:pPr>
+            <a:r>
+              <a:rPr lang="en-US" sz="1000" dirty="0">
+                <a:solidFill>
+                  <a:schemeClr val="bg1"/>
+                </a:solidFill>
+              </a:rPr>
+              <a:t>range · incidence · ray-cast</a:t>
+            </a:r>
+            <a:endParaRPr lang="en-US" sz="850" dirty="0"/>
+          </a:p>
+        </p:txBody>
+      </p:sp>
+      <p:sp>
+        <p:nvSpPr>
+          <p:cNvPr id="6" name="design_point_covariances()"/>
+          <p:cNvSpPr txBox="1"/>
+          <p:nvPr/>
+        </p:nvSpPr>
+        <p:spPr>
+          <a:xfrm>
+            <a:off x="4617720" y="1554480"/>
+            <a:ext cx="1920240" cy="868680"/>
+          </a:xfrm>
+          <a:prstGeom prst="roundRect">
+            <a:avLst>
+              <a:gd name="adj" fmla="val 8421"/>
+            </a:avLst>
+          </a:prstGeom>
+          <a:solidFill>
+            <a:schemeClr val="accent1"/>
+          </a:solidFill>
+          <a:ln/>
+        </p:spPr>
+        <p:txBody>
+          <a:bodyPr wrap="square" lIns="38100" tIns="38100" rIns="38100" bIns="38100" rtlCol="0" anchor="ctr"/>
+          <a:lstStyle/>
+          <a:p>
+            <a:pPr algn="ctr" indent="0" marL="0">
+              <a:buNone/>
+            </a:pPr>
+            <a:r>
+              <a:rPr lang="en-US" sz="850" b="1" dirty="0">
+                <a:solidFill>
+                  <a:schemeClr val="bg1"/>
+                </a:solidFill>
+                <a:latin typeface="Courier New" pitchFamily="34" charset="0"/>
+                <a:ea typeface="Courier New" pitchFamily="34" charset="-122"/>
+                <a:cs typeface="Courier New" pitchFamily="34" charset="-120"/>
+              </a:rPr>
+              <a:t>design_point_covariances()</a:t>
+            </a:r>
+            <a:endParaRPr lang="en-US" sz="850" dirty="0"/>
+          </a:p>
+          <a:p>
+            <a:pPr algn="ctr" indent="0" marL="0">
+              <a:buNone/>
+            </a:pPr>
+            <a:r>
+              <a:rPr lang="en-US" sz="1000" dirty="0">
+                <a:solidFill>
+                  <a:schemeClr val="bg1"/>
+                </a:solidFill>
+              </a:rPr>
+              <a:t>rigid network, or rejected</a:t>
+            </a:r>
+            <a:endParaRPr lang="en-US" sz="850" dirty="0"/>
+          </a:p>
+        </p:txBody>
+      </p:sp>
+      <p:sp>
+        <p:nvSpPr>
+          <p:cNvPr id="7" name="projected_uncertainty_m()"/>
+          <p:cNvSpPr txBox="1"/>
+          <p:nvPr/>
+        </p:nvSpPr>
+        <p:spPr>
+          <a:xfrm>
+            <a:off x="6629400" y="1554480"/>
+            <a:ext cx="1920240" cy="868680"/>
+          </a:xfrm>
+          <a:prstGeom prst="roundRect">
+            <a:avLst>
+              <a:gd name="adj" fmla="val 8421"/>
+            </a:avLst>
+          </a:prstGeom>
+          <a:solidFill>
+            <a:schemeClr val="accent1"/>
+          </a:solidFill>
+          <a:ln/>
+        </p:spPr>
+        <p:txBody>
+          <a:bodyPr wrap="square" lIns="38100" tIns="38100" rIns="38100" bIns="38100" rtlCol="0" anchor="ctr"/>
+          <a:lstStyle/>
+          <a:p>
+            <a:pPr algn="ctr" indent="0" marL="0">
+              <a:buNone/>
+            </a:pPr>
+            <a:r>
+              <a:rPr lang="en-US" sz="850" b="1" dirty="0">
+                <a:solidFill>
+                  <a:schemeClr val="bg1"/>
+                </a:solidFill>
+                <a:latin typeface="Courier New" pitchFamily="34" charset="0"/>
+                <a:ea typeface="Courier New" pitchFamily="34" charset="-122"/>
+                <a:cs typeface="Courier New" pitchFamily="34" charset="-120"/>
+              </a:rPr>
+              <a:t>projected_uncertainty_m()</a:t>
+            </a:r>
+            <a:endParaRPr lang="en-US" sz="850" dirty="0"/>
+          </a:p>
+          <a:p>
+            <a:pPr algn="ctr" indent="0" marL="0">
+              <a:buNone/>
+            </a:pPr>
+            <a:r>
+              <a:rPr lang="en-US" sz="1000" dirty="0">
+                <a:solidFill>
+                  <a:schemeClr val="bg1"/>
+                </a:solidFill>
+              </a:rPr>
+              <a:t>u along the surface normal</a:t>
+            </a:r>
+            <a:endParaRPr lang="en-US" sz="850" dirty="0"/>
+          </a:p>
+        </p:txBody>
+      </p:sp>
+      <p:sp>
+        <p:nvSpPr>
+          <p:cNvPr id="8" name="RiskTable"/>
+          <p:cNvSpPr txBox="1"/>
+          <p:nvPr/>
+        </p:nvSpPr>
+        <p:spPr>
+          <a:xfrm>
+            <a:off x="8641080" y="1554480"/>
+            <a:ext cx="1920240" cy="868680"/>
+          </a:xfrm>
+          <a:prstGeom prst="roundRect">
+            <a:avLst>
+              <a:gd name="adj" fmla="val 8421"/>
+            </a:avLst>
+          </a:prstGeom>
+          <a:solidFill>
+            <a:schemeClr val="accent1"/>
+          </a:solidFill>
+          <a:ln/>
+        </p:spPr>
+        <p:txBody>
+          <a:bodyPr wrap="square" lIns="38100" tIns="38100" rIns="38100" bIns="38100" rtlCol="0" anchor="ctr"/>
+          <a:lstStyle/>
+          <a:p>
+            <a:pPr algn="ctr" indent="0" marL="0">
+              <a:buNone/>
+            </a:pPr>
+            <a:r>
+              <a:rPr lang="en-US" sz="850" b="1" dirty="0">
+                <a:solidFill>
+                  <a:schemeClr val="bg1"/>
+                </a:solidFill>
+                <a:latin typeface="Courier New" pitchFamily="34" charset="0"/>
+                <a:ea typeface="Courier New" pitchFamily="34" charset="-122"/>
+                <a:cs typeface="Courier New" pitchFamily="34" charset="-120"/>
+              </a:rPr>
+              <a:t>RiskTable</a:t>
+            </a:r>
+            <a:endParaRPr lang="en-US" sz="850" dirty="0"/>
+          </a:p>
+          <a:p>
+            <a:pPr algn="ctr" indent="0" marL="0">
+              <a:buNone/>
+            </a:pPr>
+            <a:r>
+              <a:rPr lang="en-US" sz="1000" dirty="0">
+                <a:solidFill>
+                  <a:schemeClr val="bg1"/>
+                </a:solidFill>
+              </a:rPr>
+              <a:t>JCGM 106 · cluster priors</a:t>
+            </a:r>
+            <a:endParaRPr lang="en-US" sz="850" dirty="0"/>
+          </a:p>
+        </p:txBody>
+      </p:sp>
+      <p:sp>
+        <p:nvSpPr>
+          <p:cNvPr id="9" name="Shape 7"/>
+          <p:cNvSpPr/>
+          <p:nvPr/>
+        </p:nvSpPr>
+        <p:spPr>
+          <a:xfrm>
+            <a:off x="2468880" y="1988820"/>
+            <a:ext cx="137160" cy="0"/>
+          </a:xfrm>
+          <a:prstGeom prst="line">
+            <a:avLst/>
+          </a:prstGeom>
+          <a:noFill/>
+          <a:ln w="19050">
+            <a:solidFill>
+              <a:schemeClr val="accent4"/>
+            </a:solidFill>
+            <a:prstDash val="solid"/>
+            <a:tailEnd type="triangle"/>
+          </a:ln>
+        </p:spPr>
+      </p:sp>
+      <p:sp>
+        <p:nvSpPr>
+          <p:cNvPr id="10" name="Shape 8"/>
+          <p:cNvSpPr/>
+          <p:nvPr/>
+        </p:nvSpPr>
+        <p:spPr>
+          <a:xfrm>
+            <a:off x="4526280" y="1988820"/>
+            <a:ext cx="91440" cy="0"/>
+          </a:xfrm>
+          <a:prstGeom prst="line">
+            <a:avLst/>
+          </a:prstGeom>
+          <a:noFill/>
+          <a:ln w="19050">
+            <a:solidFill>
+              <a:schemeClr val="accent4"/>
+            </a:solidFill>
+            <a:prstDash val="solid"/>
+            <a:tailEnd type="triangle"/>
+          </a:ln>
+        </p:spPr>
+      </p:sp>
+      <p:sp>
+        <p:nvSpPr>
+          <p:cNvPr id="11" name="Shape 9"/>
+          <p:cNvSpPr/>
+          <p:nvPr/>
+        </p:nvSpPr>
+        <p:spPr>
+          <a:xfrm>
+            <a:off x="6537960" y="1988820"/>
+            <a:ext cx="91440" cy="0"/>
+          </a:xfrm>
+          <a:prstGeom prst="line">
+            <a:avLst/>
+          </a:prstGeom>
+          <a:noFill/>
+          <a:ln w="19050">
+            <a:solidFill>
+              <a:schemeClr val="accent4"/>
+            </a:solidFill>
+            <a:prstDash val="solid"/>
+            <a:tailEnd type="triangle"/>
+          </a:ln>
+        </p:spPr>
+      </p:sp>
+      <p:sp>
+        <p:nvSpPr>
+          <p:cNvPr id="12" name="Shape 10"/>
+          <p:cNvSpPr/>
+          <p:nvPr/>
+        </p:nvSpPr>
+        <p:spPr>
+          <a:xfrm>
+            <a:off x="8549640" y="1988820"/>
+            <a:ext cx="91440" cy="0"/>
+          </a:xfrm>
+          <a:prstGeom prst="line">
+            <a:avLst/>
+          </a:prstGeom>
+          <a:noFill/>
+          <a:ln w="19050">
+            <a:solidFill>
+              <a:schemeClr val="accent4"/>
+            </a:solidFill>
+            <a:prstDash val="solid"/>
+            <a:tailEnd type="triangle"/>
+          </a:ln>
+        </p:spPr>
+      </p:sp>
+      <p:sp>
+        <p:nvSpPr>
+          <p:cNvPr id="13" name="Plan U · uncertainty-driven"/>
+          <p:cNvSpPr txBox="1"/>
+          <p:nvPr/>
+        </p:nvSpPr>
+        <p:spPr>
+          <a:xfrm>
+            <a:off x="548640" y="2697480"/>
+            <a:ext cx="5394960" cy="868680"/>
+          </a:xfrm>
+          <a:prstGeom prst="roundRect">
+            <a:avLst>
+              <a:gd name="adj" fmla="val 8421"/>
+            </a:avLst>
+          </a:prstGeom>
+          <a:solidFill>
+            <a:schemeClr val="accent1"/>
+          </a:solidFill>
+          <a:ln/>
+        </p:spPr>
+        <p:txBody>
+          <a:bodyPr wrap="square" lIns="63500" tIns="63500" rIns="63500" bIns="63500" rtlCol="0" anchor="ctr"/>
+          <a:lstStyle/>
+          <a:p>
+            <a:pPr algn="ctr" indent="0" marL="0">
+              <a:buNone/>
+            </a:pPr>
+            <a:r>
+              <a:rPr lang="en-US" sz="1300" b="1" dirty="0">
+                <a:solidFill>
+                  <a:schemeClr val="bg1"/>
+                </a:solidFill>
+              </a:rPr>
+              <a:t>Plan U · uncertainty-driven</a:t>
+            </a:r>
+            <a:endParaRPr lang="en-US" sz="1300" dirty="0"/>
+          </a:p>
+          <a:p>
+            <a:pPr algn="ctr" indent="0" marL="0">
+              <a:buNone/>
+            </a:pPr>
+            <a:r>
+              <a:rPr lang="en-US" sz="1100" dirty="0">
+                <a:solidFill>
+                  <a:schemeClr val="bg1"/>
+                </a:solidFill>
+              </a:rPr>
+              <a:t>A-optimal: minimise mean variance, every point measured; station count from the knee of the curve</a:t>
+            </a:r>
+            <a:endParaRPr lang="en-US" sz="1300" dirty="0"/>
+          </a:p>
+        </p:txBody>
+      </p:sp>
+      <p:sp>
+        <p:nvSpPr>
+          <p:cNvPr id="14" name="Plan R · risk-driven"/>
+          <p:cNvSpPr txBox="1"/>
+          <p:nvPr/>
+        </p:nvSpPr>
+        <p:spPr>
+          <a:xfrm>
+            <a:off x="6217920" y="2697480"/>
+            <a:ext cx="5394960" cy="868680"/>
+          </a:xfrm>
+          <a:prstGeom prst="roundRect">
+            <a:avLst>
+              <a:gd name="adj" fmla="val 8421"/>
+            </a:avLst>
+          </a:prstGeom>
+          <a:solidFill>
+            <a:schemeClr val="accent1"/>
+          </a:solidFill>
+          <a:ln/>
+        </p:spPr>
+        <p:txBody>
+          <a:bodyPr wrap="square" lIns="63500" tIns="63500" rIns="63500" bIns="63500" rtlCol="0" anchor="ctr"/>
+          <a:lstStyle/>
+          <a:p>
+            <a:pPr algn="ctr" indent="0" marL="0">
+              <a:buNone/>
+            </a:pPr>
+            <a:r>
+              <a:rPr lang="en-US" sz="1300" b="1" dirty="0">
+                <a:solidFill>
+                  <a:schemeClr val="bg1"/>
+                </a:solidFill>
+              </a:rPr>
+              <a:t>Plan R · risk-driven</a:t>
+            </a:r>
+            <a:endParaRPr lang="en-US" sz="1300" dirty="0"/>
+          </a:p>
+          <a:p>
+            <a:pPr algn="ctr" indent="0" marL="0">
+              <a:buNone/>
+            </a:pPr>
+            <a:r>
+              <a:rPr lang="en-US" sz="1100" dirty="0">
+                <a:solidFill>
+                  <a:schemeClr val="bg1"/>
+                </a:solidFill>
+              </a:rPr>
+              <a:t>fewest stations with P(escape) and E[false rejects] within a limit; unmeasured points priced at process risk</a:t>
+            </a:r>
+            <a:endParaRPr lang="en-US" sz="1300" dirty="0"/>
+          </a:p>
+        </p:txBody>
+      </p:sp>
+      <p:sp>
+        <p:nvSpPr>
+          <p:cNvPr id="15" name="Shape 13"/>
+          <p:cNvSpPr/>
+          <p:nvPr/>
+        </p:nvSpPr>
+        <p:spPr>
+          <a:xfrm>
+            <a:off x="9601200" y="2423160"/>
+            <a:ext cx="0" cy="274320"/>
+          </a:xfrm>
+          <a:prstGeom prst="line">
+            <a:avLst/>
+          </a:prstGeom>
+          <a:noFill/>
+          <a:ln w="19050">
+            <a:solidFill>
+              <a:schemeClr val="accent4"/>
+            </a:solidFill>
+            <a:prstDash val="dash"/>
+            <a:tailEnd type="triangle"/>
+          </a:ln>
+        </p:spPr>
+      </p:sp>
+      <p:pic>
+        <p:nvPicPr>
+          <p:cNvPr id="16" name="Image 0" descr="Panel 10c: criterion and risk versus station count">    </p:cNvPr>
+          <p:cNvPicPr>
+            <a:picLocks noChangeAspect="1"/>
+          </p:cNvPicPr>
+          <p:nvPr/>
+        </p:nvPicPr>
+        <p:blipFill>
+          <a:blip r:embed="rId1"/>
+          <a:stretch>
+            <a:fillRect/>
+          </a:stretch>
+        </p:blipFill>
+        <p:spPr>
+          <a:xfrm>
+            <a:off x="548640" y="3840480"/>
+            <a:ext cx="5943600" cy="1803575"/>
+          </a:xfrm>
+          <a:prstGeom prst="rect">
+            <a:avLst/>
+          </a:prstGeom>
+        </p:spPr>
+      </p:pic>
+      <p:sp>
+        <p:nvSpPr>
+          <p:cNvPr id="17" name="Shape 14"/>
+          <p:cNvSpPr/>
+          <p:nvPr/>
+        </p:nvSpPr>
+        <p:spPr>
+          <a:xfrm>
+            <a:off x="548640" y="3840480"/>
+            <a:ext cx="5943600" cy="1803575"/>
+          </a:xfrm>
+          <a:prstGeom prst="rect">
+            <a:avLst/>
+          </a:prstGeom>
+          <a:ln w="12700">
+            <a:solidFill>
+              <a:schemeClr val="bg2"/>
+            </a:solidFill>
+            <a:prstDash val="solid"/>
+          </a:ln>
+        </p:spPr>
+      </p:sp>
+      <p:sp>
+        <p:nvSpPr>
+          <p:cNvPr id="18" name="Text 15"/>
+          <p:cNvSpPr txBox="1"/>
+          <p:nvPr/>
+        </p:nvSpPr>
+        <p:spPr>
+          <a:xfrm>
+            <a:off x="548640" y="5698919"/>
+            <a:ext cx="5943600" cy="274320"/>
+          </a:xfrm>
+          <a:prstGeom prst="rect">
+            <a:avLst/>
+          </a:prstGeom>
+          <a:noFill/>
+          <a:ln/>
+        </p:spPr>
+        <p:txBody>
+          <a:bodyPr wrap="square" lIns="0" tIns="0" rIns="0" bIns="0" rtlCol="0" anchor="ctr"/>
+          <a:lstStyle/>
+          <a:p>
+            <a:pPr algn="ctr" indent="0" marL="0">
+              <a:buNone/>
+            </a:pPr>
+            <a:r>
+              <a:rPr lang="en-US" sz="1050" i="1" dirty="0">
+                <a:solidFill>
+                  <a:schemeClr val="tx2"/>
+                </a:solidFill>
+              </a:rPr>
+              <a:t>same GA, bounds and seeding for both plans; only the objective differs</a:t>
+            </a:r>
+            <a:endParaRPr lang="en-US" sz="1050" dirty="0"/>
+          </a:p>
+        </p:txBody>
+      </p:sp>
+      <p:sp>
+        <p:nvSpPr>
+          <p:cNvPr id="19" name="Shape 16"/>
+          <p:cNvSpPr/>
+          <p:nvPr/>
+        </p:nvSpPr>
+        <p:spPr>
+          <a:xfrm>
+            <a:off x="6675120" y="3840480"/>
+            <a:ext cx="1572768" cy="1371600"/>
+          </a:xfrm>
+          <a:prstGeom prst="roundRect">
+            <a:avLst>
+              <a:gd name="adj" fmla="val 5333"/>
+            </a:avLst>
+          </a:prstGeom>
+          <a:solidFill>
+            <a:schemeClr val="bg2"/>
+          </a:solidFill>
+          <a:ln/>
+        </p:spPr>
+      </p:sp>
+      <p:sp>
+        <p:nvSpPr>
+          <p:cNvPr id="20" name="Text 17"/>
+          <p:cNvSpPr txBox="1"/>
+          <p:nvPr/>
+        </p:nvSpPr>
+        <p:spPr>
+          <a:xfrm>
+            <a:off x="6812280" y="3886200"/>
+            <a:ext cx="1298448" cy="795528"/>
+          </a:xfrm>
+          <a:prstGeom prst="rect">
+            <a:avLst/>
+          </a:prstGeom>
+          <a:noFill/>
+          <a:ln/>
+        </p:spPr>
+        <p:txBody>
+          <a:bodyPr wrap="square" lIns="0" tIns="0" rIns="0" bIns="0" rtlCol="0" anchor="b"/>
+          <a:lstStyle/>
+          <a:p>
             <a:pPr algn="l" indent="0" marL="0">
               <a:buNone/>
             </a:pPr>
             <a:r>
-              <a:rPr lang="en-US" sz="4000" b="1" dirty="0">
-                <a:solidFill>
-                  <a:schemeClr val="bg1"/>
-                </a:solidFill>
-              </a:rPr>
-              <a:t>From code to figures</a:t>
-            </a:r>
-            <a:endParaRPr lang="en-US" sz="4000" dirty="0"/>
-          </a:p>
-        </p:txBody>
-      </p:sp>
-      <p:sp>
-        <p:nvSpPr>
-          <p:cNvPr id="4" name="Text 0"/>
-          <p:cNvSpPr/>
-          <p:nvPr>
-            <p:ph idx="102" type="body" hasCustomPrompt="1"/>
-          </p:nvPr>
-        </p:nvSpPr>
-        <p:spPr>
-          <a:xfrm>
-            <a:off x="731520" y="3794760"/>
-            <a:ext cx="7315200" cy="1005840"/>
-          </a:xfrm>
-          <a:prstGeom prst="rect">
-            <a:avLst/>
-          </a:prstGeom>
-          <a:noFill/>
-          <a:ln/>
-        </p:spPr>
-        <p:txBody>
-          <a:bodyPr wrap="square" rtlCol="0" anchor="t"/>
-          <a:lstStyle/>
-          <a:p>
-            <a:pPr indent="0" marL="0">
-              <a:buNone/>
-            </a:pPr>
-            <a:r>
-              <a:rPr lang="en-US" sz="1800" dirty="0">
-                <a:solidFill>
-                  <a:schemeClr val="accent5"/>
-                </a:solidFill>
-              </a:rPr>
-              <a:t>Which function draws which figure, and how each result is checked</a:t>
-            </a:r>
-            <a:endParaRPr lang="en-US" sz="1800" dirty="0"/>
-          </a:p>
-        </p:txBody>
-      </p:sp>
-      <p:sp>
-        <p:nvSpPr>
-          <p:cNvPr id="5" name="section numeral"/>
-          <p:cNvSpPr txBox="1"/>
-          <p:nvPr/>
-        </p:nvSpPr>
-        <p:spPr>
-          <a:xfrm>
-            <a:off x="8503920" y="1280160"/>
-            <a:ext cx="3108960" cy="3840480"/>
-          </a:xfrm>
-          <a:prstGeom prst="rect">
-            <a:avLst/>
-          </a:prstGeom>
-          <a:noFill/>
-          <a:ln/>
-        </p:spPr>
-        <p:txBody>
-          <a:bodyPr wrap="square" lIns="0" tIns="0" rIns="0" bIns="0" rtlCol="0" anchor="ctr"/>
-          <a:lstStyle/>
-          <a:p>
-            <a:pPr algn="r" indent="0" marL="0">
-              <a:buNone/>
-            </a:pPr>
-            <a:r>
-              <a:rPr lang="en-US" sz="24000" b="1" dirty="0">
+              <a:rPr lang="en-US" sz="3200" b="1" dirty="0">
                 <a:solidFill>
                   <a:schemeClr val="accent1"/>
                 </a:solidFill>
@@ -9722,9 +10573,296 @@
                 <a:ea typeface="Cambria" pitchFamily="34" charset="-122"/>
                 <a:cs typeface="Cambria" pitchFamily="34" charset="-120"/>
               </a:rPr>
-              <a:t>3</a:t>
-            </a:r>
-            <a:endParaRPr lang="en-US" sz="24000" dirty="0"/>
+              <a:t>9 → 3</a:t>
+            </a:r>
+            <a:endParaRPr lang="en-US" sz="3200" dirty="0"/>
+          </a:p>
+        </p:txBody>
+      </p:sp>
+      <p:sp>
+        <p:nvSpPr>
+          <p:cNvPr id="21" name="Text 18"/>
+          <p:cNvSpPr txBox="1"/>
+          <p:nvPr/>
+        </p:nvSpPr>
+        <p:spPr>
+          <a:xfrm>
+            <a:off x="6812280" y="4690872"/>
+            <a:ext cx="1298448" cy="452628"/>
+          </a:xfrm>
+          <a:prstGeom prst="rect">
+            <a:avLst/>
+          </a:prstGeom>
+          <a:noFill/>
+          <a:ln/>
+        </p:spPr>
+        <p:txBody>
+          <a:bodyPr wrap="square" lIns="0" tIns="0" rIns="0" bIns="0" rtlCol="0" anchor="t"/>
+          <a:lstStyle/>
+          <a:p>
+            <a:pPr algn="l" indent="0" marL="0">
+              <a:buNone/>
+            </a:pPr>
+            <a:r>
+              <a:rPr lang="en-US" sz="1200" dirty="0">
+                <a:solidFill>
+                  <a:schemeClr val="tx2"/>
+                </a:solidFill>
+              </a:rPr>
+              <a:t>stations: U vs R held to U's own risk</a:t>
+            </a:r>
+            <a:endParaRPr lang="en-US" sz="1200" dirty="0"/>
+          </a:p>
+        </p:txBody>
+      </p:sp>
+      <p:sp>
+        <p:nvSpPr>
+          <p:cNvPr id="22" name="Shape 19"/>
+          <p:cNvSpPr/>
+          <p:nvPr/>
+        </p:nvSpPr>
+        <p:spPr>
+          <a:xfrm>
+            <a:off x="8311896" y="3840480"/>
+            <a:ext cx="1572768" cy="1371600"/>
+          </a:xfrm>
+          <a:prstGeom prst="roundRect">
+            <a:avLst>
+              <a:gd name="adj" fmla="val 5333"/>
+            </a:avLst>
+          </a:prstGeom>
+          <a:solidFill>
+            <a:schemeClr val="bg2"/>
+          </a:solidFill>
+          <a:ln/>
+        </p:spPr>
+      </p:sp>
+      <p:sp>
+        <p:nvSpPr>
+          <p:cNvPr id="23" name="Text 20"/>
+          <p:cNvSpPr txBox="1"/>
+          <p:nvPr/>
+        </p:nvSpPr>
+        <p:spPr>
+          <a:xfrm>
+            <a:off x="8449056" y="3886200"/>
+            <a:ext cx="1298448" cy="795528"/>
+          </a:xfrm>
+          <a:prstGeom prst="rect">
+            <a:avLst/>
+          </a:prstGeom>
+          <a:noFill/>
+          <a:ln/>
+        </p:spPr>
+        <p:txBody>
+          <a:bodyPr wrap="square" lIns="0" tIns="0" rIns="0" bIns="0" rtlCol="0" anchor="b"/>
+          <a:lstStyle/>
+          <a:p>
+            <a:pPr algn="l" indent="0" marL="0">
+              <a:buNone/>
+            </a:pPr>
+            <a:r>
+              <a:rPr lang="en-US" sz="3200" b="1" dirty="0">
+                <a:solidFill>
+                  <a:schemeClr val="accent1"/>
+                </a:solidFill>
+                <a:latin typeface="Cambria" pitchFamily="34" charset="0"/>
+                <a:ea typeface="Cambria" pitchFamily="34" charset="-122"/>
+                <a:cs typeface="Cambria" pitchFamily="34" charset="-120"/>
+              </a:rPr>
+              <a:t>−41%</a:t>
+            </a:r>
+            <a:endParaRPr lang="en-US" sz="3200" dirty="0"/>
+          </a:p>
+        </p:txBody>
+      </p:sp>
+      <p:sp>
+        <p:nvSpPr>
+          <p:cNvPr id="24" name="Text 21"/>
+          <p:cNvSpPr txBox="1"/>
+          <p:nvPr/>
+        </p:nvSpPr>
+        <p:spPr>
+          <a:xfrm>
+            <a:off x="8449056" y="4690872"/>
+            <a:ext cx="1298448" cy="452628"/>
+          </a:xfrm>
+          <a:prstGeom prst="rect">
+            <a:avLst/>
+          </a:prstGeom>
+          <a:noFill/>
+          <a:ln/>
+        </p:spPr>
+        <p:txBody>
+          <a:bodyPr wrap="square" lIns="0" tIns="0" rIns="0" bIns="0" rtlCol="0" anchor="t"/>
+          <a:lstStyle/>
+          <a:p>
+            <a:pPr algn="l" indent="0" marL="0">
+              <a:buNone/>
+            </a:pPr>
+            <a:r>
+              <a:rPr lang="en-US" sz="1200" dirty="0">
+                <a:solidFill>
+                  <a:schemeClr val="tx2"/>
+                </a:solidFill>
+              </a:rPr>
+              <a:t>shots (1151 → 679)</a:t>
+            </a:r>
+            <a:endParaRPr lang="en-US" sz="1200" dirty="0"/>
+          </a:p>
+        </p:txBody>
+      </p:sp>
+      <p:sp>
+        <p:nvSpPr>
+          <p:cNvPr id="25" name="Shape 22"/>
+          <p:cNvSpPr/>
+          <p:nvPr/>
+        </p:nvSpPr>
+        <p:spPr>
+          <a:xfrm>
+            <a:off x="9948672" y="3840480"/>
+            <a:ext cx="1572768" cy="1371600"/>
+          </a:xfrm>
+          <a:prstGeom prst="roundRect">
+            <a:avLst>
+              <a:gd name="adj" fmla="val 5333"/>
+            </a:avLst>
+          </a:prstGeom>
+          <a:solidFill>
+            <a:schemeClr val="bg2"/>
+          </a:solidFill>
+          <a:ln/>
+        </p:spPr>
+      </p:sp>
+      <p:sp>
+        <p:nvSpPr>
+          <p:cNvPr id="26" name="Text 23"/>
+          <p:cNvSpPr txBox="1"/>
+          <p:nvPr/>
+        </p:nvSpPr>
+        <p:spPr>
+          <a:xfrm>
+            <a:off x="10085832" y="3886200"/>
+            <a:ext cx="1298448" cy="795528"/>
+          </a:xfrm>
+          <a:prstGeom prst="rect">
+            <a:avLst/>
+          </a:prstGeom>
+          <a:noFill/>
+          <a:ln/>
+        </p:spPr>
+        <p:txBody>
+          <a:bodyPr wrap="square" lIns="0" tIns="0" rIns="0" bIns="0" rtlCol="0" anchor="b"/>
+          <a:lstStyle/>
+          <a:p>
+            <a:pPr algn="l" indent="0" marL="0">
+              <a:buNone/>
+            </a:pPr>
+            <a:r>
+              <a:rPr lang="en-US" sz="3200" b="1" dirty="0">
+                <a:solidFill>
+                  <a:schemeClr val="accent3"/>
+                </a:solidFill>
+                <a:latin typeface="Cambria" pitchFamily="34" charset="0"/>
+                <a:ea typeface="Cambria" pitchFamily="34" charset="-122"/>
+                <a:cs typeface="Cambria" pitchFamily="34" charset="-120"/>
+              </a:rPr>
+              <a:t>29×</a:t>
+            </a:r>
+            <a:endParaRPr lang="en-US" sz="3200" dirty="0"/>
+          </a:p>
+        </p:txBody>
+      </p:sp>
+      <p:sp>
+        <p:nvSpPr>
+          <p:cNvPr id="27" name="Text 24"/>
+          <p:cNvSpPr txBox="1"/>
+          <p:nvPr/>
+        </p:nvSpPr>
+        <p:spPr>
+          <a:xfrm>
+            <a:off x="10085832" y="4690872"/>
+            <a:ext cx="1298448" cy="452628"/>
+          </a:xfrm>
+          <a:prstGeom prst="rect">
+            <a:avLst/>
+          </a:prstGeom>
+          <a:noFill/>
+          <a:ln/>
+        </p:spPr>
+        <p:txBody>
+          <a:bodyPr wrap="square" lIns="0" tIns="0" rIns="0" bIns="0" rtlCol="0" anchor="t"/>
+          <a:lstStyle/>
+          <a:p>
+            <a:pPr algn="l" indent="0" marL="0">
+              <a:buNone/>
+            </a:pPr>
+            <a:r>
+              <a:rPr lang="en-US" sz="1200" dirty="0">
+                <a:solidFill>
+                  <a:schemeClr val="tx2"/>
+                </a:solidFill>
+              </a:rPr>
+              <a:t>fewer expected false rejects</a:t>
+            </a:r>
+            <a:endParaRPr lang="en-US" sz="1200" dirty="0"/>
+          </a:p>
+        </p:txBody>
+      </p:sp>
+      <p:sp>
+        <p:nvSpPr>
+          <p:cNvPr id="28" name="CAVEAT callout"/>
+          <p:cNvSpPr txBox="1"/>
+          <p:nvPr/>
+        </p:nvSpPr>
+        <p:spPr>
+          <a:xfrm>
+            <a:off x="6675120" y="5321808"/>
+            <a:ext cx="4846320" cy="868680"/>
+          </a:xfrm>
+          <a:prstGeom prst="roundRect">
+            <a:avLst>
+              <a:gd name="adj" fmla="val 8421"/>
+            </a:avLst>
+          </a:prstGeom>
+          <a:solidFill>
+            <a:schemeClr val="accent3">
+              <a:alpha val="12000"/>
+            </a:schemeClr>
+          </a:solidFill>
+          <a:ln w="12700">
+            <a:solidFill>
+              <a:schemeClr val="accent3"/>
+            </a:solidFill>
+          </a:ln>
+        </p:spPr>
+        <p:txBody>
+          <a:bodyPr wrap="square" lIns="101600" tIns="101600" rIns="101600" bIns="101600" rtlCol="0" anchor="ctr"/>
+          <a:lstStyle/>
+          <a:p>
+            <a:pPr algn="l" indent="0" marL="0">
+              <a:buNone/>
+            </a:pPr>
+            <a:r>
+              <a:rPr lang="en-US" sz="1100" b="1" dirty="0">
+                <a:solidFill>
+                  <a:schemeClr val="accent3"/>
+                </a:solidFill>
+              </a:rPr>
+              <a:t>CAVEAT   </a:t>
+            </a:r>
+            <a:pPr algn="l" indent="0" marL="0">
+              <a:buNone/>
+            </a:pPr>
+            <a:r>
+              <a:rPr lang="en-US" sz="1100" dirty="0">
+                <a:solidFill>
+                  <a:schemeClr val="tx1"/>
+                </a:solidFill>
+              </a:rPr>
+              <a:t>synthetic part, placeholder process clusters and priors. No published aerospace false-accept limit exists, so R is held to U's realised risk, not an invented one.</a:t>
+            </a:r>
+            <a:endParaRPr lang="en-US" sz="1100" dirty="0"/>
           </a:p>
         </p:txBody>
       </p:sp>
@@ -9830,7 +10968,7 @@
                   <a:schemeClr val="tx1"/>
                 </a:solidFill>
               </a:rPr>
-              <a:t>Every figure and the function that draws it</a:t>
+              <a:t>What the saving depends on</a:t>
             </a:r>
             <a:endParaRPr lang="en-US" sz="3400" dirty="0"/>
           </a:p>
@@ -9868,1193 +11006,262 @@
                   <a:schemeClr val="tx2"/>
                 </a:solidFill>
               </a:rPr>
-              <a:t>Two entry points: panels 1–8 are identical on every run; panel 9 is a GA run</a:t>
+              <a:t>17 one-at-a-time changes; each is a full search (panel 10d)</a:t>
             </a:r>
             <a:endParaRPr lang="en-US" sz="1600" dirty="0"/>
           </a:p>
         </p:txBody>
       </p:sp>
-      <p:sp>
-        <p:nvSpPr>
-          <p:cNvPr id="4" name="viz/make_figures.py"/>
-          <p:cNvSpPr txBox="1"/>
-          <p:nvPr/>
-        </p:nvSpPr>
-        <p:spPr>
-          <a:xfrm>
-            <a:off x="548640" y="1572768"/>
-            <a:ext cx="2148840" cy="3858768"/>
+      <p:pic>
+        <p:nvPicPr>
+          <p:cNvPr id="4" name="Image 0" descr="Panel 10d: stations needed by each plan across variants">    </p:cNvPr>
+          <p:cNvPicPr>
+            <a:picLocks noChangeAspect="1"/>
+          </p:cNvPicPr>
+          <p:nvPr/>
+        </p:nvPicPr>
+        <p:blipFill>
+          <a:blip r:embed="rId1"/>
+          <a:stretch>
+            <a:fillRect/>
+          </a:stretch>
+        </p:blipFill>
+        <p:spPr>
+          <a:xfrm>
+            <a:off x="548640" y="1508760"/>
+            <a:ext cx="2773540" cy="4663440"/>
+          </a:xfrm>
+          <a:prstGeom prst="rect">
+            <a:avLst/>
+          </a:prstGeom>
+        </p:spPr>
+      </p:pic>
+      <p:sp>
+        <p:nvSpPr>
+          <p:cNvPr id="5" name="Shape 2"/>
+          <p:cNvSpPr/>
+          <p:nvPr/>
+        </p:nvSpPr>
+        <p:spPr>
+          <a:xfrm>
+            <a:off x="548640" y="1508760"/>
+            <a:ext cx="2773540" cy="4663440"/>
+          </a:xfrm>
+          <a:prstGeom prst="rect">
+            <a:avLst/>
+          </a:prstGeom>
+          <a:ln w="12700">
+            <a:solidFill>
+              <a:schemeClr val="bg2"/>
+            </a:solidFill>
+            <a:prstDash val="solid"/>
+          </a:ln>
+        </p:spPr>
+      </p:sp>
+      <p:sp>
+        <p:nvSpPr>
+          <p:cNvPr id="6" name="ROBUST callout"/>
+          <p:cNvSpPr txBox="1"/>
+          <p:nvPr/>
+        </p:nvSpPr>
+        <p:spPr>
+          <a:xfrm>
+            <a:off x="3642220" y="1554480"/>
+            <a:ext cx="7998092" cy="1097280"/>
           </a:xfrm>
           <a:prstGeom prst="roundRect">
             <a:avLst>
-              <a:gd name="adj" fmla="val 3404"/>
+              <a:gd name="adj" fmla="val 6667"/>
             </a:avLst>
           </a:prstGeom>
           <a:solidFill>
-            <a:schemeClr val="tx1"/>
+            <a:schemeClr val="accent1">
+              <a:alpha val="12000"/>
+            </a:schemeClr>
           </a:solidFill>
-          <a:ln/>
-        </p:spPr>
-        <p:txBody>
-          <a:bodyPr wrap="square" lIns="63500" tIns="63500" rIns="63500" bIns="63500" rtlCol="0" anchor="ctr"/>
-          <a:lstStyle/>
-          <a:p>
-            <a:pPr algn="ctr" indent="0" marL="0">
+          <a:ln w="12700">
+            <a:solidFill>
+              <a:schemeClr val="accent1"/>
+            </a:solidFill>
+          </a:ln>
+        </p:spPr>
+        <p:txBody>
+          <a:bodyPr wrap="square" lIns="101600" tIns="101600" rIns="101600" bIns="101600" rtlCol="0" anchor="ctr"/>
+          <a:lstStyle/>
+          <a:p>
+            <a:pPr algn="l" indent="0" marL="0">
               <a:buNone/>
             </a:pPr>
             <a:r>
               <a:rPr lang="en-US" sz="1250" b="1" dirty="0">
                 <a:solidFill>
-                  <a:schemeClr val="bg1"/>
-                </a:solidFill>
-                <a:latin typeface="Courier New" pitchFamily="34" charset="0"/>
-                <a:ea typeface="Courier New" pitchFamily="34" charset="-122"/>
-                <a:cs typeface="Courier New" pitchFamily="34" charset="-120"/>
-              </a:rPr>
-              <a:t>viz/make_figures.py</a:t>
+                  <a:schemeClr val="accent1"/>
+                </a:solidFill>
+              </a:rPr>
+              <a:t>ROBUST   </a:t>
+            </a:r>
+            <a:pPr algn="l" indent="0" marL="0">
+              <a:buNone/>
+            </a:pPr>
+            <a:r>
+              <a:rPr lang="en-US" sz="1250" dirty="0">
+                <a:solidFill>
+                  <a:schemeClr val="tx1"/>
+                </a:solidFill>
+              </a:rPr>
+              <a:t>R needs 3 stations at ±25, ±50, ±100 and ±250 µm and under both prior shapes, because it is always held to whatever plan U delivers there. GA seeds: 3 every time.</a:t>
             </a:r>
             <a:endParaRPr lang="en-US" sz="1250" dirty="0"/>
           </a:p>
-          <a:p>
-            <a:pPr algn="ctr" indent="0" marL="0">
-              <a:buNone/>
-            </a:pPr>
-            <a:r>
-              <a:rPr lang="en-US" sz="1200" dirty="0">
-                <a:solidFill>
-                  <a:schemeClr val="accent5"/>
-                </a:solidFill>
-              </a:rPr>
-              <a:t>main()  ·  2–3 min  ·  deterministic</a:t>
-            </a:r>
-            <a:endParaRPr lang="en-US" sz="1250" dirty="0"/>
-          </a:p>
-        </p:txBody>
-      </p:sp>
-      <p:sp>
-        <p:nvSpPr>
-          <p:cNvPr id="5" name="make_wing_figures.py"/>
-          <p:cNvSpPr txBox="1"/>
-          <p:nvPr/>
-        </p:nvSpPr>
-        <p:spPr>
-          <a:xfrm>
-            <a:off x="548640" y="5541264"/>
-            <a:ext cx="2148840" cy="457200"/>
+        </p:txBody>
+      </p:sp>
+      <p:sp>
+        <p:nvSpPr>
+          <p:cNvPr id="7" name="SENSITIVE callout"/>
+          <p:cNvSpPr txBox="1"/>
+          <p:nvPr/>
+        </p:nvSpPr>
+        <p:spPr>
+          <a:xfrm>
+            <a:off x="3642220" y="2788920"/>
+            <a:ext cx="7998092" cy="1097280"/>
           </a:xfrm>
           <a:prstGeom prst="roundRect">
             <a:avLst>
-              <a:gd name="adj" fmla="val 16000"/>
+              <a:gd name="adj" fmla="val 6667"/>
             </a:avLst>
           </a:prstGeom>
           <a:solidFill>
-            <a:schemeClr val="tx1"/>
+            <a:schemeClr val="accent1">
+              <a:alpha val="12000"/>
+            </a:schemeClr>
           </a:solidFill>
-          <a:ln/>
-        </p:spPr>
-        <p:txBody>
-          <a:bodyPr wrap="square" lIns="63500" tIns="63500" rIns="63500" bIns="63500" rtlCol="0" anchor="ctr"/>
-          <a:lstStyle/>
-          <a:p>
-            <a:pPr algn="ctr" indent="0" marL="0">
-              <a:buNone/>
-            </a:pPr>
-            <a:r>
-              <a:rPr lang="en-US" sz="1150" b="1" dirty="0">
-                <a:solidFill>
-                  <a:schemeClr val="bg1"/>
-                </a:solidFill>
-                <a:latin typeface="Courier New" pitchFamily="34" charset="0"/>
-                <a:ea typeface="Courier New" pitchFamily="34" charset="-122"/>
-                <a:cs typeface="Courier New" pitchFamily="34" charset="-120"/>
-              </a:rPr>
-              <a:t>make_wing_figures.py</a:t>
-            </a:r>
-            <a:endParaRPr lang="en-US" sz="1150" dirty="0"/>
-          </a:p>
-        </p:txBody>
-      </p:sp>
-      <p:sp>
-        <p:nvSpPr>
-          <p:cNvPr id="6" name="make_panel1_scene"/>
-          <p:cNvSpPr txBox="1"/>
-          <p:nvPr/>
-        </p:nvSpPr>
-        <p:spPr>
-          <a:xfrm>
-            <a:off x="3246120" y="1572768"/>
-            <a:ext cx="3429000" cy="457200"/>
+          <a:ln w="12700">
+            <a:solidFill>
+              <a:schemeClr val="accent1"/>
+            </a:solidFill>
+          </a:ln>
+        </p:spPr>
+        <p:txBody>
+          <a:bodyPr wrap="square" lIns="101600" tIns="101600" rIns="101600" bIns="101600" rtlCol="0" anchor="ctr"/>
+          <a:lstStyle/>
+          <a:p>
+            <a:pPr algn="l" indent="0" marL="0">
+              <a:buNone/>
+            </a:pPr>
+            <a:r>
+              <a:rPr lang="en-US" sz="1250" b="1" dirty="0">
+                <a:solidFill>
+                  <a:schemeClr val="accent1"/>
+                </a:solidFill>
+              </a:rPr>
+              <a:t>SENSITIVE   </a:t>
+            </a:r>
+            <a:pPr algn="l" indent="0" marL="0">
+              <a:buNone/>
+            </a:pPr>
+            <a:r>
+              <a:rPr lang="en-US" sz="1250" dirty="0">
+                <a:solidFill>
+                  <a:schemeClr val="tx1"/>
+                </a:solidFill>
+              </a:rPr>
+              <a:t>to the assumed cluster assignment: 2 stations if it is certain, 5 if it is only 50% reliable. A stricter limit cannot be bought: the process sets a floor on escape risk.</a:t>
+            </a:r>
+            <a:endParaRPr lang="en-US" sz="1250" dirty="0"/>
+          </a:p>
+        </p:txBody>
+      </p:sp>
+      <p:sp>
+        <p:nvSpPr>
+          <p:cNvPr id="8" name="VANISHES callout"/>
+          <p:cNvSpPr txBox="1"/>
+          <p:nvPr/>
+        </p:nvSpPr>
+        <p:spPr>
+          <a:xfrm>
+            <a:off x="3642220" y="4023360"/>
+            <a:ext cx="7998092" cy="1325880"/>
           </a:xfrm>
           <a:prstGeom prst="roundRect">
             <a:avLst>
-              <a:gd name="adj" fmla="val 16000"/>
+              <a:gd name="adj" fmla="val 5517"/>
             </a:avLst>
           </a:prstGeom>
           <a:solidFill>
-            <a:schemeClr val="accent1"/>
+            <a:schemeClr val="accent3">
+              <a:alpha val="12000"/>
+            </a:schemeClr>
           </a:solidFill>
-          <a:ln/>
-        </p:spPr>
-        <p:txBody>
-          <a:bodyPr wrap="square" lIns="63500" tIns="63500" rIns="63500" bIns="63500" rtlCol="0" anchor="ctr"/>
-          <a:lstStyle/>
-          <a:p>
-            <a:pPr algn="ctr" indent="0" marL="0">
-              <a:buNone/>
-            </a:pPr>
-            <a:r>
-              <a:rPr lang="en-US" sz="1200" b="1" dirty="0">
-                <a:solidFill>
-                  <a:schemeClr val="bg1"/>
-                </a:solidFill>
-                <a:latin typeface="Courier New" pitchFamily="34" charset="0"/>
-                <a:ea typeface="Courier New" pitchFamily="34" charset="-122"/>
-                <a:cs typeface="Courier New" pitchFamily="34" charset="-120"/>
-              </a:rPr>
-              <a:t>make_panel1_scene</a:t>
+          <a:ln w="12700">
+            <a:solidFill>
+              <a:schemeClr val="accent3"/>
+            </a:solidFill>
+          </a:ln>
+        </p:spPr>
+        <p:txBody>
+          <a:bodyPr wrap="square" lIns="101600" tIns="101600" rIns="101600" bIns="101600" rtlCol="0" anchor="ctr"/>
+          <a:lstStyle/>
+          <a:p>
+            <a:pPr algn="l" indent="0" marL="0">
+              <a:buNone/>
+            </a:pPr>
+            <a:r>
+              <a:rPr lang="en-US" sz="1250" b="1" dirty="0">
+                <a:solidFill>
+                  <a:schemeClr val="accent3"/>
+                </a:solidFill>
+              </a:rPr>
+              <a:t>VANISHES   </a:t>
+            </a:r>
+            <a:pPr algn="l" indent="0" marL="0">
+              <a:buNone/>
+            </a:pPr>
+            <a:r>
+              <a:rPr lang="en-US" sz="1250" dirty="0">
+                <a:solidFill>
+                  <a:schemeClr val="tx1"/>
+                </a:solidFill>
+              </a:rPr>
+              <a:t>if the hard-to-see flaps are the marginal cluster, or if policy requires ≥75% of every task measured: R needs 9, plan U's own layout. The saving exists because the expensive points are the ones that rarely fail.</a:t>
+            </a:r>
+            <a:endParaRPr lang="en-US" sz="1250" dirty="0"/>
+          </a:p>
+        </p:txBody>
+      </p:sp>
+      <p:sp>
+        <p:nvSpPr>
+          <p:cNvPr id="9" name="Text 6"/>
+          <p:cNvSpPr txBox="1"/>
+          <p:nvPr/>
+        </p:nvSpPr>
+        <p:spPr>
+          <a:xfrm>
+            <a:off x="3642220" y="5486400"/>
+            <a:ext cx="7998092" cy="502920"/>
+          </a:xfrm>
+          <a:prstGeom prst="rect">
+            <a:avLst/>
+          </a:prstGeom>
+          <a:noFill/>
+          <a:ln/>
+        </p:spPr>
+        <p:txBody>
+          <a:bodyPr wrap="square" lIns="0" tIns="0" rIns="0" bIns="0" rtlCol="0" anchor="ctr"/>
+          <a:lstStyle/>
+          <a:p>
+            <a:pPr algn="l" indent="0" marL="0">
+              <a:buNone/>
+            </a:pPr>
+            <a:r>
+              <a:rPr lang="en-US" sz="1200" i="1" dirty="0">
+                <a:solidFill>
+                  <a:schemeClr val="tx2"/>
+                </a:solidFill>
+              </a:rPr>
+              <a:t>Which features are marginal, and how reliably, is what real process data must decide.</a:t>
             </a:r>
             <a:endParaRPr lang="en-US" sz="1200" dirty="0"/>
-          </a:p>
-        </p:txBody>
-      </p:sp>
-      <p:sp>
-        <p:nvSpPr>
-          <p:cNvPr id="7" name="panel1_scene  ·  step 1 error ellipsoids"/>
-          <p:cNvSpPr txBox="1"/>
-          <p:nvPr/>
-        </p:nvSpPr>
-        <p:spPr>
-          <a:xfrm>
-            <a:off x="6995160" y="1572768"/>
-            <a:ext cx="4645152" cy="457200"/>
-          </a:xfrm>
-          <a:prstGeom prst="roundRect">
-            <a:avLst>
-              <a:gd name="adj" fmla="val 16000"/>
-            </a:avLst>
-          </a:prstGeom>
-          <a:solidFill>
-            <a:schemeClr val="accent2"/>
-          </a:solidFill>
-          <a:ln/>
-        </p:spPr>
-        <p:txBody>
-          <a:bodyPr wrap="square" lIns="63500" tIns="63500" rIns="63500" bIns="63500" rtlCol="0" anchor="ctr"/>
-          <a:lstStyle/>
-          <a:p>
-            <a:pPr algn="ctr" indent="0" marL="0">
-              <a:buNone/>
-            </a:pPr>
-            <a:r>
-              <a:rPr lang="en-US" sz="1250" b="1" dirty="0">
-                <a:solidFill>
-                  <a:schemeClr val="tx1"/>
-                </a:solidFill>
-              </a:rPr>
-              <a:t>panel1_scene  ·  step 1 error ellipsoids</a:t>
-            </a:r>
-            <a:endParaRPr lang="en-US" sz="1250" dirty="0"/>
-          </a:p>
-        </p:txBody>
-      </p:sp>
-      <p:sp>
-        <p:nvSpPr>
-          <p:cNvPr id="8" name="Shape 6"/>
-          <p:cNvSpPr/>
-          <p:nvPr/>
-        </p:nvSpPr>
-        <p:spPr>
-          <a:xfrm>
-            <a:off x="2697480" y="1801368"/>
-            <a:ext cx="548640" cy="0"/>
-          </a:xfrm>
-          <a:prstGeom prst="line">
-            <a:avLst/>
-          </a:prstGeom>
-          <a:noFill/>
-          <a:ln w="19050">
-            <a:solidFill>
-              <a:schemeClr val="accent4"/>
-            </a:solidFill>
-            <a:prstDash val="solid"/>
-            <a:tailEnd type="triangle"/>
-          </a:ln>
-        </p:spPr>
-      </p:sp>
-      <p:sp>
-        <p:nvSpPr>
-          <p:cNvPr id="9" name="Shape 7"/>
-          <p:cNvSpPr/>
-          <p:nvPr/>
-        </p:nvSpPr>
-        <p:spPr>
-          <a:xfrm>
-            <a:off x="6675120" y="1801368"/>
-            <a:ext cx="320040" cy="0"/>
-          </a:xfrm>
-          <a:prstGeom prst="line">
-            <a:avLst/>
-          </a:prstGeom>
-          <a:noFill/>
-          <a:ln w="19050">
-            <a:solidFill>
-              <a:schemeClr val="accent4"/>
-            </a:solidFill>
-            <a:prstDash val="solid"/>
-            <a:tailEnd type="triangle"/>
-          </a:ln>
-        </p:spPr>
-      </p:sp>
-      <p:sp>
-        <p:nvSpPr>
-          <p:cNvPr id="10" name="make_panel2_network"/>
-          <p:cNvSpPr txBox="1"/>
-          <p:nvPr/>
-        </p:nvSpPr>
-        <p:spPr>
-          <a:xfrm>
-            <a:off x="3246120" y="2139696"/>
-            <a:ext cx="3429000" cy="457200"/>
-          </a:xfrm>
-          <a:prstGeom prst="roundRect">
-            <a:avLst>
-              <a:gd name="adj" fmla="val 16000"/>
-            </a:avLst>
-          </a:prstGeom>
-          <a:solidFill>
-            <a:schemeClr val="accent1"/>
-          </a:solidFill>
-          <a:ln/>
-        </p:spPr>
-        <p:txBody>
-          <a:bodyPr wrap="square" lIns="63500" tIns="63500" rIns="63500" bIns="63500" rtlCol="0" anchor="ctr"/>
-          <a:lstStyle/>
-          <a:p>
-            <a:pPr algn="ctr" indent="0" marL="0">
-              <a:buNone/>
-            </a:pPr>
-            <a:r>
-              <a:rPr lang="en-US" sz="1200" b="1" dirty="0">
-                <a:solidFill>
-                  <a:schemeClr val="bg1"/>
-                </a:solidFill>
-                <a:latin typeface="Courier New" pitchFamily="34" charset="0"/>
-                <a:ea typeface="Courier New" pitchFamily="34" charset="-122"/>
-                <a:cs typeface="Courier New" pitchFamily="34" charset="-120"/>
-              </a:rPr>
-              <a:t>make_panel2_network</a:t>
-            </a:r>
-            <a:endParaRPr lang="en-US" sz="1200" dirty="0"/>
-          </a:p>
-        </p:txBody>
-      </p:sp>
-      <p:sp>
-        <p:nvSpPr>
-          <p:cNvPr id="11" name="panel2_network  ·  step 3 network solve"/>
-          <p:cNvSpPr txBox="1"/>
-          <p:nvPr/>
-        </p:nvSpPr>
-        <p:spPr>
-          <a:xfrm>
-            <a:off x="6995160" y="2139696"/>
-            <a:ext cx="4645152" cy="457200"/>
-          </a:xfrm>
-          <a:prstGeom prst="roundRect">
-            <a:avLst>
-              <a:gd name="adj" fmla="val 16000"/>
-            </a:avLst>
-          </a:prstGeom>
-          <a:solidFill>
-            <a:schemeClr val="accent2"/>
-          </a:solidFill>
-          <a:ln/>
-        </p:spPr>
-        <p:txBody>
-          <a:bodyPr wrap="square" lIns="63500" tIns="63500" rIns="63500" bIns="63500" rtlCol="0" anchor="ctr"/>
-          <a:lstStyle/>
-          <a:p>
-            <a:pPr algn="ctr" indent="0" marL="0">
-              <a:buNone/>
-            </a:pPr>
-            <a:r>
-              <a:rPr lang="en-US" sz="1250" b="1" dirty="0">
-                <a:solidFill>
-                  <a:schemeClr val="tx1"/>
-                </a:solidFill>
-              </a:rPr>
-              <a:t>panel2_network  ·  step 3 network solve</a:t>
-            </a:r>
-            <a:endParaRPr lang="en-US" sz="1250" dirty="0"/>
-          </a:p>
-        </p:txBody>
-      </p:sp>
-      <p:sp>
-        <p:nvSpPr>
-          <p:cNvPr id="12" name="Shape 10"/>
-          <p:cNvSpPr/>
-          <p:nvPr/>
-        </p:nvSpPr>
-        <p:spPr>
-          <a:xfrm>
-            <a:off x="2697480" y="2368296"/>
-            <a:ext cx="548640" cy="0"/>
-          </a:xfrm>
-          <a:prstGeom prst="line">
-            <a:avLst/>
-          </a:prstGeom>
-          <a:noFill/>
-          <a:ln w="19050">
-            <a:solidFill>
-              <a:schemeClr val="accent4"/>
-            </a:solidFill>
-            <a:prstDash val="solid"/>
-            <a:tailEnd type="triangle"/>
-          </a:ln>
-        </p:spPr>
-      </p:sp>
-      <p:sp>
-        <p:nvSpPr>
-          <p:cNvPr id="13" name="Shape 11"/>
-          <p:cNvSpPr/>
-          <p:nvPr/>
-        </p:nvSpPr>
-        <p:spPr>
-          <a:xfrm>
-            <a:off x="6675120" y="2368296"/>
-            <a:ext cx="320040" cy="0"/>
-          </a:xfrm>
-          <a:prstGeom prst="line">
-            <a:avLst/>
-          </a:prstGeom>
-          <a:noFill/>
-          <a:ln w="19050">
-            <a:solidFill>
-              <a:schemeClr val="accent4"/>
-            </a:solidFill>
-            <a:prstDash val="solid"/>
-            <a:tailEnd type="triangle"/>
-          </a:ln>
-        </p:spPr>
-      </p:sp>
-      <p:sp>
-        <p:nvSpPr>
-          <p:cNvPr id="14" name="make_panel3_uncertainty"/>
-          <p:cNvSpPr txBox="1"/>
-          <p:nvPr/>
-        </p:nvSpPr>
-        <p:spPr>
-          <a:xfrm>
-            <a:off x="3246120" y="2706624"/>
-            <a:ext cx="3429000" cy="457200"/>
-          </a:xfrm>
-          <a:prstGeom prst="roundRect">
-            <a:avLst>
-              <a:gd name="adj" fmla="val 16000"/>
-            </a:avLst>
-          </a:prstGeom>
-          <a:solidFill>
-            <a:schemeClr val="accent1"/>
-          </a:solidFill>
-          <a:ln/>
-        </p:spPr>
-        <p:txBody>
-          <a:bodyPr wrap="square" lIns="63500" tIns="63500" rIns="63500" bIns="63500" rtlCol="0" anchor="ctr"/>
-          <a:lstStyle/>
-          <a:p>
-            <a:pPr algn="ctr" indent="0" marL="0">
-              <a:buNone/>
-            </a:pPr>
-            <a:r>
-              <a:rPr lang="en-US" sz="1200" b="1" dirty="0">
-                <a:solidFill>
-                  <a:schemeClr val="bg1"/>
-                </a:solidFill>
-                <a:latin typeface="Courier New" pitchFamily="34" charset="0"/>
-                <a:ea typeface="Courier New" pitchFamily="34" charset="-122"/>
-                <a:cs typeface="Courier New" pitchFamily="34" charset="-120"/>
-              </a:rPr>
-              <a:t>make_panel3_uncertainty</a:t>
-            </a:r>
-            <a:endParaRPr lang="en-US" sz="1200" dirty="0"/>
-          </a:p>
-        </p:txBody>
-      </p:sp>
-      <p:sp>
-        <p:nvSpPr>
-          <p:cNvPr id="15" name="panel3_uncertainty  ·  step 3 uncertainty vs stations"/>
-          <p:cNvSpPr txBox="1"/>
-          <p:nvPr/>
-        </p:nvSpPr>
-        <p:spPr>
-          <a:xfrm>
-            <a:off x="6995160" y="2706624"/>
-            <a:ext cx="4645152" cy="457200"/>
-          </a:xfrm>
-          <a:prstGeom prst="roundRect">
-            <a:avLst>
-              <a:gd name="adj" fmla="val 16000"/>
-            </a:avLst>
-          </a:prstGeom>
-          <a:solidFill>
-            <a:schemeClr val="accent2"/>
-          </a:solidFill>
-          <a:ln/>
-        </p:spPr>
-        <p:txBody>
-          <a:bodyPr wrap="square" lIns="63500" tIns="63500" rIns="63500" bIns="63500" rtlCol="0" anchor="ctr"/>
-          <a:lstStyle/>
-          <a:p>
-            <a:pPr algn="ctr" indent="0" marL="0">
-              <a:buNone/>
-            </a:pPr>
-            <a:r>
-              <a:rPr lang="en-US" sz="1250" b="1" dirty="0">
-                <a:solidFill>
-                  <a:schemeClr val="tx1"/>
-                </a:solidFill>
-              </a:rPr>
-              <a:t>panel3_uncertainty  ·  step 3 uncertainty vs stations</a:t>
-            </a:r>
-            <a:endParaRPr lang="en-US" sz="1250" dirty="0"/>
-          </a:p>
-        </p:txBody>
-      </p:sp>
-      <p:sp>
-        <p:nvSpPr>
-          <p:cNvPr id="16" name="Shape 14"/>
-          <p:cNvSpPr/>
-          <p:nvPr/>
-        </p:nvSpPr>
-        <p:spPr>
-          <a:xfrm>
-            <a:off x="2697480" y="2935224"/>
-            <a:ext cx="548640" cy="0"/>
-          </a:xfrm>
-          <a:prstGeom prst="line">
-            <a:avLst/>
-          </a:prstGeom>
-          <a:noFill/>
-          <a:ln w="19050">
-            <a:solidFill>
-              <a:schemeClr val="accent4"/>
-            </a:solidFill>
-            <a:prstDash val="solid"/>
-            <a:tailEnd type="triangle"/>
-          </a:ln>
-        </p:spPr>
-      </p:sp>
-      <p:sp>
-        <p:nvSpPr>
-          <p:cNvPr id="17" name="Shape 15"/>
-          <p:cNvSpPr/>
-          <p:nvPr/>
-        </p:nvSpPr>
-        <p:spPr>
-          <a:xfrm>
-            <a:off x="6675120" y="2935224"/>
-            <a:ext cx="320040" cy="0"/>
-          </a:xfrm>
-          <a:prstGeom prst="line">
-            <a:avLst/>
-          </a:prstGeom>
-          <a:noFill/>
-          <a:ln w="19050">
-            <a:solidFill>
-              <a:schemeClr val="accent4"/>
-            </a:solidFill>
-            <a:prstDash val="solid"/>
-            <a:tailEnd type="triangle"/>
-          </a:ln>
-        </p:spPr>
-      </p:sp>
-      <p:sp>
-        <p:nvSpPr>
-          <p:cNvPr id="18" name="make_panel4_characteristics"/>
-          <p:cNvSpPr txBox="1"/>
-          <p:nvPr/>
-        </p:nvSpPr>
-        <p:spPr>
-          <a:xfrm>
-            <a:off x="3246120" y="3273552"/>
-            <a:ext cx="3429000" cy="457200"/>
-          </a:xfrm>
-          <a:prstGeom prst="roundRect">
-            <a:avLst>
-              <a:gd name="adj" fmla="val 16000"/>
-            </a:avLst>
-          </a:prstGeom>
-          <a:solidFill>
-            <a:schemeClr val="accent1"/>
-          </a:solidFill>
-          <a:ln/>
-        </p:spPr>
-        <p:txBody>
-          <a:bodyPr wrap="square" lIns="63500" tIns="63500" rIns="63500" bIns="63500" rtlCol="0" anchor="ctr"/>
-          <a:lstStyle/>
-          <a:p>
-            <a:pPr algn="ctr" indent="0" marL="0">
-              <a:buNone/>
-            </a:pPr>
-            <a:r>
-              <a:rPr lang="en-US" sz="1200" b="1" dirty="0">
-                <a:solidFill>
-                  <a:schemeClr val="bg1"/>
-                </a:solidFill>
-                <a:latin typeface="Courier New" pitchFamily="34" charset="0"/>
-                <a:ea typeface="Courier New" pitchFamily="34" charset="-122"/>
-                <a:cs typeface="Courier New" pitchFamily="34" charset="-120"/>
-              </a:rPr>
-              <a:t>make_panel4_characteristics</a:t>
-            </a:r>
-            <a:endParaRPr lang="en-US" sz="1200" dirty="0"/>
-          </a:p>
-        </p:txBody>
-      </p:sp>
-      <p:sp>
-        <p:nvSpPr>
-          <p:cNvPr id="19" name="panel4_characteristics  ·  step 4 tolerance types"/>
-          <p:cNvSpPr txBox="1"/>
-          <p:nvPr/>
-        </p:nvSpPr>
-        <p:spPr>
-          <a:xfrm>
-            <a:off x="6995160" y="3273552"/>
-            <a:ext cx="4645152" cy="457200"/>
-          </a:xfrm>
-          <a:prstGeom prst="roundRect">
-            <a:avLst>
-              <a:gd name="adj" fmla="val 16000"/>
-            </a:avLst>
-          </a:prstGeom>
-          <a:solidFill>
-            <a:schemeClr val="accent2"/>
-          </a:solidFill>
-          <a:ln/>
-        </p:spPr>
-        <p:txBody>
-          <a:bodyPr wrap="square" lIns="63500" tIns="63500" rIns="63500" bIns="63500" rtlCol="0" anchor="ctr"/>
-          <a:lstStyle/>
-          <a:p>
-            <a:pPr algn="ctr" indent="0" marL="0">
-              <a:buNone/>
-            </a:pPr>
-            <a:r>
-              <a:rPr lang="en-US" sz="1250" b="1" dirty="0">
-                <a:solidFill>
-                  <a:schemeClr val="tx1"/>
-                </a:solidFill>
-              </a:rPr>
-              <a:t>panel4_characteristics  ·  step 4 tolerance types</a:t>
-            </a:r>
-            <a:endParaRPr lang="en-US" sz="1250" dirty="0"/>
-          </a:p>
-        </p:txBody>
-      </p:sp>
-      <p:sp>
-        <p:nvSpPr>
-          <p:cNvPr id="20" name="Shape 18"/>
-          <p:cNvSpPr/>
-          <p:nvPr/>
-        </p:nvSpPr>
-        <p:spPr>
-          <a:xfrm>
-            <a:off x="2697480" y="3502152"/>
-            <a:ext cx="548640" cy="0"/>
-          </a:xfrm>
-          <a:prstGeom prst="line">
-            <a:avLst/>
-          </a:prstGeom>
-          <a:noFill/>
-          <a:ln w="19050">
-            <a:solidFill>
-              <a:schemeClr val="accent4"/>
-            </a:solidFill>
-            <a:prstDash val="solid"/>
-            <a:tailEnd type="triangle"/>
-          </a:ln>
-        </p:spPr>
-      </p:sp>
-      <p:sp>
-        <p:nvSpPr>
-          <p:cNvPr id="21" name="Shape 19"/>
-          <p:cNvSpPr/>
-          <p:nvPr/>
-        </p:nvSpPr>
-        <p:spPr>
-          <a:xfrm>
-            <a:off x="6675120" y="3502152"/>
-            <a:ext cx="320040" cy="0"/>
-          </a:xfrm>
-          <a:prstGeom prst="line">
-            <a:avLst/>
-          </a:prstGeom>
-          <a:noFill/>
-          <a:ln w="19050">
-            <a:solidFill>
-              <a:schemeClr val="accent4"/>
-            </a:solidFill>
-            <a:prstDash val="solid"/>
-            <a:tailEnd type="triangle"/>
-          </a:ln>
-        </p:spPr>
-      </p:sp>
-      <p:sp>
-        <p:nvSpPr>
-          <p:cNvPr id="22" name="make_panel5_risk"/>
-          <p:cNvSpPr txBox="1"/>
-          <p:nvPr/>
-        </p:nvSpPr>
-        <p:spPr>
-          <a:xfrm>
-            <a:off x="3246120" y="3840480"/>
-            <a:ext cx="3429000" cy="457200"/>
-          </a:xfrm>
-          <a:prstGeom prst="roundRect">
-            <a:avLst>
-              <a:gd name="adj" fmla="val 16000"/>
-            </a:avLst>
-          </a:prstGeom>
-          <a:solidFill>
-            <a:schemeClr val="accent1"/>
-          </a:solidFill>
-          <a:ln/>
-        </p:spPr>
-        <p:txBody>
-          <a:bodyPr wrap="square" lIns="63500" tIns="63500" rIns="63500" bIns="63500" rtlCol="0" anchor="ctr"/>
-          <a:lstStyle/>
-          <a:p>
-            <a:pPr algn="ctr" indent="0" marL="0">
-              <a:buNone/>
-            </a:pPr>
-            <a:r>
-              <a:rPr lang="en-US" sz="1200" b="1" dirty="0">
-                <a:solidFill>
-                  <a:schemeClr val="bg1"/>
-                </a:solidFill>
-                <a:latin typeface="Courier New" pitchFamily="34" charset="0"/>
-                <a:ea typeface="Courier New" pitchFamily="34" charset="-122"/>
-                <a:cs typeface="Courier New" pitchFamily="34" charset="-120"/>
-              </a:rPr>
-              <a:t>make_panel5_risk</a:t>
-            </a:r>
-            <a:endParaRPr lang="en-US" sz="1200" dirty="0"/>
-          </a:p>
-        </p:txBody>
-      </p:sp>
-      <p:sp>
-        <p:nvSpPr>
-          <p:cNvPr id="23" name="panel5_risk  ·  step 5 risk vs uncertainty"/>
-          <p:cNvSpPr txBox="1"/>
-          <p:nvPr/>
-        </p:nvSpPr>
-        <p:spPr>
-          <a:xfrm>
-            <a:off x="6995160" y="3840480"/>
-            <a:ext cx="4645152" cy="457200"/>
-          </a:xfrm>
-          <a:prstGeom prst="roundRect">
-            <a:avLst>
-              <a:gd name="adj" fmla="val 16000"/>
-            </a:avLst>
-          </a:prstGeom>
-          <a:solidFill>
-            <a:schemeClr val="accent2"/>
-          </a:solidFill>
-          <a:ln/>
-        </p:spPr>
-        <p:txBody>
-          <a:bodyPr wrap="square" lIns="63500" tIns="63500" rIns="63500" bIns="63500" rtlCol="0" anchor="ctr"/>
-          <a:lstStyle/>
-          <a:p>
-            <a:pPr algn="ctr" indent="0" marL="0">
-              <a:buNone/>
-            </a:pPr>
-            <a:r>
-              <a:rPr lang="en-US" sz="1250" b="1" dirty="0">
-                <a:solidFill>
-                  <a:schemeClr val="tx1"/>
-                </a:solidFill>
-              </a:rPr>
-              <a:t>panel5_risk  ·  step 5 risk vs uncertainty</a:t>
-            </a:r>
-            <a:endParaRPr lang="en-US" sz="1250" dirty="0"/>
-          </a:p>
-        </p:txBody>
-      </p:sp>
-      <p:sp>
-        <p:nvSpPr>
-          <p:cNvPr id="24" name="Shape 22"/>
-          <p:cNvSpPr/>
-          <p:nvPr/>
-        </p:nvSpPr>
-        <p:spPr>
-          <a:xfrm>
-            <a:off x="2697480" y="4069080"/>
-            <a:ext cx="548640" cy="0"/>
-          </a:xfrm>
-          <a:prstGeom prst="line">
-            <a:avLst/>
-          </a:prstGeom>
-          <a:noFill/>
-          <a:ln w="19050">
-            <a:solidFill>
-              <a:schemeClr val="accent4"/>
-            </a:solidFill>
-            <a:prstDash val="solid"/>
-            <a:tailEnd type="triangle"/>
-          </a:ln>
-        </p:spPr>
-      </p:sp>
-      <p:sp>
-        <p:nvSpPr>
-          <p:cNvPr id="25" name="Shape 23"/>
-          <p:cNvSpPr/>
-          <p:nvPr/>
-        </p:nvSpPr>
-        <p:spPr>
-          <a:xfrm>
-            <a:off x="6675120" y="4069080"/>
-            <a:ext cx="320040" cy="0"/>
-          </a:xfrm>
-          <a:prstGeom prst="line">
-            <a:avLst/>
-          </a:prstGeom>
-          <a:noFill/>
-          <a:ln w="19050">
-            <a:solidFill>
-              <a:schemeClr val="accent4"/>
-            </a:solidFill>
-            <a:prstDash val="solid"/>
-            <a:tailEnd type="triangle"/>
-          </a:ln>
-        </p:spPr>
-      </p:sp>
-      <p:sp>
-        <p:nvSpPr>
-          <p:cNvPr id="26" name="make_panel6_and_7"/>
-          <p:cNvSpPr txBox="1"/>
-          <p:nvPr/>
-        </p:nvSpPr>
-        <p:spPr>
-          <a:xfrm>
-            <a:off x="3246120" y="4407408"/>
-            <a:ext cx="3429000" cy="457200"/>
-          </a:xfrm>
-          <a:prstGeom prst="roundRect">
-            <a:avLst>
-              <a:gd name="adj" fmla="val 16000"/>
-            </a:avLst>
-          </a:prstGeom>
-          <a:solidFill>
-            <a:schemeClr val="accent1"/>
-          </a:solidFill>
-          <a:ln/>
-        </p:spPr>
-        <p:txBody>
-          <a:bodyPr wrap="square" lIns="63500" tIns="63500" rIns="63500" bIns="63500" rtlCol="0" anchor="ctr"/>
-          <a:lstStyle/>
-          <a:p>
-            <a:pPr algn="ctr" indent="0" marL="0">
-              <a:buNone/>
-            </a:pPr>
-            <a:r>
-              <a:rPr lang="en-US" sz="1200" b="1" dirty="0">
-                <a:solidFill>
-                  <a:schemeClr val="bg1"/>
-                </a:solidFill>
-                <a:latin typeface="Courier New" pitchFamily="34" charset="0"/>
-                <a:ea typeface="Courier New" pitchFamily="34" charset="-122"/>
-                <a:cs typeface="Courier New" pitchFamily="34" charset="-120"/>
-              </a:rPr>
-              <a:t>make_panel6_and_7</a:t>
-            </a:r>
-            <a:endParaRPr lang="en-US" sz="1200" dirty="0"/>
-          </a:p>
-        </p:txBody>
-      </p:sp>
-      <p:sp>
-        <p:nvSpPr>
-          <p:cNvPr id="27" name="panel6a, 6b, 7 (+ _systematic10um)  ·  step 6 headline"/>
-          <p:cNvSpPr txBox="1"/>
-          <p:nvPr/>
-        </p:nvSpPr>
-        <p:spPr>
-          <a:xfrm>
-            <a:off x="6995160" y="4407408"/>
-            <a:ext cx="4645152" cy="457200"/>
-          </a:xfrm>
-          <a:prstGeom prst="roundRect">
-            <a:avLst>
-              <a:gd name="adj" fmla="val 16000"/>
-            </a:avLst>
-          </a:prstGeom>
-          <a:solidFill>
-            <a:schemeClr val="accent2"/>
-          </a:solidFill>
-          <a:ln/>
-        </p:spPr>
-        <p:txBody>
-          <a:bodyPr wrap="square" lIns="63500" tIns="63500" rIns="63500" bIns="63500" rtlCol="0" anchor="ctr"/>
-          <a:lstStyle/>
-          <a:p>
-            <a:pPr algn="ctr" indent="0" marL="0">
-              <a:buNone/>
-            </a:pPr>
-            <a:r>
-              <a:rPr lang="en-US" sz="1250" b="1" dirty="0">
-                <a:solidFill>
-                  <a:schemeClr val="tx1"/>
-                </a:solidFill>
-              </a:rPr>
-              <a:t>panel6a, 6b, 7 (+ _systematic10um)  ·  step 6 headline</a:t>
-            </a:r>
-            <a:endParaRPr lang="en-US" sz="1250" dirty="0"/>
-          </a:p>
-        </p:txBody>
-      </p:sp>
-      <p:sp>
-        <p:nvSpPr>
-          <p:cNvPr id="28" name="Shape 26"/>
-          <p:cNvSpPr/>
-          <p:nvPr/>
-        </p:nvSpPr>
-        <p:spPr>
-          <a:xfrm>
-            <a:off x="2697480" y="4636008"/>
-            <a:ext cx="548640" cy="0"/>
-          </a:xfrm>
-          <a:prstGeom prst="line">
-            <a:avLst/>
-          </a:prstGeom>
-          <a:noFill/>
-          <a:ln w="19050">
-            <a:solidFill>
-              <a:schemeClr val="accent4"/>
-            </a:solidFill>
-            <a:prstDash val="solid"/>
-            <a:tailEnd type="triangle"/>
-          </a:ln>
-        </p:spPr>
-      </p:sp>
-      <p:sp>
-        <p:nvSpPr>
-          <p:cNvPr id="29" name="Shape 27"/>
-          <p:cNvSpPr/>
-          <p:nvPr/>
-        </p:nvSpPr>
-        <p:spPr>
-          <a:xfrm>
-            <a:off x="6675120" y="4636008"/>
-            <a:ext cx="320040" cy="0"/>
-          </a:xfrm>
-          <a:prstGeom prst="line">
-            <a:avLst/>
-          </a:prstGeom>
-          <a:noFill/>
-          <a:ln w="19050">
-            <a:solidFill>
-              <a:schemeClr val="accent4"/>
-            </a:solidFill>
-            <a:prstDash val="solid"/>
-            <a:tailEnd type="triangle"/>
-          </a:ln>
-        </p:spPr>
-      </p:sp>
-      <p:sp>
-        <p:nvSpPr>
-          <p:cNvPr id="30" name="make_panel8_mixed_tolerance"/>
-          <p:cNvSpPr txBox="1"/>
-          <p:nvPr/>
-        </p:nvSpPr>
-        <p:spPr>
-          <a:xfrm>
-            <a:off x="3246120" y="4974336"/>
-            <a:ext cx="3429000" cy="457200"/>
-          </a:xfrm>
-          <a:prstGeom prst="roundRect">
-            <a:avLst>
-              <a:gd name="adj" fmla="val 16000"/>
-            </a:avLst>
-          </a:prstGeom>
-          <a:solidFill>
-            <a:schemeClr val="accent1"/>
-          </a:solidFill>
-          <a:ln/>
-        </p:spPr>
-        <p:txBody>
-          <a:bodyPr wrap="square" lIns="63500" tIns="63500" rIns="63500" bIns="63500" rtlCol="0" anchor="ctr"/>
-          <a:lstStyle/>
-          <a:p>
-            <a:pPr algn="ctr" indent="0" marL="0">
-              <a:buNone/>
-            </a:pPr>
-            <a:r>
-              <a:rPr lang="en-US" sz="1200" b="1" dirty="0">
-                <a:solidFill>
-                  <a:schemeClr val="bg1"/>
-                </a:solidFill>
-                <a:latin typeface="Courier New" pitchFamily="34" charset="0"/>
-                <a:ea typeface="Courier New" pitchFamily="34" charset="-122"/>
-                <a:cs typeface="Courier New" pitchFamily="34" charset="-120"/>
-              </a:rPr>
-              <a:t>make_panel8_mixed_tolerance</a:t>
-            </a:r>
-            <a:endParaRPr lang="en-US" sz="1200" dirty="0"/>
-          </a:p>
-        </p:txBody>
-      </p:sp>
-      <p:sp>
-        <p:nvSpPr>
-          <p:cNvPr id="31" name="panel6a/6b_mixedtol, panel8c  ·  tolerance-mix check"/>
-          <p:cNvSpPr txBox="1"/>
-          <p:nvPr/>
-        </p:nvSpPr>
-        <p:spPr>
-          <a:xfrm>
-            <a:off x="6995160" y="4974336"/>
-            <a:ext cx="4645152" cy="457200"/>
-          </a:xfrm>
-          <a:prstGeom prst="roundRect">
-            <a:avLst>
-              <a:gd name="adj" fmla="val 16000"/>
-            </a:avLst>
-          </a:prstGeom>
-          <a:solidFill>
-            <a:schemeClr val="accent2"/>
-          </a:solidFill>
-          <a:ln/>
-        </p:spPr>
-        <p:txBody>
-          <a:bodyPr wrap="square" lIns="63500" tIns="63500" rIns="63500" bIns="63500" rtlCol="0" anchor="ctr"/>
-          <a:lstStyle/>
-          <a:p>
-            <a:pPr algn="ctr" indent="0" marL="0">
-              <a:buNone/>
-            </a:pPr>
-            <a:r>
-              <a:rPr lang="en-US" sz="1250" b="1" dirty="0">
-                <a:solidFill>
-                  <a:schemeClr val="tx1"/>
-                </a:solidFill>
-              </a:rPr>
-              <a:t>panel6a/6b_mixedtol, panel8c  ·  tolerance-mix check</a:t>
-            </a:r>
-            <a:endParaRPr lang="en-US" sz="1250" dirty="0"/>
-          </a:p>
-        </p:txBody>
-      </p:sp>
-      <p:sp>
-        <p:nvSpPr>
-          <p:cNvPr id="32" name="Shape 30"/>
-          <p:cNvSpPr/>
-          <p:nvPr/>
-        </p:nvSpPr>
-        <p:spPr>
-          <a:xfrm>
-            <a:off x="2697480" y="5202936"/>
-            <a:ext cx="548640" cy="0"/>
-          </a:xfrm>
-          <a:prstGeom prst="line">
-            <a:avLst/>
-          </a:prstGeom>
-          <a:noFill/>
-          <a:ln w="19050">
-            <a:solidFill>
-              <a:schemeClr val="accent4"/>
-            </a:solidFill>
-            <a:prstDash val="solid"/>
-            <a:tailEnd type="triangle"/>
-          </a:ln>
-        </p:spPr>
-      </p:sp>
-      <p:sp>
-        <p:nvSpPr>
-          <p:cNvPr id="33" name="Shape 31"/>
-          <p:cNvSpPr/>
-          <p:nvPr/>
-        </p:nvSpPr>
-        <p:spPr>
-          <a:xfrm>
-            <a:off x="6675120" y="5202936"/>
-            <a:ext cx="320040" cy="0"/>
-          </a:xfrm>
-          <a:prstGeom prst="line">
-            <a:avLst/>
-          </a:prstGeom>
-          <a:noFill/>
-          <a:ln w="19050">
-            <a:solidFill>
-              <a:schemeClr val="accent4"/>
-            </a:solidFill>
-            <a:prstDash val="solid"/>
-            <a:tailEnd type="triangle"/>
-          </a:ln>
-        </p:spPr>
-      </p:sp>
-      <p:sp>
-        <p:nvSpPr>
-          <p:cNvPr id="34" name="make_panel9_wing"/>
-          <p:cNvSpPr txBox="1"/>
-          <p:nvPr/>
-        </p:nvSpPr>
-        <p:spPr>
-          <a:xfrm>
-            <a:off x="3246120" y="5541264"/>
-            <a:ext cx="3429000" cy="457200"/>
-          </a:xfrm>
-          <a:prstGeom prst="roundRect">
-            <a:avLst>
-              <a:gd name="adj" fmla="val 16000"/>
-            </a:avLst>
-          </a:prstGeom>
-          <a:solidFill>
-            <a:schemeClr val="accent1"/>
-          </a:solidFill>
-          <a:ln/>
-        </p:spPr>
-        <p:txBody>
-          <a:bodyPr wrap="square" lIns="63500" tIns="63500" rIns="63500" bIns="63500" rtlCol="0" anchor="ctr"/>
-          <a:lstStyle/>
-          <a:p>
-            <a:pPr algn="ctr" indent="0" marL="0">
-              <a:buNone/>
-            </a:pPr>
-            <a:r>
-              <a:rPr lang="en-US" sz="1200" b="1" dirty="0">
-                <a:solidFill>
-                  <a:schemeClr val="bg1"/>
-                </a:solidFill>
-                <a:latin typeface="Courier New" pitchFamily="34" charset="0"/>
-                <a:ea typeface="Courier New" pitchFamily="34" charset="-122"/>
-                <a:cs typeface="Courier New" pitchFamily="34" charset="-120"/>
-              </a:rPr>
-              <a:t>make_panel9_wing</a:t>
-            </a:r>
-            <a:endParaRPr lang="en-US" sz="1200" dirty="0"/>
-          </a:p>
-        </p:txBody>
-      </p:sp>
-      <p:sp>
-        <p:nvSpPr>
-          <p:cNvPr id="35" name="panel9a, 9b (+ _tower)  ·  wing scenario"/>
-          <p:cNvSpPr txBox="1"/>
-          <p:nvPr/>
-        </p:nvSpPr>
-        <p:spPr>
-          <a:xfrm>
-            <a:off x="6995160" y="5541264"/>
-            <a:ext cx="4645152" cy="457200"/>
-          </a:xfrm>
-          <a:prstGeom prst="roundRect">
-            <a:avLst>
-              <a:gd name="adj" fmla="val 16000"/>
-            </a:avLst>
-          </a:prstGeom>
-          <a:solidFill>
-            <a:schemeClr val="accent2"/>
-          </a:solidFill>
-          <a:ln/>
-        </p:spPr>
-        <p:txBody>
-          <a:bodyPr wrap="square" lIns="63500" tIns="63500" rIns="63500" bIns="63500" rtlCol="0" anchor="ctr"/>
-          <a:lstStyle/>
-          <a:p>
-            <a:pPr algn="ctr" indent="0" marL="0">
-              <a:buNone/>
-            </a:pPr>
-            <a:r>
-              <a:rPr lang="en-US" sz="1250" b="1" dirty="0">
-                <a:solidFill>
-                  <a:schemeClr val="tx1"/>
-                </a:solidFill>
-              </a:rPr>
-              <a:t>panel9a, 9b (+ _tower)  ·  wing scenario</a:t>
-            </a:r>
-            <a:endParaRPr lang="en-US" sz="1250" dirty="0"/>
-          </a:p>
-        </p:txBody>
-      </p:sp>
-      <p:sp>
-        <p:nvSpPr>
-          <p:cNvPr id="36" name="Shape 34"/>
-          <p:cNvSpPr/>
-          <p:nvPr/>
-        </p:nvSpPr>
-        <p:spPr>
-          <a:xfrm>
-            <a:off x="2697480" y="5769864"/>
-            <a:ext cx="548640" cy="0"/>
-          </a:xfrm>
-          <a:prstGeom prst="line">
-            <a:avLst/>
-          </a:prstGeom>
-          <a:noFill/>
-          <a:ln w="19050">
-            <a:solidFill>
-              <a:schemeClr val="accent4"/>
-            </a:solidFill>
-            <a:prstDash val="solid"/>
-            <a:tailEnd type="triangle"/>
-          </a:ln>
-        </p:spPr>
-      </p:sp>
-      <p:sp>
-        <p:nvSpPr>
-          <p:cNvPr id="37" name="Shape 35"/>
-          <p:cNvSpPr/>
-          <p:nvPr/>
-        </p:nvSpPr>
-        <p:spPr>
-          <a:xfrm>
-            <a:off x="6675120" y="5769864"/>
-            <a:ext cx="320040" cy="0"/>
-          </a:xfrm>
-          <a:prstGeom prst="line">
-            <a:avLst/>
-          </a:prstGeom>
-          <a:noFill/>
-          <a:ln w="19050">
-            <a:solidFill>
-              <a:schemeClr val="accent4"/>
-            </a:solidFill>
-            <a:prstDash val="solid"/>
-            <a:tailEnd type="triangle"/>
-          </a:ln>
-        </p:spPr>
-      </p:sp>
-      <p:sp>
-        <p:nvSpPr>
-          <p:cNvPr id="38" name="Text 36"/>
-          <p:cNvSpPr txBox="1"/>
-          <p:nvPr/>
-        </p:nvSpPr>
-        <p:spPr>
-          <a:xfrm>
-            <a:off x="548640" y="6108192"/>
-            <a:ext cx="5486400" cy="274320"/>
-          </a:xfrm>
-          <a:prstGeom prst="rect">
-            <a:avLst/>
-          </a:prstGeom>
-          <a:noFill/>
-          <a:ln/>
-        </p:spPr>
-        <p:txBody>
-          <a:bodyPr wrap="square" lIns="0" tIns="0" rIns="0" bIns="0" rtlCol="0" anchor="ctr"/>
-          <a:lstStyle/>
-          <a:p>
-            <a:pPr algn="l" indent="0" marL="0">
-              <a:buNone/>
-            </a:pPr>
-            <a:r>
-              <a:rPr lang="en-US" sz="1100" i="1" dirty="0">
-                <a:solidFill>
-                  <a:schemeClr val="tx2"/>
-                </a:solidFill>
-              </a:rPr>
-              <a:t>All outputs are written to results/ as .png</a:t>
-            </a:r>
-            <a:endParaRPr lang="en-US" sz="1100" dirty="0"/>
           </a:p>
         </p:txBody>
       </p:sp>
@@ -11160,7 +11367,7 @@
                   <a:schemeClr val="tx1"/>
                 </a:solidFill>
               </a:rPr>
-              <a:t>How each result is checked</a:t>
+              <a:t>The ML surrogate and how it is validated</a:t>
             </a:r>
             <a:endParaRPr lang="en-US" sz="3400" dirty="0"/>
           </a:p>
@@ -11198,7 +11405,7 @@
                   <a:schemeClr val="tx2"/>
                 </a:solidFill>
               </a:rPr>
-              <a:t>Every link has a gate, and no number is reported without a cross-check</a:t>
+              <a:t>planning.surrogate · gradient-boosted trees (scikit-learn) standing in for the evaluator, never trusted without re-scoring</a:t>
             </a:r>
             <a:endParaRPr lang="en-US" sz="1600" dirty="0"/>
           </a:p>
@@ -11206,18 +11413,481 @@
       </p:sp>
       <p:sp>
         <p:nvSpPr>
-          <p:cNvPr id="4" name="check card automated tests"/>
-          <p:cNvSpPr/>
-          <p:nvPr/>
-        </p:nvSpPr>
-        <p:spPr>
-          <a:xfrm>
-            <a:off x="548640" y="1737360"/>
-            <a:ext cx="2615184" cy="3611880"/>
+          <p:cNvPr id="4" name="generate_layout_records()"/>
+          <p:cNvSpPr txBox="1"/>
+          <p:nvPr/>
+        </p:nvSpPr>
+        <p:spPr>
+          <a:xfrm>
+            <a:off x="548640" y="1554480"/>
+            <a:ext cx="2011680" cy="868680"/>
           </a:xfrm>
           <a:prstGeom prst="roundRect">
             <a:avLst>
-              <a:gd name="adj" fmla="val 3497"/>
+              <a:gd name="adj" fmla="val 8421"/>
+            </a:avLst>
+          </a:prstGeom>
+          <a:solidFill>
+            <a:schemeClr val="accent1"/>
+          </a:solidFill>
+          <a:ln/>
+        </p:spPr>
+        <p:txBody>
+          <a:bodyPr wrap="square" lIns="38100" tIns="38100" rIns="38100" bIns="38100" rtlCol="0" anchor="ctr"/>
+          <a:lstStyle/>
+          <a:p>
+            <a:pPr algn="ctr" indent="0" marL="0">
+              <a:buNone/>
+            </a:pPr>
+            <a:r>
+              <a:rPr lang="en-US" sz="850" b="1" dirty="0">
+                <a:solidFill>
+                  <a:schemeClr val="bg1"/>
+                </a:solidFill>
+                <a:latin typeface="Courier New" pitchFamily="34" charset="0"/>
+                <a:ea typeface="Courier New" pitchFamily="34" charset="-122"/>
+                <a:cs typeface="Courier New" pitchFamily="34" charset="-120"/>
+              </a:rPr>
+              <a:t>generate_layout_records()</a:t>
+            </a:r>
+            <a:endParaRPr lang="en-US" sz="850" dirty="0"/>
+          </a:p>
+          <a:p>
+            <a:pPr algn="ctr" indent="0" marL="0">
+              <a:buNone/>
+            </a:pPr>
+            <a:r>
+              <a:rPr lang="en-US" sz="1000" dirty="0">
+                <a:solidFill>
+                  <a:schemeClr val="bg1"/>
+                </a:solidFill>
+              </a:rPr>
+              <a:t>12,743 simulated layouts</a:t>
+            </a:r>
+            <a:endParaRPr lang="en-US" sz="850" dirty="0"/>
+          </a:p>
+        </p:txBody>
+      </p:sp>
+      <p:sp>
+        <p:nvSpPr>
+          <p:cNvPr id="5" name="grouped_split()"/>
+          <p:cNvSpPr txBox="1"/>
+          <p:nvPr/>
+        </p:nvSpPr>
+        <p:spPr>
+          <a:xfrm>
+            <a:off x="2798064" y="1554480"/>
+            <a:ext cx="2011680" cy="868680"/>
+          </a:xfrm>
+          <a:prstGeom prst="roundRect">
+            <a:avLst>
+              <a:gd name="adj" fmla="val 8421"/>
+            </a:avLst>
+          </a:prstGeom>
+          <a:solidFill>
+            <a:schemeClr val="accent1"/>
+          </a:solidFill>
+          <a:ln/>
+        </p:spPr>
+        <p:txBody>
+          <a:bodyPr wrap="square" lIns="38100" tIns="38100" rIns="38100" bIns="38100" rtlCol="0" anchor="ctr"/>
+          <a:lstStyle/>
+          <a:p>
+            <a:pPr algn="ctr" indent="0" marL="0">
+              <a:buNone/>
+            </a:pPr>
+            <a:r>
+              <a:rPr lang="en-US" sz="850" b="1" dirty="0">
+                <a:solidFill>
+                  <a:schemeClr val="bg1"/>
+                </a:solidFill>
+                <a:latin typeface="Courier New" pitchFamily="34" charset="0"/>
+                <a:ea typeface="Courier New" pitchFamily="34" charset="-122"/>
+                <a:cs typeface="Courier New" pitchFamily="34" charset="-120"/>
+              </a:rPr>
+              <a:t>grouped_split()</a:t>
+            </a:r>
+            <a:endParaRPr lang="en-US" sz="850" dirty="0"/>
+          </a:p>
+          <a:p>
+            <a:pPr algn="ctr" indent="0" marL="0">
+              <a:buNone/>
+            </a:pPr>
+            <a:r>
+              <a:rPr lang="en-US" sz="1000" dirty="0">
+                <a:solidFill>
+                  <a:schemeClr val="bg1"/>
+                </a:solidFill>
+              </a:rPr>
+              <a:t>by base layout; plus a held-out region</a:t>
+            </a:r>
+            <a:endParaRPr lang="en-US" sz="850" dirty="0"/>
+          </a:p>
+        </p:txBody>
+      </p:sp>
+      <p:sp>
+        <p:nvSpPr>
+          <p:cNvPr id="6" name="LayoutSurrogate"/>
+          <p:cNvSpPr txBox="1"/>
+          <p:nvPr/>
+        </p:nvSpPr>
+        <p:spPr>
+          <a:xfrm>
+            <a:off x="5047488" y="1554480"/>
+            <a:ext cx="2011680" cy="868680"/>
+          </a:xfrm>
+          <a:prstGeom prst="roundRect">
+            <a:avLst>
+              <a:gd name="adj" fmla="val 8421"/>
+            </a:avLst>
+          </a:prstGeom>
+          <a:solidFill>
+            <a:schemeClr val="accent1"/>
+          </a:solidFill>
+          <a:ln/>
+        </p:spPr>
+        <p:txBody>
+          <a:bodyPr wrap="square" lIns="38100" tIns="38100" rIns="38100" bIns="38100" rtlCol="0" anchor="ctr"/>
+          <a:lstStyle/>
+          <a:p>
+            <a:pPr algn="ctr" indent="0" marL="0">
+              <a:buNone/>
+            </a:pPr>
+            <a:r>
+              <a:rPr lang="en-US" sz="850" b="1" dirty="0">
+                <a:solidFill>
+                  <a:schemeClr val="bg1"/>
+                </a:solidFill>
+                <a:latin typeface="Courier New" pitchFamily="34" charset="0"/>
+                <a:ea typeface="Courier New" pitchFamily="34" charset="-122"/>
+                <a:cs typeface="Courier New" pitchFamily="34" charset="-120"/>
+              </a:rPr>
+              <a:t>LayoutSurrogate</a:t>
+            </a:r>
+            <a:endParaRPr lang="en-US" sz="850" dirty="0"/>
+          </a:p>
+          <a:p>
+            <a:pPr algn="ctr" indent="0" marL="0">
+              <a:buNone/>
+            </a:pPr>
+            <a:r>
+              <a:rPr lang="en-US" sz="1000" dirty="0">
+                <a:solidFill>
+                  <a:schemeClr val="bg1"/>
+                </a:solidFill>
+              </a:rPr>
+              <a:t>coverage · log risk · rigid?</a:t>
+            </a:r>
+            <a:endParaRPr lang="en-US" sz="850" dirty="0"/>
+          </a:p>
+        </p:txBody>
+      </p:sp>
+      <p:sp>
+        <p:nvSpPr>
+          <p:cNvPr id="7" name="surrogate_assisted_search()"/>
+          <p:cNvSpPr txBox="1"/>
+          <p:nvPr/>
+        </p:nvSpPr>
+        <p:spPr>
+          <a:xfrm>
+            <a:off x="7296912" y="1554480"/>
+            <a:ext cx="2011680" cy="868680"/>
+          </a:xfrm>
+          <a:prstGeom prst="roundRect">
+            <a:avLst>
+              <a:gd name="adj" fmla="val 8421"/>
+            </a:avLst>
+          </a:prstGeom>
+          <a:solidFill>
+            <a:schemeClr val="accent1"/>
+          </a:solidFill>
+          <a:ln/>
+        </p:spPr>
+        <p:txBody>
+          <a:bodyPr wrap="square" lIns="38100" tIns="38100" rIns="38100" bIns="38100" rtlCol="0" anchor="ctr"/>
+          <a:lstStyle/>
+          <a:p>
+            <a:pPr algn="ctr" indent="0" marL="0">
+              <a:buNone/>
+            </a:pPr>
+            <a:r>
+              <a:rPr lang="en-US" sz="850" b="1" dirty="0">
+                <a:solidFill>
+                  <a:schemeClr val="bg1"/>
+                </a:solidFill>
+                <a:latin typeface="Courier New" pitchFamily="34" charset="0"/>
+                <a:ea typeface="Courier New" pitchFamily="34" charset="-122"/>
+                <a:cs typeface="Courier New" pitchFamily="34" charset="-120"/>
+              </a:rPr>
+              <a:t>surrogate_assisted_search()</a:t>
+            </a:r>
+            <a:endParaRPr lang="en-US" sz="850" dirty="0"/>
+          </a:p>
+          <a:p>
+            <a:pPr algn="ctr" indent="0" marL="0">
+              <a:buNone/>
+            </a:pPr>
+            <a:r>
+              <a:rPr lang="en-US" sz="1000" dirty="0">
+                <a:solidFill>
+                  <a:schemeClr val="bg1"/>
+                </a:solidFill>
+              </a:rPr>
+              <a:t>GA on the surrogate, 4 rounds</a:t>
+            </a:r>
+            <a:endParaRPr lang="en-US" sz="850" dirty="0"/>
+          </a:p>
+        </p:txBody>
+      </p:sp>
+      <p:sp>
+        <p:nvSpPr>
+          <p:cNvPr id="8" name="evaluate_layout()"/>
+          <p:cNvSpPr txBox="1"/>
+          <p:nvPr/>
+        </p:nvSpPr>
+        <p:spPr>
+          <a:xfrm>
+            <a:off x="9546336" y="1554480"/>
+            <a:ext cx="2011680" cy="868680"/>
+          </a:xfrm>
+          <a:prstGeom prst="roundRect">
+            <a:avLst>
+              <a:gd name="adj" fmla="val 8421"/>
+            </a:avLst>
+          </a:prstGeom>
+          <a:solidFill>
+            <a:schemeClr val="accent3"/>
+          </a:solidFill>
+          <a:ln/>
+        </p:spPr>
+        <p:txBody>
+          <a:bodyPr wrap="square" lIns="38100" tIns="38100" rIns="38100" bIns="38100" rtlCol="0" anchor="ctr"/>
+          <a:lstStyle/>
+          <a:p>
+            <a:pPr algn="ctr" indent="0" marL="0">
+              <a:buNone/>
+            </a:pPr>
+            <a:r>
+              <a:rPr lang="en-US" sz="850" b="1" dirty="0">
+                <a:solidFill>
+                  <a:schemeClr val="bg1"/>
+                </a:solidFill>
+                <a:latin typeface="Courier New" pitchFamily="34" charset="0"/>
+                <a:ea typeface="Courier New" pitchFamily="34" charset="-122"/>
+                <a:cs typeface="Courier New" pitchFamily="34" charset="-120"/>
+              </a:rPr>
+              <a:t>evaluate_layout()</a:t>
+            </a:r>
+            <a:endParaRPr lang="en-US" sz="850" dirty="0"/>
+          </a:p>
+          <a:p>
+            <a:pPr algn="ctr" indent="0" marL="0">
+              <a:buNone/>
+            </a:pPr>
+            <a:r>
+              <a:rPr lang="en-US" sz="1000" dirty="0">
+                <a:solidFill>
+                  <a:schemeClr val="bg1"/>
+                </a:solidFill>
+              </a:rPr>
+              <a:t>every plan re-scored exactly</a:t>
+            </a:r>
+            <a:endParaRPr lang="en-US" sz="850" dirty="0"/>
+          </a:p>
+        </p:txBody>
+      </p:sp>
+      <p:sp>
+        <p:nvSpPr>
+          <p:cNvPr id="9" name="Shape 7"/>
+          <p:cNvSpPr/>
+          <p:nvPr/>
+        </p:nvSpPr>
+        <p:spPr>
+          <a:xfrm>
+            <a:off x="2560320" y="1988820"/>
+            <a:ext cx="237744" cy="0"/>
+          </a:xfrm>
+          <a:prstGeom prst="line">
+            <a:avLst/>
+          </a:prstGeom>
+          <a:noFill/>
+          <a:ln w="19050">
+            <a:solidFill>
+              <a:schemeClr val="accent4"/>
+            </a:solidFill>
+            <a:prstDash val="solid"/>
+            <a:tailEnd type="triangle"/>
+          </a:ln>
+        </p:spPr>
+      </p:sp>
+      <p:sp>
+        <p:nvSpPr>
+          <p:cNvPr id="10" name="Shape 8"/>
+          <p:cNvSpPr/>
+          <p:nvPr/>
+        </p:nvSpPr>
+        <p:spPr>
+          <a:xfrm>
+            <a:off x="4809744" y="1988820"/>
+            <a:ext cx="237744" cy="0"/>
+          </a:xfrm>
+          <a:prstGeom prst="line">
+            <a:avLst/>
+          </a:prstGeom>
+          <a:noFill/>
+          <a:ln w="19050">
+            <a:solidFill>
+              <a:schemeClr val="accent4"/>
+            </a:solidFill>
+            <a:prstDash val="solid"/>
+            <a:tailEnd type="triangle"/>
+          </a:ln>
+        </p:spPr>
+      </p:sp>
+      <p:sp>
+        <p:nvSpPr>
+          <p:cNvPr id="11" name="Shape 9"/>
+          <p:cNvSpPr/>
+          <p:nvPr/>
+        </p:nvSpPr>
+        <p:spPr>
+          <a:xfrm>
+            <a:off x="7059168" y="1988820"/>
+            <a:ext cx="237744" cy="0"/>
+          </a:xfrm>
+          <a:prstGeom prst="line">
+            <a:avLst/>
+          </a:prstGeom>
+          <a:noFill/>
+          <a:ln w="19050">
+            <a:solidFill>
+              <a:schemeClr val="accent4"/>
+            </a:solidFill>
+            <a:prstDash val="solid"/>
+            <a:tailEnd type="triangle"/>
+          </a:ln>
+        </p:spPr>
+      </p:sp>
+      <p:sp>
+        <p:nvSpPr>
+          <p:cNvPr id="12" name="Shape 10"/>
+          <p:cNvSpPr/>
+          <p:nvPr/>
+        </p:nvSpPr>
+        <p:spPr>
+          <a:xfrm>
+            <a:off x="9308592" y="1988820"/>
+            <a:ext cx="237744" cy="0"/>
+          </a:xfrm>
+          <a:prstGeom prst="line">
+            <a:avLst/>
+          </a:prstGeom>
+          <a:noFill/>
+          <a:ln w="19050">
+            <a:solidFill>
+              <a:schemeClr val="accent4"/>
+            </a:solidFill>
+            <a:prstDash val="solid"/>
+            <a:tailEnd type="triangle"/>
+          </a:ln>
+        </p:spPr>
+      </p:sp>
+      <p:pic>
+        <p:nvPicPr>
+          <p:cNvPr id="13" name="Image 0" descr="Panel 10e: surrogate vs exact on held-out base layouts">    </p:cNvPr>
+          <p:cNvPicPr>
+            <a:picLocks noChangeAspect="1"/>
+          </p:cNvPicPr>
+          <p:nvPr/>
+        </p:nvPicPr>
+        <p:blipFill>
+          <a:blip r:embed="rId1"/>
+          <a:stretch>
+            <a:fillRect/>
+          </a:stretch>
+        </p:blipFill>
+        <p:spPr>
+          <a:xfrm>
+            <a:off x="548640" y="2788920"/>
+            <a:ext cx="6400800" cy="2100775"/>
+          </a:xfrm>
+          <a:prstGeom prst="rect">
+            <a:avLst/>
+          </a:prstGeom>
+        </p:spPr>
+      </p:pic>
+      <p:sp>
+        <p:nvSpPr>
+          <p:cNvPr id="14" name="Shape 11"/>
+          <p:cNvSpPr/>
+          <p:nvPr/>
+        </p:nvSpPr>
+        <p:spPr>
+          <a:xfrm>
+            <a:off x="548640" y="2788920"/>
+            <a:ext cx="6400800" cy="2100775"/>
+          </a:xfrm>
+          <a:prstGeom prst="rect">
+            <a:avLst/>
+          </a:prstGeom>
+          <a:ln w="12700">
+            <a:solidFill>
+              <a:schemeClr val="bg2"/>
+            </a:solidFill>
+            <a:prstDash val="solid"/>
+          </a:ln>
+        </p:spPr>
+      </p:sp>
+      <p:sp>
+        <p:nvSpPr>
+          <p:cNvPr id="15" name="Text 12"/>
+          <p:cNvSpPr txBox="1"/>
+          <p:nvPr/>
+        </p:nvSpPr>
+        <p:spPr>
+          <a:xfrm>
+            <a:off x="548640" y="4944559"/>
+            <a:ext cx="6400800" cy="274320"/>
+          </a:xfrm>
+          <a:prstGeom prst="rect">
+            <a:avLst/>
+          </a:prstGeom>
+          <a:noFill/>
+          <a:ln/>
+        </p:spPr>
+        <p:txBody>
+          <a:bodyPr wrap="square" lIns="0" tIns="0" rIns="0" bIns="0" rtlCol="0" anchor="ctr"/>
+          <a:lstStyle/>
+          <a:p>
+            <a:pPr algn="ctr" indent="0" marL="0">
+              <a:buNone/>
+            </a:pPr>
+            <a:r>
+              <a:rPr lang="en-US" sz="1050" i="1" dirty="0">
+                <a:solidFill>
+                  <a:schemeClr val="tx2"/>
+                </a:solidFill>
+              </a:rPr>
+              <a:t>held-out base layouts · every point is a layout the model never saw</a:t>
+            </a:r>
+            <a:endParaRPr lang="en-US" sz="1050" dirty="0"/>
+          </a:p>
+        </p:txBody>
+      </p:sp>
+      <p:sp>
+        <p:nvSpPr>
+          <p:cNvPr id="16" name="Shape 13"/>
+          <p:cNvSpPr/>
+          <p:nvPr/>
+        </p:nvSpPr>
+        <p:spPr>
+          <a:xfrm>
+            <a:off x="7178040" y="2788920"/>
+            <a:ext cx="2103120" cy="1417320"/>
+          </a:xfrm>
+          <a:prstGeom prst="roundRect">
+            <a:avLst>
+              <a:gd name="adj" fmla="val 5161"/>
             </a:avLst>
           </a:prstGeom>
           <a:solidFill>
@@ -11228,14 +11898,14 @@
       </p:sp>
       <p:sp>
         <p:nvSpPr>
-          <p:cNvPr id="5" name="Text 3"/>
-          <p:cNvSpPr txBox="1"/>
-          <p:nvPr/>
-        </p:nvSpPr>
-        <p:spPr>
-          <a:xfrm>
-            <a:off x="777240" y="2011680"/>
-            <a:ext cx="2157984" cy="1051560"/>
+          <p:cNvPr id="17" name="Text 14"/>
+          <p:cNvSpPr txBox="1"/>
+          <p:nvPr/>
+        </p:nvSpPr>
+        <p:spPr>
+          <a:xfrm>
+            <a:off x="7315200" y="2834640"/>
+            <a:ext cx="1828800" cy="822046"/>
           </a:xfrm>
           <a:prstGeom prst="rect">
             <a:avLst/>
@@ -11247,11 +11917,11 @@
           <a:bodyPr wrap="square" lIns="0" tIns="0" rIns="0" bIns="0" rtlCol="0" anchor="b"/>
           <a:lstStyle/>
           <a:p>
-            <a:pPr indent="0" marL="0">
-              <a:buNone/>
-            </a:pPr>
-            <a:r>
-              <a:rPr lang="en-US" sz="5400" b="1" dirty="0">
+            <a:pPr algn="l" indent="0" marL="0">
+              <a:buNone/>
+            </a:pPr>
+            <a:r>
+              <a:rPr lang="en-US" sz="3200" b="1" dirty="0">
                 <a:solidFill>
                   <a:schemeClr val="accent1"/>
                 </a:solidFill>
@@ -11259,22 +11929,22 @@
                 <a:ea typeface="Cambria" pitchFamily="34" charset="-122"/>
                 <a:cs typeface="Cambria" pitchFamily="34" charset="-120"/>
               </a:rPr>
-              <a:t>174</a:t>
-            </a:r>
-            <a:endParaRPr lang="en-US" sz="5400" dirty="0"/>
-          </a:p>
-        </p:txBody>
-      </p:sp>
-      <p:sp>
-        <p:nvSpPr>
-          <p:cNvPr id="6" name="Text 4"/>
-          <p:cNvSpPr txBox="1"/>
-          <p:nvPr/>
-        </p:nvSpPr>
-        <p:spPr>
-          <a:xfrm>
-            <a:off x="777240" y="3154680"/>
-            <a:ext cx="2157984" cy="685800"/>
+              <a:t>R² 0.97</a:t>
+            </a:r>
+            <a:endParaRPr lang="en-US" sz="3200" dirty="0"/>
+          </a:p>
+        </p:txBody>
+      </p:sp>
+      <p:sp>
+        <p:nvSpPr>
+          <p:cNvPr id="18" name="Text 15"/>
+          <p:cNvSpPr txBox="1"/>
+          <p:nvPr/>
+        </p:nvSpPr>
+        <p:spPr>
+          <a:xfrm>
+            <a:off x="7315200" y="3667658"/>
+            <a:ext cx="1828800" cy="467716"/>
           </a:xfrm>
           <a:prstGeom prst="rect">
             <a:avLst/>
@@ -11286,71 +11956,35 @@
           <a:bodyPr wrap="square" lIns="0" tIns="0" rIns="0" bIns="0" rtlCol="0" anchor="t"/>
           <a:lstStyle/>
           <a:p>
-            <a:pPr indent="0" marL="0">
-              <a:buNone/>
-            </a:pPr>
-            <a:r>
-              <a:rPr lang="en-US" sz="1600" b="1" dirty="0">
-                <a:solidFill>
-                  <a:schemeClr val="tx1"/>
-                </a:solidFill>
-              </a:rPr>
-              <a:t>automated tests</a:t>
-            </a:r>
-            <a:endParaRPr lang="en-US" sz="1600" dirty="0"/>
-          </a:p>
-        </p:txBody>
-      </p:sp>
-      <p:sp>
-        <p:nvSpPr>
-          <p:cNvPr id="7" name="Text 5"/>
-          <p:cNvSpPr txBox="1"/>
-          <p:nvPr/>
-        </p:nvSpPr>
-        <p:spPr>
-          <a:xfrm>
-            <a:off x="777240" y="3886200"/>
-            <a:ext cx="2157984" cy="1783080"/>
-          </a:xfrm>
-          <a:prstGeom prst="rect">
-            <a:avLst/>
-          </a:prstGeom>
-          <a:noFill/>
-          <a:ln/>
-        </p:spPr>
-        <p:txBody>
-          <a:bodyPr wrap="square" lIns="0" tIns="0" rIns="0" bIns="0" rtlCol="0" anchor="t"/>
-          <a:lstStyle/>
-          <a:p>
-            <a:pPr indent="0" marL="0">
-              <a:buNone/>
-            </a:pPr>
-            <a:r>
-              <a:rPr lang="en-US" sz="1400" dirty="0">
+            <a:pPr algn="l" indent="0" marL="0">
+              <a:buNone/>
+            </a:pPr>
+            <a:r>
+              <a:rPr lang="en-US" sz="1200" dirty="0">
                 <a:solidFill>
                   <a:schemeClr val="tx2"/>
                 </a:solidFill>
               </a:rPr>
-              <a:t>One gate per build step, checked against CLAUDE.md §4 reference numbers, e.g. 5–7 : 1 anisotropy at 2.5 m.</a:t>
-            </a:r>
-            <a:endParaRPr lang="en-US" sz="1400" dirty="0"/>
-          </a:p>
-        </p:txBody>
-      </p:sp>
-      <p:sp>
-        <p:nvSpPr>
-          <p:cNvPr id="8" name="check card figures changed on regeneration"/>
+              <a:t>fraction measured, held out; log P(escape) 0.94</a:t>
+            </a:r>
+            <a:endParaRPr lang="en-US" sz="1200" dirty="0"/>
+          </a:p>
+        </p:txBody>
+      </p:sp>
+      <p:sp>
+        <p:nvSpPr>
+          <p:cNvPr id="19" name="Shape 16"/>
           <p:cNvSpPr/>
           <p:nvPr/>
         </p:nvSpPr>
         <p:spPr>
           <a:xfrm>
-            <a:off x="3346704" y="1737360"/>
-            <a:ext cx="2615184" cy="3611880"/>
+            <a:off x="9390888" y="2788920"/>
+            <a:ext cx="2103120" cy="1417320"/>
           </a:xfrm>
           <a:prstGeom prst="roundRect">
             <a:avLst>
-              <a:gd name="adj" fmla="val 3497"/>
+              <a:gd name="adj" fmla="val 5161"/>
             </a:avLst>
           </a:prstGeom>
           <a:solidFill>
@@ -11361,14 +11995,14 @@
       </p:sp>
       <p:sp>
         <p:nvSpPr>
-          <p:cNvPr id="9" name="Text 7"/>
-          <p:cNvSpPr txBox="1"/>
-          <p:nvPr/>
-        </p:nvSpPr>
-        <p:spPr>
-          <a:xfrm>
-            <a:off x="3575304" y="2011680"/>
-            <a:ext cx="2157984" cy="1051560"/>
+          <p:cNvPr id="20" name="Text 17"/>
+          <p:cNvSpPr txBox="1"/>
+          <p:nvPr/>
+        </p:nvSpPr>
+        <p:spPr>
+          <a:xfrm>
+            <a:off x="9528048" y="2834640"/>
+            <a:ext cx="1828800" cy="822046"/>
           </a:xfrm>
           <a:prstGeom prst="rect">
             <a:avLst/>
@@ -11380,34 +12014,34 @@
           <a:bodyPr wrap="square" lIns="0" tIns="0" rIns="0" bIns="0" rtlCol="0" anchor="b"/>
           <a:lstStyle/>
           <a:p>
-            <a:pPr indent="0" marL="0">
-              <a:buNone/>
-            </a:pPr>
-            <a:r>
-              <a:rPr lang="en-US" sz="5400" b="1" dirty="0">
-                <a:solidFill>
-                  <a:schemeClr val="accent1"/>
+            <a:pPr algn="l" indent="0" marL="0">
+              <a:buNone/>
+            </a:pPr>
+            <a:r>
+              <a:rPr lang="en-US" sz="3200" b="1" dirty="0">
+                <a:solidFill>
+                  <a:schemeClr val="accent3"/>
                 </a:solidFill>
                 <a:latin typeface="Cambria" pitchFamily="34" charset="0"/>
                 <a:ea typeface="Cambria" pitchFamily="34" charset="-122"/>
                 <a:cs typeface="Cambria" pitchFamily="34" charset="-120"/>
               </a:rPr>
-              <a:t>0</a:t>
-            </a:r>
-            <a:endParaRPr lang="en-US" sz="5400" dirty="0"/>
-          </a:p>
-        </p:txBody>
-      </p:sp>
-      <p:sp>
-        <p:nvSpPr>
-          <p:cNvPr id="10" name="Text 8"/>
-          <p:cNvSpPr txBox="1"/>
-          <p:nvPr/>
-        </p:nvSpPr>
-        <p:spPr>
-          <a:xfrm>
-            <a:off x="3575304" y="3154680"/>
-            <a:ext cx="2157984" cy="685800"/>
+              <a:t>R² 0.09</a:t>
+            </a:r>
+            <a:endParaRPr lang="en-US" sz="3200" dirty="0"/>
+          </a:p>
+        </p:txBody>
+      </p:sp>
+      <p:sp>
+        <p:nvSpPr>
+          <p:cNvPr id="21" name="Text 18"/>
+          <p:cNvSpPr txBox="1"/>
+          <p:nvPr/>
+        </p:nvSpPr>
+        <p:spPr>
+          <a:xfrm>
+            <a:off x="9528048" y="3667658"/>
+            <a:ext cx="1828800" cy="467716"/>
           </a:xfrm>
           <a:prstGeom prst="rect">
             <a:avLst/>
@@ -11419,71 +12053,35 @@
           <a:bodyPr wrap="square" lIns="0" tIns="0" rIns="0" bIns="0" rtlCol="0" anchor="t"/>
           <a:lstStyle/>
           <a:p>
-            <a:pPr indent="0" marL="0">
-              <a:buNone/>
-            </a:pPr>
-            <a:r>
-              <a:rPr lang="en-US" sz="1600" b="1" dirty="0">
-                <a:solidFill>
-                  <a:schemeClr val="tx1"/>
-                </a:solidFill>
-              </a:rPr>
-              <a:t>figures changed on regeneration</a:t>
-            </a:r>
-            <a:endParaRPr lang="en-US" sz="1600" dirty="0"/>
-          </a:p>
-        </p:txBody>
-      </p:sp>
-      <p:sp>
-        <p:nvSpPr>
-          <p:cNvPr id="11" name="Text 9"/>
-          <p:cNvSpPr txBox="1"/>
-          <p:nvPr/>
-        </p:nvSpPr>
-        <p:spPr>
-          <a:xfrm>
-            <a:off x="3575304" y="3886200"/>
-            <a:ext cx="2157984" cy="1783080"/>
-          </a:xfrm>
-          <a:prstGeom prst="rect">
-            <a:avLst/>
-          </a:prstGeom>
-          <a:noFill/>
-          <a:ln/>
-        </p:spPr>
-        <p:txBody>
-          <a:bodyPr wrap="square" lIns="0" tIns="0" rIns="0" bIns="0" rtlCol="0" anchor="t"/>
-          <a:lstStyle/>
-          <a:p>
-            <a:pPr indent="0" marL="0">
-              <a:buNone/>
-            </a:pPr>
-            <a:r>
-              <a:rPr lang="en-US" sz="1400" dirty="0">
+            <a:pPr algn="l" indent="0" marL="0">
+              <a:buNone/>
+            </a:pPr>
+            <a:r>
+              <a:rPr lang="en-US" sz="1200" dirty="0">
                 <a:solidFill>
                   <a:schemeClr val="tx2"/>
                 </a:solidFill>
               </a:rPr>
-              <a:t>Fixed seeds and noiseless observations: re-running make_figures leaves git diff results/ empty.</a:t>
-            </a:r>
-            <a:endParaRPr lang="en-US" sz="1400" dirty="0"/>
-          </a:p>
-        </p:txBody>
-      </p:sp>
-      <p:sp>
-        <p:nvSpPr>
-          <p:cNvPr id="12" name="check card design vs noisy covariance"/>
+              <a:t>E[false rejects], bulk of layouts</a:t>
+            </a:r>
+            <a:endParaRPr lang="en-US" sz="1200" dirty="0"/>
+          </a:p>
+        </p:txBody>
+      </p:sp>
+      <p:sp>
+        <p:nvSpPr>
+          <p:cNvPr id="22" name="Shape 19"/>
           <p:cNvSpPr/>
           <p:nvPr/>
         </p:nvSpPr>
         <p:spPr>
           <a:xfrm>
-            <a:off x="6144768" y="1737360"/>
-            <a:ext cx="2615184" cy="3611880"/>
+            <a:off x="7178040" y="4315968"/>
+            <a:ext cx="2103120" cy="1417320"/>
           </a:xfrm>
           <a:prstGeom prst="roundRect">
             <a:avLst>
-              <a:gd name="adj" fmla="val 3497"/>
+              <a:gd name="adj" fmla="val 5161"/>
             </a:avLst>
           </a:prstGeom>
           <a:solidFill>
@@ -11494,14 +12092,14 @@
       </p:sp>
       <p:sp>
         <p:nvSpPr>
-          <p:cNvPr id="13" name="Text 11"/>
-          <p:cNvSpPr txBox="1"/>
-          <p:nvPr/>
-        </p:nvSpPr>
-        <p:spPr>
-          <a:xfrm>
-            <a:off x="6373368" y="2011680"/>
-            <a:ext cx="2157984" cy="1051560"/>
+          <p:cNvPr id="23" name="Text 20"/>
+          <p:cNvSpPr txBox="1"/>
+          <p:nvPr/>
+        </p:nvSpPr>
+        <p:spPr>
+          <a:xfrm>
+            <a:off x="7315200" y="4361688"/>
+            <a:ext cx="1828800" cy="822046"/>
           </a:xfrm>
           <a:prstGeom prst="rect">
             <a:avLst/>
@@ -11513,11 +12111,11 @@
           <a:bodyPr wrap="square" lIns="0" tIns="0" rIns="0" bIns="0" rtlCol="0" anchor="b"/>
           <a:lstStyle/>
           <a:p>
-            <a:pPr indent="0" marL="0">
-              <a:buNone/>
-            </a:pPr>
-            <a:r>
-              <a:rPr lang="en-US" sz="5400" b="1" dirty="0">
+            <a:pPr algn="l" indent="0" marL="0">
+              <a:buNone/>
+            </a:pPr>
+            <a:r>
+              <a:rPr lang="en-US" sz="3200" b="1" dirty="0">
                 <a:solidFill>
                   <a:schemeClr val="accent1"/>
                 </a:solidFill>
@@ -11525,22 +12123,22 @@
                 <a:ea typeface="Cambria" pitchFamily="34" charset="-122"/>
                 <a:cs typeface="Cambria" pitchFamily="34" charset="-120"/>
               </a:rPr>
-              <a:t>≤ 5%</a:t>
-            </a:r>
-            <a:endParaRPr lang="en-US" sz="5400" dirty="0"/>
-          </a:p>
-        </p:txBody>
-      </p:sp>
-      <p:sp>
-        <p:nvSpPr>
-          <p:cNvPr id="14" name="Text 12"/>
-          <p:cNvSpPr txBox="1"/>
-          <p:nvPr/>
-        </p:nvSpPr>
-        <p:spPr>
-          <a:xfrm>
-            <a:off x="6373368" y="3154680"/>
-            <a:ext cx="2157984" cy="685800"/>
+              <a:t>29–61×</a:t>
+            </a:r>
+            <a:endParaRPr lang="en-US" sz="3200" dirty="0"/>
+          </a:p>
+        </p:txBody>
+      </p:sp>
+      <p:sp>
+        <p:nvSpPr>
+          <p:cNvPr id="24" name="Text 21"/>
+          <p:cNvSpPr txBox="1"/>
+          <p:nvPr/>
+        </p:nvSpPr>
+        <p:spPr>
+          <a:xfrm>
+            <a:off x="7315200" y="5194706"/>
+            <a:ext cx="1828800" cy="467716"/>
           </a:xfrm>
           <a:prstGeom prst="rect">
             <a:avLst/>
@@ -11552,71 +12150,35 @@
           <a:bodyPr wrap="square" lIns="0" tIns="0" rIns="0" bIns="0" rtlCol="0" anchor="t"/>
           <a:lstStyle/>
           <a:p>
-            <a:pPr indent="0" marL="0">
-              <a:buNone/>
-            </a:pPr>
-            <a:r>
-              <a:rPr lang="en-US" sz="1600" b="1" dirty="0">
-                <a:solidFill>
-                  <a:schemeClr val="tx1"/>
-                </a:solidFill>
-              </a:rPr>
-              <a:t>design vs noisy covariance</a:t>
-            </a:r>
-            <a:endParaRPr lang="en-US" sz="1600" dirty="0"/>
-          </a:p>
-        </p:txBody>
-      </p:sp>
-      <p:sp>
-        <p:nvSpPr>
-          <p:cNvPr id="15" name="Text 13"/>
-          <p:cNvSpPr txBox="1"/>
-          <p:nvPr/>
-        </p:nvSpPr>
-        <p:spPr>
-          <a:xfrm>
-            <a:off x="6373368" y="3886200"/>
-            <a:ext cx="2157984" cy="1783080"/>
-          </a:xfrm>
-          <a:prstGeom prst="rect">
-            <a:avLst/>
-          </a:prstGeom>
-          <a:noFill/>
-          <a:ln/>
-        </p:spPr>
-        <p:txBody>
-          <a:bodyPr wrap="square" lIns="0" tIns="0" rIns="0" bIns="0" rtlCol="0" anchor="t"/>
-          <a:lstStyle/>
-          <a:p>
-            <a:pPr indent="0" marL="0">
-              <a:buNone/>
-            </a:pPr>
-            <a:r>
-              <a:rPr lang="en-US" sz="1400" dirty="0">
+            <a:pPr algn="l" indent="0" marL="0">
+              <a:buNone/>
+            </a:pPr>
+            <a:r>
+              <a:rPr lang="en-US" sz="1200" dirty="0">
                 <a:solidFill>
                   <a:schemeClr val="tx2"/>
                 </a:solidFill>
               </a:rPr>
-              <a:t>A test pins the noiseless design covariance to a genuinely noisy network solve.</a:t>
-            </a:r>
-            <a:endParaRPr lang="en-US" sz="1400" dirty="0"/>
-          </a:p>
-        </p:txBody>
-      </p:sp>
-      <p:sp>
-        <p:nvSpPr>
-          <p:cNvPr id="16" name="check card GA cross-checks per scene"/>
+              <a:t>fewer exact evaluations, same station count</a:t>
+            </a:r>
+            <a:endParaRPr lang="en-US" sz="1200" dirty="0"/>
+          </a:p>
+        </p:txBody>
+      </p:sp>
+      <p:sp>
+        <p:nvSpPr>
+          <p:cNvPr id="25" name="Shape 22"/>
           <p:cNvSpPr/>
           <p:nvPr/>
         </p:nvSpPr>
         <p:spPr>
           <a:xfrm>
-            <a:off x="8942832" y="1737360"/>
-            <a:ext cx="2615184" cy="3611880"/>
+            <a:off x="9390888" y="4315968"/>
+            <a:ext cx="2103120" cy="1417320"/>
           </a:xfrm>
           <a:prstGeom prst="roundRect">
             <a:avLst>
-              <a:gd name="adj" fmla="val 3497"/>
+              <a:gd name="adj" fmla="val 5161"/>
             </a:avLst>
           </a:prstGeom>
           <a:solidFill>
@@ -11627,14 +12189,14 @@
       </p:sp>
       <p:sp>
         <p:nvSpPr>
-          <p:cNvPr id="17" name="Text 15"/>
-          <p:cNvSpPr txBox="1"/>
-          <p:nvPr/>
-        </p:nvSpPr>
-        <p:spPr>
-          <a:xfrm>
-            <a:off x="9171432" y="2011680"/>
-            <a:ext cx="2157984" cy="1051560"/>
+          <p:cNvPr id="26" name="Text 23"/>
+          <p:cNvSpPr txBox="1"/>
+          <p:nvPr/>
+        </p:nvSpPr>
+        <p:spPr>
+          <a:xfrm>
+            <a:off x="9528048" y="4361688"/>
+            <a:ext cx="1828800" cy="822046"/>
           </a:xfrm>
           <a:prstGeom prst="rect">
             <a:avLst/>
@@ -11646,11 +12208,11 @@
           <a:bodyPr wrap="square" lIns="0" tIns="0" rIns="0" bIns="0" rtlCol="0" anchor="b"/>
           <a:lstStyle/>
           <a:p>
-            <a:pPr indent="0" marL="0">
-              <a:buNone/>
-            </a:pPr>
-            <a:r>
-              <a:rPr lang="en-US" sz="5400" b="1" dirty="0">
+            <a:pPr algn="l" indent="0" marL="0">
+              <a:buNone/>
+            </a:pPr>
+            <a:r>
+              <a:rPr lang="en-US" sz="3200" b="1" dirty="0">
                 <a:solidFill>
                   <a:schemeClr val="accent3"/>
                 </a:solidFill>
@@ -11658,22 +12220,22 @@
                 <a:ea typeface="Cambria" pitchFamily="34" charset="-122"/>
                 <a:cs typeface="Cambria" pitchFamily="34" charset="-120"/>
               </a:rPr>
-              <a:t>16</a:t>
-            </a:r>
-            <a:endParaRPr lang="en-US" sz="5400" dirty="0"/>
-          </a:p>
-        </p:txBody>
-      </p:sp>
-      <p:sp>
-        <p:nvSpPr>
-          <p:cNvPr id="18" name="Text 16"/>
-          <p:cNvSpPr txBox="1"/>
-          <p:nvPr/>
-        </p:nvSpPr>
-        <p:spPr>
-          <a:xfrm>
-            <a:off x="9171432" y="3154680"/>
-            <a:ext cx="2157984" cy="685800"/>
+              <a:t>no gain</a:t>
+            </a:r>
+            <a:endParaRPr lang="en-US" sz="3200" dirty="0"/>
+          </a:p>
+        </p:txBody>
+      </p:sp>
+      <p:sp>
+        <p:nvSpPr>
+          <p:cNvPr id="27" name="Text 24"/>
+          <p:cNvSpPr txBox="1"/>
+          <p:nvPr/>
+        </p:nvSpPr>
+        <p:spPr>
+          <a:xfrm>
+            <a:off x="9528048" y="5194706"/>
+            <a:ext cx="1828800" cy="467716"/>
           </a:xfrm>
           <a:prstGeom prst="rect">
             <a:avLst/>
@@ -11685,54 +12247,75 @@
           <a:bodyPr wrap="square" lIns="0" tIns="0" rIns="0" bIns="0" rtlCol="0" anchor="t"/>
           <a:lstStyle/>
           <a:p>
-            <a:pPr indent="0" marL="0">
-              <a:buNone/>
-            </a:pPr>
-            <a:r>
-              <a:rPr lang="en-US" sz="1600" b="1" dirty="0">
+            <a:pPr algn="l" indent="0" marL="0">
+              <a:buNone/>
+            </a:pPr>
+            <a:r>
+              <a:rPr lang="en-US" sz="1200" dirty="0">
+                <a:solidFill>
+                  <a:schemeClr val="tx2"/>
+                </a:solidFill>
+              </a:rPr>
+              <a:t>in wall-clock: the evaluator is ~5–10 ms</a:t>
+            </a:r>
+            <a:endParaRPr lang="en-US" sz="1200" dirty="0"/>
+          </a:p>
+        </p:txBody>
+      </p:sp>
+      <p:sp>
+        <p:nvSpPr>
+          <p:cNvPr id="28" name="CHECK callout"/>
+          <p:cNvSpPr txBox="1"/>
+          <p:nvPr/>
+        </p:nvSpPr>
+        <p:spPr>
+          <a:xfrm>
+            <a:off x="548640" y="5285232"/>
+            <a:ext cx="6400800" cy="914400"/>
+          </a:xfrm>
+          <a:prstGeom prst="roundRect">
+            <a:avLst>
+              <a:gd name="adj" fmla="val 8000"/>
+            </a:avLst>
+          </a:prstGeom>
+          <a:solidFill>
+            <a:schemeClr val="accent3">
+              <a:alpha val="12000"/>
+            </a:schemeClr>
+          </a:solidFill>
+          <a:ln w="12700">
+            <a:solidFill>
+              <a:schemeClr val="accent3"/>
+            </a:solidFill>
+          </a:ln>
+        </p:spPr>
+        <p:txBody>
+          <a:bodyPr wrap="square" lIns="101600" tIns="101600" rIns="101600" bIns="101600" rtlCol="0" anchor="ctr"/>
+          <a:lstStyle/>
+          <a:p>
+            <a:pPr algn="l" indent="0" marL="0">
+              <a:buNone/>
+            </a:pPr>
+            <a:r>
+              <a:rPr lang="en-US" sz="1150" b="1" dirty="0">
+                <a:solidFill>
+                  <a:schemeClr val="accent3"/>
+                </a:solidFill>
+              </a:rPr>
+              <a:t>CHECK   </a:t>
+            </a:r>
+            <a:pPr algn="l" indent="0" marL="0">
+              <a:buNone/>
+            </a:pPr>
+            <a:r>
+              <a:rPr lang="en-US" sz="1150" dirty="0">
                 <a:solidFill>
                   <a:schemeClr val="tx1"/>
                 </a:solidFill>
               </a:rPr>
-              <a:t>GA cross-checks per scene</a:t>
-            </a:r>
-            <a:endParaRPr lang="en-US" sz="1600" dirty="0"/>
-          </a:p>
-        </p:txBody>
-      </p:sp>
-      <p:sp>
-        <p:nvSpPr>
-          <p:cNvPr id="19" name="Text 17"/>
-          <p:cNvSpPr txBox="1"/>
-          <p:nvPr/>
-        </p:nvSpPr>
-        <p:spPr>
-          <a:xfrm>
-            <a:off x="9171432" y="3886200"/>
-            <a:ext cx="2157984" cy="1783080"/>
-          </a:xfrm>
-          <a:prstGeom prst="rect">
-            <a:avLst/>
-          </a:prstGeom>
-          <a:noFill/>
-          <a:ln/>
-        </p:spPr>
-        <p:txBody>
-          <a:bodyPr wrap="square" lIns="0" tIns="0" rIns="0" bIns="0" rtlCol="0" anchor="t"/>
-          <a:lstStyle/>
-          <a:p>
-            <a:pPr indent="0" marL="0">
-              <a:buNone/>
-            </a:pPr>
-            <a:r>
-              <a:rPr lang="en-US" sz="1400" dirty="0">
-                <a:solidFill>
-                  <a:schemeClr val="tx2"/>
-                </a:solidFill>
-              </a:rPr>
-              <a:t>Each of 4 winning plans scored under all 4 objectives' formulas. This caught two wrong searches, and re-scoring later exposed an invalid-network loophole.</a:t>
-            </a:r>
-            <a:endParaRPr lang="en-US" sz="1400" dirty="0"/>
+              <a:t>used as the GA's objective with one round, none of the 60 best layouts met the limit at 2 or 4 stations, where the plain GA succeeds: the optimiser drives to where the model is wrong. Four rounds of exact re-scoring fix it.</a:t>
+            </a:r>
+            <a:endParaRPr lang="en-US" sz="1150" dirty="0"/>
           </a:p>
         </p:txBody>
       </p:sp>
@@ -11811,36 +12394,36 @@
           <p:cNvPr id="2" name="Text 0"/>
           <p:cNvSpPr/>
           <p:nvPr>
-            <p:ph idx="100" type="title" hasCustomPrompt="1"/>
+            <p:ph idx="100" type="body" hasCustomPrompt="1"/>
           </p:nvPr>
         </p:nvSpPr>
         <p:spPr>
           <a:xfrm>
-            <a:off x="731520" y="502920"/>
-            <a:ext cx="10698480" cy="822960"/>
-          </a:xfrm>
-          <a:prstGeom prst="rect">
-            <a:avLst/>
-          </a:prstGeom>
-          <a:noFill/>
-          <a:ln/>
-        </p:spPr>
-        <p:txBody>
-          <a:bodyPr wrap="square" rtlCol="0" anchor="ctr"/>
-          <a:lstStyle/>
-          <a:p>
-            <a:pPr algn="l" indent="0" marL="0">
-              <a:buNone/>
-            </a:pPr>
-            <a:r>
-              <a:rPr lang="en-US" sz="3800" b="1" dirty="0">
-                <a:solidFill>
-                  <a:schemeClr val="bg1"/>
-                </a:solidFill>
-              </a:rPr>
-              <a:t>Reproducing every figure</a:t>
-            </a:r>
-            <a:endParaRPr lang="en-US" sz="3800" dirty="0"/>
+            <a:off x="731520" y="2148840"/>
+            <a:ext cx="7132320" cy="457200"/>
+          </a:xfrm>
+          <a:prstGeom prst="rect">
+            <a:avLst/>
+          </a:prstGeom>
+          <a:noFill/>
+          <a:ln/>
+        </p:spPr>
+        <p:txBody>
+          <a:bodyPr wrap="square" rtlCol="0" anchor="b"/>
+          <a:lstStyle/>
+          <a:p>
+            <a:pPr indent="0" marL="0">
+              <a:buNone/>
+            </a:pPr>
+            <a:r>
+              <a:rPr lang="en-US" sz="1600" b="1" dirty="0">
+                <a:solidFill>
+                  <a:schemeClr val="accent2"/>
+                </a:solidFill>
+              </a:rPr>
+              <a:t>PART 3</a:t>
+            </a:r>
+            <a:endParaRPr lang="en-US" sz="1600" dirty="0"/>
           </a:p>
         </p:txBody>
       </p:sp>
@@ -11849,13 +12432,13 @@
           <p:cNvPr id="3" name="Text 0"/>
           <p:cNvSpPr/>
           <p:nvPr>
-            <p:ph idx="101" type="body" hasCustomPrompt="1"/>
+            <p:ph idx="101" type="title" hasCustomPrompt="1"/>
           </p:nvPr>
         </p:nvSpPr>
         <p:spPr>
           <a:xfrm>
-            <a:off x="731520" y="1280160"/>
-            <a:ext cx="10698480" cy="457200"/>
+            <a:off x="731520" y="2651760"/>
+            <a:ext cx="7680960" cy="1097280"/>
           </a:xfrm>
           <a:prstGeom prst="rect">
             <a:avLst/>
@@ -11867,6 +12450,44 @@
           <a:bodyPr wrap="square" rtlCol="0" anchor="ctr"/>
           <a:lstStyle/>
           <a:p>
+            <a:pPr algn="l" indent="0" marL="0">
+              <a:buNone/>
+            </a:pPr>
+            <a:r>
+              <a:rPr lang="en-US" sz="4000" b="1" dirty="0">
+                <a:solidFill>
+                  <a:schemeClr val="bg1"/>
+                </a:solidFill>
+              </a:rPr>
+              <a:t>From code to figures</a:t>
+            </a:r>
+            <a:endParaRPr lang="en-US" sz="4000" dirty="0"/>
+          </a:p>
+        </p:txBody>
+      </p:sp>
+      <p:sp>
+        <p:nvSpPr>
+          <p:cNvPr id="4" name="Text 0"/>
+          <p:cNvSpPr/>
+          <p:nvPr>
+            <p:ph idx="102" type="body" hasCustomPrompt="1"/>
+          </p:nvPr>
+        </p:nvSpPr>
+        <p:spPr>
+          <a:xfrm>
+            <a:off x="731520" y="3794760"/>
+            <a:ext cx="7315200" cy="1005840"/>
+          </a:xfrm>
+          <a:prstGeom prst="rect">
+            <a:avLst/>
+          </a:prstGeom>
+          <a:noFill/>
+          <a:ln/>
+        </p:spPr>
+        <p:txBody>
+          <a:bodyPr wrap="square" rtlCol="0" anchor="t"/>
+          <a:lstStyle/>
+          <a:p>
             <a:pPr indent="0" marL="0">
               <a:buNone/>
             </a:pPr>
@@ -11876,7 +12497,7 @@
                   <a:schemeClr val="accent5"/>
                 </a:solidFill>
               </a:rPr>
-              <a:t>Four commands from a fresh clone; full write-ups live in docs/</a:t>
+              <a:t>Which function draws which figure, and how each result is checked</a:t>
             </a:r>
             <a:endParaRPr lang="en-US" sz="1800" dirty="0"/>
           </a:p>
@@ -11884,337 +12505,40 @@
       </p:sp>
       <p:sp>
         <p:nvSpPr>
-          <p:cNvPr id="4" name="commands"/>
-          <p:cNvSpPr txBox="1"/>
-          <p:nvPr/>
-        </p:nvSpPr>
-        <p:spPr>
-          <a:xfrm>
-            <a:off x="731520" y="2103120"/>
-            <a:ext cx="10698480" cy="2377440"/>
-          </a:xfrm>
-          <a:prstGeom prst="roundRect">
-            <a:avLst>
-              <a:gd name="adj" fmla="val 3846"/>
-            </a:avLst>
-          </a:prstGeom>
-          <a:solidFill>
-            <a:schemeClr val="tx2"/>
-          </a:solidFill>
-          <a:ln/>
-        </p:spPr>
-        <p:txBody>
-          <a:bodyPr wrap="square" lIns="228600" tIns="228600" rIns="228600" bIns="228600" rtlCol="0" anchor="ctr"/>
-          <a:lstStyle/>
-          <a:p>
-            <a:pPr algn="l" indent="0" marL="0">
-              <a:spcAft>
-                <a:spcPts val="600"/>
-              </a:spcAft>
-              <a:buNone/>
-            </a:pPr>
-            <a:r>
-              <a:rPr lang="en-US" sz="1500" dirty="0">
-                <a:solidFill>
-                  <a:schemeClr val="bg1"/>
-                </a:solidFill>
-                <a:latin typeface="Courier New" pitchFamily="34" charset="0"/>
-                <a:ea typeface="Courier New" pitchFamily="34" charset="-122"/>
-                <a:cs typeface="Courier New" pitchFamily="34" charset="-120"/>
-              </a:rPr>
-              <a:t>pip install -r requirements.txt &amp;&amp; pip install -e .</a:t>
-            </a:r>
-            <a:endParaRPr lang="en-US" sz="1500" dirty="0"/>
-          </a:p>
-          <a:p>
-            <a:pPr algn="l" indent="0" marL="0">
-              <a:spcAft>
-                <a:spcPts val="600"/>
-              </a:spcAft>
-              <a:buNone/>
-            </a:pPr>
-            <a:r>
-              <a:rPr lang="en-US" sz="1500" dirty="0">
-                <a:solidFill>
-                  <a:schemeClr val="bg1"/>
-                </a:solidFill>
-                <a:latin typeface="Courier New" pitchFamily="34" charset="0"/>
-                <a:ea typeface="Courier New" pitchFamily="34" charset="-122"/>
-                <a:cs typeface="Courier New" pitchFamily="34" charset="-120"/>
-              </a:rPr>
-              <a:t>pytest</a:t>
-            </a:r>
-            <a:pPr algn="l" indent="0" marL="0">
-              <a:spcAft>
-                <a:spcPts val="600"/>
-              </a:spcAft>
-              <a:buNone/>
-            </a:pPr>
-            <a:r>
-              <a:rPr lang="en-US" sz="1500" dirty="0">
-                <a:solidFill>
-                  <a:schemeClr val="accent5"/>
-                </a:solidFill>
-                <a:latin typeface="Courier New" pitchFamily="34" charset="0"/>
-                <a:ea typeface="Courier New" pitchFamily="34" charset="-122"/>
-                <a:cs typeface="Courier New" pitchFamily="34" charset="-120"/>
-              </a:rPr>
-              <a:t>   # 174 tests, about three minutes</a:t>
-            </a:r>
-            <a:endParaRPr lang="en-US" sz="1500" dirty="0"/>
-          </a:p>
-          <a:p>
-            <a:pPr algn="l" indent="0" marL="0">
-              <a:spcAft>
-                <a:spcPts val="600"/>
-              </a:spcAft>
-              <a:buNone/>
-            </a:pPr>
-            <a:r>
-              <a:rPr lang="en-US" sz="1500" dirty="0">
-                <a:solidFill>
-                  <a:schemeClr val="bg1"/>
-                </a:solidFill>
-                <a:latin typeface="Courier New" pitchFamily="34" charset="0"/>
-                <a:ea typeface="Courier New" pitchFamily="34" charset="-122"/>
-                <a:cs typeface="Courier New" pitchFamily="34" charset="-120"/>
-              </a:rPr>
-              <a:t>python -m viz.make_figures</a:t>
-            </a:r>
-            <a:pPr algn="l" indent="0" marL="0">
-              <a:spcAft>
-                <a:spcPts val="600"/>
-              </a:spcAft>
-              <a:buNone/>
-            </a:pPr>
-            <a:r>
-              <a:rPr lang="en-US" sz="1500" dirty="0">
-                <a:solidFill>
-                  <a:schemeClr val="accent5"/>
-                </a:solidFill>
-                <a:latin typeface="Courier New" pitchFamily="34" charset="0"/>
-                <a:ea typeface="Courier New" pitchFamily="34" charset="-122"/>
-                <a:cs typeface="Courier New" pitchFamily="34" charset="-120"/>
-              </a:rPr>
-              <a:t>   # panels 1–8, 2–3 min, identical every run</a:t>
-            </a:r>
-            <a:endParaRPr lang="en-US" sz="1500" dirty="0"/>
-          </a:p>
-          <a:p>
-            <a:pPr algn="l" indent="0" marL="0">
-              <a:spcAft>
-                <a:spcPts val="600"/>
-              </a:spcAft>
-              <a:buNone/>
-            </a:pPr>
-            <a:r>
-              <a:rPr lang="en-US" sz="1500" dirty="0">
-                <a:solidFill>
-                  <a:schemeClr val="bg1"/>
-                </a:solidFill>
-                <a:latin typeface="Courier New" pitchFamily="34" charset="0"/>
-                <a:ea typeface="Courier New" pitchFamily="34" charset="-122"/>
-                <a:cs typeface="Courier New" pitchFamily="34" charset="-120"/>
-              </a:rPr>
-              <a:t>OMP_NUM_THREADS=1 OPENBLAS_NUM_THREADS=1 MKL_NUM_THREADS=1 \</a:t>
-            </a:r>
-            <a:endParaRPr lang="en-US" sz="1500" dirty="0"/>
-          </a:p>
-          <a:p>
-            <a:pPr algn="l" indent="0" marL="0">
-              <a:spcAft>
-                <a:spcPts val="600"/>
-              </a:spcAft>
-              <a:buNone/>
-            </a:pPr>
-            <a:r>
-              <a:rPr lang="en-US" sz="1500" dirty="0">
-                <a:solidFill>
-                  <a:schemeClr val="bg1"/>
-                </a:solidFill>
-                <a:latin typeface="Courier New" pitchFamily="34" charset="0"/>
-                <a:ea typeface="Courier New" pitchFamily="34" charset="-122"/>
-                <a:cs typeface="Courier New" pitchFamily="34" charset="-120"/>
-              </a:rPr>
-              <a:t>  NUMEXPR_NUM_THREADS=1 python -m viz.make_wing_figures</a:t>
-            </a:r>
-            <a:pPr algn="l" indent="0" marL="0">
-              <a:spcAft>
-                <a:spcPts val="600"/>
-              </a:spcAft>
-              <a:buNone/>
-            </a:pPr>
-            <a:r>
-              <a:rPr lang="en-US" sz="1500" dirty="0">
-                <a:solidFill>
-                  <a:schemeClr val="accent5"/>
-                </a:solidFill>
-                <a:latin typeface="Courier New" pitchFamily="34" charset="0"/>
-                <a:ea typeface="Courier New" pitchFamily="34" charset="-122"/>
-                <a:cs typeface="Courier New" pitchFamily="34" charset="-120"/>
-              </a:rPr>
-              <a:t>   # panel 9, ~14 min</a:t>
-            </a:r>
-            <a:endParaRPr lang="en-US" sz="1500" dirty="0"/>
-          </a:p>
-        </p:txBody>
-      </p:sp>
-      <p:sp>
-        <p:nvSpPr>
-          <p:cNvPr id="5" name="Text 3"/>
-          <p:cNvSpPr txBox="1"/>
-          <p:nvPr/>
-        </p:nvSpPr>
-        <p:spPr>
-          <a:xfrm>
-            <a:off x="731520" y="4892040"/>
-            <a:ext cx="3429000" cy="868680"/>
-          </a:xfrm>
-          <a:prstGeom prst="rect">
-            <a:avLst/>
-          </a:prstGeom>
-          <a:noFill/>
-          <a:ln/>
-        </p:spPr>
-        <p:txBody>
-          <a:bodyPr wrap="square" lIns="0" tIns="0" rIns="0" bIns="0" rtlCol="0" anchor="t"/>
-          <a:lstStyle/>
-          <a:p>
-            <a:pPr indent="0" marL="0">
-              <a:buNone/>
-            </a:pPr>
-            <a:r>
-              <a:rPr lang="en-US" sz="1300" b="1" dirty="0">
-                <a:solidFill>
-                  <a:schemeClr val="accent2"/>
-                </a:solidFill>
-                <a:latin typeface="Courier New" pitchFamily="34" charset="0"/>
-                <a:ea typeface="Courier New" pitchFamily="34" charset="-122"/>
-                <a:cs typeface="Courier New" pitchFamily="34" charset="-120"/>
-              </a:rPr>
-              <a:t>docs/step1–step6_*.md</a:t>
-            </a:r>
-            <a:endParaRPr lang="en-US" sz="1300" dirty="0"/>
-          </a:p>
-          <a:p>
-            <a:pPr indent="0" marL="0">
-              <a:buNone/>
-            </a:pPr>
-            <a:r>
-              <a:rPr lang="en-US" sz="1300" dirty="0">
-                <a:solidFill>
-                  <a:schemeClr val="bg2"/>
-                </a:solidFill>
-              </a:rPr>
-              <a:t>the physics and results behind each build step</a:t>
-            </a:r>
-            <a:endParaRPr lang="en-US" sz="1300" dirty="0"/>
-          </a:p>
-        </p:txBody>
-      </p:sp>
-      <p:sp>
-        <p:nvSpPr>
-          <p:cNvPr id="6" name="Text 4"/>
-          <p:cNvSpPr txBox="1"/>
-          <p:nvPr/>
-        </p:nvSpPr>
-        <p:spPr>
-          <a:xfrm>
-            <a:off x="4361688" y="4892040"/>
-            <a:ext cx="3429000" cy="868680"/>
-          </a:xfrm>
-          <a:prstGeom prst="rect">
-            <a:avLst/>
-          </a:prstGeom>
-          <a:noFill/>
-          <a:ln/>
-        </p:spPr>
-        <p:txBody>
-          <a:bodyPr wrap="square" lIns="0" tIns="0" rIns="0" bIns="0" rtlCol="0" anchor="t"/>
-          <a:lstStyle/>
-          <a:p>
-            <a:pPr indent="0" marL="0">
-              <a:buNone/>
-            </a:pPr>
-            <a:r>
-              <a:rPr lang="en-US" sz="1300" b="1" dirty="0">
-                <a:solidFill>
-                  <a:schemeClr val="accent2"/>
-                </a:solidFill>
-                <a:latin typeface="Courier New" pitchFamily="34" charset="0"/>
-                <a:ea typeface="Courier New" pitchFamily="34" charset="-122"/>
-                <a:cs typeface="Courier New" pitchFamily="34" charset="-120"/>
-              </a:rPr>
-              <a:t>CLAUDE.md</a:t>
-            </a:r>
-            <a:endParaRPr lang="en-US" sz="1300" dirty="0"/>
-          </a:p>
-          <a:p>
-            <a:pPr indent="0" marL="0">
-              <a:buNone/>
-            </a:pPr>
-            <a:r>
-              <a:rPr lang="en-US" sz="1300" dirty="0">
-                <a:solidFill>
-                  <a:schemeClr val="bg2"/>
-                </a:solidFill>
-              </a:rPr>
-              <a:t>reference numbers, design decisions, build order</a:t>
-            </a:r>
-            <a:endParaRPr lang="en-US" sz="1300" dirty="0"/>
-          </a:p>
-        </p:txBody>
-      </p:sp>
-      <p:sp>
-        <p:nvSpPr>
-          <p:cNvPr id="7" name="Text 5"/>
-          <p:cNvSpPr txBox="1"/>
-          <p:nvPr/>
-        </p:nvSpPr>
-        <p:spPr>
-          <a:xfrm>
-            <a:off x="7991856" y="4892040"/>
-            <a:ext cx="3429000" cy="868680"/>
-          </a:xfrm>
-          <a:prstGeom prst="rect">
-            <a:avLst/>
-          </a:prstGeom>
-          <a:noFill/>
-          <a:ln/>
-        </p:spPr>
-        <p:txBody>
-          <a:bodyPr wrap="square" lIns="0" tIns="0" rIns="0" bIns="0" rtlCol="0" anchor="t"/>
-          <a:lstStyle/>
-          <a:p>
-            <a:pPr indent="0" marL="0">
-              <a:buNone/>
-            </a:pPr>
-            <a:r>
-              <a:rPr lang="en-US" sz="1300" b="1" dirty="0">
-                <a:solidFill>
-                  <a:schemeClr val="accent2"/>
-                </a:solidFill>
-                <a:latin typeface="Courier New" pitchFamily="34" charset="0"/>
-                <a:ea typeface="Courier New" pitchFamily="34" charset="-122"/>
-                <a:cs typeface="Courier New" pitchFamily="34" charset="-120"/>
-              </a:rPr>
-              <a:t>README.md / SETUP.md</a:t>
-            </a:r>
-            <a:endParaRPr lang="en-US" sz="1300" dirty="0"/>
-          </a:p>
-          <a:p>
-            <a:pPr indent="0" marL="0">
-              <a:buNone/>
-            </a:pPr>
-            <a:r>
-              <a:rPr lang="en-US" sz="1300" dirty="0">
-                <a:solidFill>
-                  <a:schemeClr val="bg2"/>
-                </a:solidFill>
-              </a:rPr>
-              <a:t>setup on Windows / VS Code, interactive app.py explorer</a:t>
-            </a:r>
-            <a:endParaRPr lang="en-US" sz="1300" dirty="0"/>
+          <p:cNvPr id="5" name="section numeral"/>
+          <p:cNvSpPr txBox="1"/>
+          <p:nvPr/>
+        </p:nvSpPr>
+        <p:spPr>
+          <a:xfrm>
+            <a:off x="8503920" y="1280160"/>
+            <a:ext cx="3108960" cy="3840480"/>
+          </a:xfrm>
+          <a:prstGeom prst="rect">
+            <a:avLst/>
+          </a:prstGeom>
+          <a:noFill/>
+          <a:ln/>
+        </p:spPr>
+        <p:txBody>
+          <a:bodyPr wrap="square" lIns="0" tIns="0" rIns="0" bIns="0" rtlCol="0" anchor="ctr"/>
+          <a:lstStyle/>
+          <a:p>
+            <a:pPr algn="r" indent="0" marL="0">
+              <a:buNone/>
+            </a:pPr>
+            <a:r>
+              <a:rPr lang="en-US" sz="24000" b="1" dirty="0">
+                <a:solidFill>
+                  <a:schemeClr val="accent1"/>
+                </a:solidFill>
+                <a:latin typeface="Cambria" pitchFamily="34" charset="0"/>
+                <a:ea typeface="Cambria" pitchFamily="34" charset="-122"/>
+                <a:cs typeface="Cambria" pitchFamily="34" charset="-120"/>
+              </a:rPr>
+              <a:t>3</a:t>
+            </a:r>
+            <a:endParaRPr lang="en-US" sz="24000" dirty="0"/>
           </a:p>
         </p:txBody>
       </p:sp>
@@ -12258,6 +12582,1510 @@
             <a:fld id="{F7021451-1387-4CA6-816F-3879F97B5CBC}" type="slidenum">
               <a:rPr b="0" lang="en-US"/>
               <a:t>18</a:t>
+            </a:fld>
+            <a:endParaRPr lang="en-US"/>
+          </a:p>
+        </p:txBody>
+      </p:sp>
+    </p:spTree>
+  </p:cSld>
+  <p:clrMapOvr>
+    <a:masterClrMapping/>
+  </p:clrMapOvr>
+</p:sld>
+</file>
+
+<file path=ppt/slides/slide19.xml><?xml version="1.0" encoding="utf-8"?>
+<p:sld xmlns:a="http://schemas.openxmlformats.org/drawingml/2006/main" xmlns:r="http://schemas.openxmlformats.org/officeDocument/2006/relationships" xmlns:p="http://schemas.openxmlformats.org/presentationml/2006/main">
+  <p:cSld name="Slide 19">
+    <p:spTree>
+      <p:nvGrpSpPr>
+        <p:cNvPr id="1" name=""/>
+        <p:cNvGrpSpPr/>
+        <p:nvPr/>
+      </p:nvGrpSpPr>
+      <p:grpSpPr>
+        <a:xfrm>
+          <a:off x="0" y="0"/>
+          <a:ext cx="0" cy="0"/>
+          <a:chOff x="0" y="0"/>
+          <a:chExt cx="0" cy="0"/>
+        </a:xfrm>
+      </p:grpSpPr>
+      <p:sp>
+        <p:nvSpPr>
+          <p:cNvPr id="2" name="Text 0"/>
+          <p:cNvSpPr/>
+          <p:nvPr>
+            <p:ph idx="100" type="title" hasCustomPrompt="1"/>
+          </p:nvPr>
+        </p:nvSpPr>
+        <p:spPr>
+          <a:xfrm>
+            <a:off x="548640" y="274320"/>
+            <a:ext cx="9966960" cy="685800"/>
+          </a:xfrm>
+          <a:prstGeom prst="rect">
+            <a:avLst/>
+          </a:prstGeom>
+          <a:noFill/>
+          <a:ln/>
+        </p:spPr>
+        <p:txBody>
+          <a:bodyPr wrap="square" rtlCol="0" anchor="ctr"/>
+          <a:lstStyle/>
+          <a:p>
+            <a:pPr algn="l" indent="0" marL="0">
+              <a:buNone/>
+            </a:pPr>
+            <a:r>
+              <a:rPr lang="en-US" sz="3400" b="1" dirty="0">
+                <a:solidFill>
+                  <a:schemeClr val="tx1"/>
+                </a:solidFill>
+              </a:rPr>
+              <a:t>Every figure and the function that draws it</a:t>
+            </a:r>
+            <a:endParaRPr lang="en-US" sz="3400" dirty="0"/>
+          </a:p>
+        </p:txBody>
+      </p:sp>
+      <p:sp>
+        <p:nvSpPr>
+          <p:cNvPr id="3" name="Text 0"/>
+          <p:cNvSpPr/>
+          <p:nvPr>
+            <p:ph idx="101" type="body" hasCustomPrompt="1"/>
+          </p:nvPr>
+        </p:nvSpPr>
+        <p:spPr>
+          <a:xfrm>
+            <a:off x="548640" y="941832"/>
+            <a:ext cx="9966960" cy="411480"/>
+          </a:xfrm>
+          <a:prstGeom prst="rect">
+            <a:avLst/>
+          </a:prstGeom>
+          <a:noFill/>
+          <a:ln/>
+        </p:spPr>
+        <p:txBody>
+          <a:bodyPr wrap="square" rtlCol="0" anchor="ctr"/>
+          <a:lstStyle/>
+          <a:p>
+            <a:pPr indent="0" marL="0">
+              <a:buNone/>
+            </a:pPr>
+            <a:r>
+              <a:rPr lang="en-US" sz="1600" i="1" dirty="0">
+                <a:solidFill>
+                  <a:schemeClr val="tx2"/>
+                </a:solidFill>
+              </a:rPr>
+              <a:t>Three entry points: panels 1–8 are identical on every run; panels 9 and 10 are GA runs</a:t>
+            </a:r>
+            <a:endParaRPr lang="en-US" sz="1600" dirty="0"/>
+          </a:p>
+        </p:txBody>
+      </p:sp>
+      <p:sp>
+        <p:nvSpPr>
+          <p:cNvPr id="4" name="viz/make_figures.py"/>
+          <p:cNvSpPr txBox="1"/>
+          <p:nvPr/>
+        </p:nvSpPr>
+        <p:spPr>
+          <a:xfrm>
+            <a:off x="548640" y="1572768"/>
+            <a:ext cx="2148840" cy="3364992"/>
+          </a:xfrm>
+          <a:prstGeom prst="roundRect">
+            <a:avLst>
+              <a:gd name="adj" fmla="val 3404"/>
+            </a:avLst>
+          </a:prstGeom>
+          <a:solidFill>
+            <a:schemeClr val="tx1"/>
+          </a:solidFill>
+          <a:ln/>
+        </p:spPr>
+        <p:txBody>
+          <a:bodyPr wrap="square" lIns="63500" tIns="63500" rIns="63500" bIns="63500" rtlCol="0" anchor="ctr"/>
+          <a:lstStyle/>
+          <a:p>
+            <a:pPr algn="ctr" indent="0" marL="0">
+              <a:buNone/>
+            </a:pPr>
+            <a:r>
+              <a:rPr lang="en-US" sz="1250" b="1" dirty="0">
+                <a:solidFill>
+                  <a:schemeClr val="bg1"/>
+                </a:solidFill>
+                <a:latin typeface="Courier New" pitchFamily="34" charset="0"/>
+                <a:ea typeface="Courier New" pitchFamily="34" charset="-122"/>
+                <a:cs typeface="Courier New" pitchFamily="34" charset="-120"/>
+              </a:rPr>
+              <a:t>viz/make_figures.py</a:t>
+            </a:r>
+            <a:endParaRPr lang="en-US" sz="1250" dirty="0"/>
+          </a:p>
+          <a:p>
+            <a:pPr algn="ctr" indent="0" marL="0">
+              <a:buNone/>
+            </a:pPr>
+            <a:r>
+              <a:rPr lang="en-US" sz="1200" dirty="0">
+                <a:solidFill>
+                  <a:schemeClr val="accent5"/>
+                </a:solidFill>
+              </a:rPr>
+              <a:t>main()  ·  2–3 min  ·  deterministic</a:t>
+            </a:r>
+            <a:endParaRPr lang="en-US" sz="1250" dirty="0"/>
+          </a:p>
+        </p:txBody>
+      </p:sp>
+      <p:sp>
+        <p:nvSpPr>
+          <p:cNvPr id="5" name="make_wing_figures.py"/>
+          <p:cNvSpPr txBox="1"/>
+          <p:nvPr/>
+        </p:nvSpPr>
+        <p:spPr>
+          <a:xfrm>
+            <a:off x="548640" y="5029200"/>
+            <a:ext cx="2148840" cy="402336"/>
+          </a:xfrm>
+          <a:prstGeom prst="roundRect">
+            <a:avLst>
+              <a:gd name="adj" fmla="val 18182"/>
+            </a:avLst>
+          </a:prstGeom>
+          <a:solidFill>
+            <a:schemeClr val="tx1"/>
+          </a:solidFill>
+          <a:ln/>
+        </p:spPr>
+        <p:txBody>
+          <a:bodyPr wrap="square" lIns="63500" tIns="63500" rIns="63500" bIns="63500" rtlCol="0" anchor="ctr"/>
+          <a:lstStyle/>
+          <a:p>
+            <a:pPr algn="ctr" indent="0" marL="0">
+              <a:buNone/>
+            </a:pPr>
+            <a:r>
+              <a:rPr lang="en-US" sz="1150" b="1" dirty="0">
+                <a:solidFill>
+                  <a:schemeClr val="bg1"/>
+                </a:solidFill>
+                <a:latin typeface="Courier New" pitchFamily="34" charset="0"/>
+                <a:ea typeface="Courier New" pitchFamily="34" charset="-122"/>
+                <a:cs typeface="Courier New" pitchFamily="34" charset="-120"/>
+              </a:rPr>
+              <a:t>make_wing_figures.py</a:t>
+            </a:r>
+            <a:endParaRPr lang="en-US" sz="1150" dirty="0"/>
+          </a:p>
+        </p:txBody>
+      </p:sp>
+      <p:sp>
+        <p:nvSpPr>
+          <p:cNvPr id="6" name="make_wingbox_figures.py"/>
+          <p:cNvSpPr txBox="1"/>
+          <p:nvPr/>
+        </p:nvSpPr>
+        <p:spPr>
+          <a:xfrm>
+            <a:off x="548640" y="5522976"/>
+            <a:ext cx="2148840" cy="402336"/>
+          </a:xfrm>
+          <a:prstGeom prst="roundRect">
+            <a:avLst>
+              <a:gd name="adj" fmla="val 18182"/>
+            </a:avLst>
+          </a:prstGeom>
+          <a:solidFill>
+            <a:schemeClr val="tx1"/>
+          </a:solidFill>
+          <a:ln/>
+        </p:spPr>
+        <p:txBody>
+          <a:bodyPr wrap="square" lIns="63500" tIns="63500" rIns="63500" bIns="63500" rtlCol="0" anchor="ctr"/>
+          <a:lstStyle/>
+          <a:p>
+            <a:pPr algn="ctr" indent="0" marL="0">
+              <a:buNone/>
+            </a:pPr>
+            <a:r>
+              <a:rPr lang="en-US" sz="1050" b="1" dirty="0">
+                <a:solidFill>
+                  <a:schemeClr val="bg1"/>
+                </a:solidFill>
+                <a:latin typeface="Courier New" pitchFamily="34" charset="0"/>
+                <a:ea typeface="Courier New" pitchFamily="34" charset="-122"/>
+                <a:cs typeface="Courier New" pitchFamily="34" charset="-120"/>
+              </a:rPr>
+              <a:t>make_wingbox_figures.py</a:t>
+            </a:r>
+            <a:endParaRPr lang="en-US" sz="1050" dirty="0"/>
+          </a:p>
+        </p:txBody>
+      </p:sp>
+      <p:sp>
+        <p:nvSpPr>
+          <p:cNvPr id="7" name="make_panel1_scene"/>
+          <p:cNvSpPr txBox="1"/>
+          <p:nvPr/>
+        </p:nvSpPr>
+        <p:spPr>
+          <a:xfrm>
+            <a:off x="3246120" y="1572768"/>
+            <a:ext cx="3429000" cy="402336"/>
+          </a:xfrm>
+          <a:prstGeom prst="roundRect">
+            <a:avLst>
+              <a:gd name="adj" fmla="val 18182"/>
+            </a:avLst>
+          </a:prstGeom>
+          <a:solidFill>
+            <a:schemeClr val="accent1"/>
+          </a:solidFill>
+          <a:ln/>
+        </p:spPr>
+        <p:txBody>
+          <a:bodyPr wrap="square" lIns="63500" tIns="63500" rIns="63500" bIns="63500" rtlCol="0" anchor="ctr"/>
+          <a:lstStyle/>
+          <a:p>
+            <a:pPr algn="ctr" indent="0" marL="0">
+              <a:buNone/>
+            </a:pPr>
+            <a:r>
+              <a:rPr lang="en-US" sz="1200" b="1" dirty="0">
+                <a:solidFill>
+                  <a:schemeClr val="bg1"/>
+                </a:solidFill>
+                <a:latin typeface="Courier New" pitchFamily="34" charset="0"/>
+                <a:ea typeface="Courier New" pitchFamily="34" charset="-122"/>
+                <a:cs typeface="Courier New" pitchFamily="34" charset="-120"/>
+              </a:rPr>
+              <a:t>make_panel1_scene</a:t>
+            </a:r>
+            <a:endParaRPr lang="en-US" sz="1200" dirty="0"/>
+          </a:p>
+        </p:txBody>
+      </p:sp>
+      <p:sp>
+        <p:nvSpPr>
+          <p:cNvPr id="8" name="panel1_scene  ·  step 1 error ellipsoids"/>
+          <p:cNvSpPr txBox="1"/>
+          <p:nvPr/>
+        </p:nvSpPr>
+        <p:spPr>
+          <a:xfrm>
+            <a:off x="6995160" y="1572768"/>
+            <a:ext cx="4645152" cy="402336"/>
+          </a:xfrm>
+          <a:prstGeom prst="roundRect">
+            <a:avLst>
+              <a:gd name="adj" fmla="val 18182"/>
+            </a:avLst>
+          </a:prstGeom>
+          <a:solidFill>
+            <a:schemeClr val="accent2"/>
+          </a:solidFill>
+          <a:ln/>
+        </p:spPr>
+        <p:txBody>
+          <a:bodyPr wrap="square" lIns="63500" tIns="63500" rIns="63500" bIns="63500" rtlCol="0" anchor="ctr"/>
+          <a:lstStyle/>
+          <a:p>
+            <a:pPr algn="ctr" indent="0" marL="0">
+              <a:buNone/>
+            </a:pPr>
+            <a:r>
+              <a:rPr lang="en-US" sz="1250" b="1" dirty="0">
+                <a:solidFill>
+                  <a:schemeClr val="tx1"/>
+                </a:solidFill>
+              </a:rPr>
+              <a:t>panel1_scene  ·  step 1 error ellipsoids</a:t>
+            </a:r>
+            <a:endParaRPr lang="en-US" sz="1250" dirty="0"/>
+          </a:p>
+        </p:txBody>
+      </p:sp>
+      <p:sp>
+        <p:nvSpPr>
+          <p:cNvPr id="9" name="Shape 7"/>
+          <p:cNvSpPr/>
+          <p:nvPr/>
+        </p:nvSpPr>
+        <p:spPr>
+          <a:xfrm>
+            <a:off x="2697480" y="1773936"/>
+            <a:ext cx="548640" cy="0"/>
+          </a:xfrm>
+          <a:prstGeom prst="line">
+            <a:avLst/>
+          </a:prstGeom>
+          <a:noFill/>
+          <a:ln w="19050">
+            <a:solidFill>
+              <a:schemeClr val="accent4"/>
+            </a:solidFill>
+            <a:prstDash val="solid"/>
+            <a:tailEnd type="triangle"/>
+          </a:ln>
+        </p:spPr>
+      </p:sp>
+      <p:sp>
+        <p:nvSpPr>
+          <p:cNvPr id="10" name="Shape 8"/>
+          <p:cNvSpPr/>
+          <p:nvPr/>
+        </p:nvSpPr>
+        <p:spPr>
+          <a:xfrm>
+            <a:off x="6675120" y="1773936"/>
+            <a:ext cx="320040" cy="0"/>
+          </a:xfrm>
+          <a:prstGeom prst="line">
+            <a:avLst/>
+          </a:prstGeom>
+          <a:noFill/>
+          <a:ln w="19050">
+            <a:solidFill>
+              <a:schemeClr val="accent4"/>
+            </a:solidFill>
+            <a:prstDash val="solid"/>
+            <a:tailEnd type="triangle"/>
+          </a:ln>
+        </p:spPr>
+      </p:sp>
+      <p:sp>
+        <p:nvSpPr>
+          <p:cNvPr id="11" name="make_panel2_network"/>
+          <p:cNvSpPr txBox="1"/>
+          <p:nvPr/>
+        </p:nvSpPr>
+        <p:spPr>
+          <a:xfrm>
+            <a:off x="3246120" y="2066544"/>
+            <a:ext cx="3429000" cy="402336"/>
+          </a:xfrm>
+          <a:prstGeom prst="roundRect">
+            <a:avLst>
+              <a:gd name="adj" fmla="val 18182"/>
+            </a:avLst>
+          </a:prstGeom>
+          <a:solidFill>
+            <a:schemeClr val="accent1"/>
+          </a:solidFill>
+          <a:ln/>
+        </p:spPr>
+        <p:txBody>
+          <a:bodyPr wrap="square" lIns="63500" tIns="63500" rIns="63500" bIns="63500" rtlCol="0" anchor="ctr"/>
+          <a:lstStyle/>
+          <a:p>
+            <a:pPr algn="ctr" indent="0" marL="0">
+              <a:buNone/>
+            </a:pPr>
+            <a:r>
+              <a:rPr lang="en-US" sz="1200" b="1" dirty="0">
+                <a:solidFill>
+                  <a:schemeClr val="bg1"/>
+                </a:solidFill>
+                <a:latin typeface="Courier New" pitchFamily="34" charset="0"/>
+                <a:ea typeface="Courier New" pitchFamily="34" charset="-122"/>
+                <a:cs typeface="Courier New" pitchFamily="34" charset="-120"/>
+              </a:rPr>
+              <a:t>make_panel2_network</a:t>
+            </a:r>
+            <a:endParaRPr lang="en-US" sz="1200" dirty="0"/>
+          </a:p>
+        </p:txBody>
+      </p:sp>
+      <p:sp>
+        <p:nvSpPr>
+          <p:cNvPr id="12" name="panel2_network  ·  step 3 network solve"/>
+          <p:cNvSpPr txBox="1"/>
+          <p:nvPr/>
+        </p:nvSpPr>
+        <p:spPr>
+          <a:xfrm>
+            <a:off x="6995160" y="2066544"/>
+            <a:ext cx="4645152" cy="402336"/>
+          </a:xfrm>
+          <a:prstGeom prst="roundRect">
+            <a:avLst>
+              <a:gd name="adj" fmla="val 18182"/>
+            </a:avLst>
+          </a:prstGeom>
+          <a:solidFill>
+            <a:schemeClr val="accent2"/>
+          </a:solidFill>
+          <a:ln/>
+        </p:spPr>
+        <p:txBody>
+          <a:bodyPr wrap="square" lIns="63500" tIns="63500" rIns="63500" bIns="63500" rtlCol="0" anchor="ctr"/>
+          <a:lstStyle/>
+          <a:p>
+            <a:pPr algn="ctr" indent="0" marL="0">
+              <a:buNone/>
+            </a:pPr>
+            <a:r>
+              <a:rPr lang="en-US" sz="1250" b="1" dirty="0">
+                <a:solidFill>
+                  <a:schemeClr val="tx1"/>
+                </a:solidFill>
+              </a:rPr>
+              <a:t>panel2_network  ·  step 3 network solve</a:t>
+            </a:r>
+            <a:endParaRPr lang="en-US" sz="1250" dirty="0"/>
+          </a:p>
+        </p:txBody>
+      </p:sp>
+      <p:sp>
+        <p:nvSpPr>
+          <p:cNvPr id="13" name="Shape 11"/>
+          <p:cNvSpPr/>
+          <p:nvPr/>
+        </p:nvSpPr>
+        <p:spPr>
+          <a:xfrm>
+            <a:off x="2697480" y="2267712"/>
+            <a:ext cx="548640" cy="0"/>
+          </a:xfrm>
+          <a:prstGeom prst="line">
+            <a:avLst/>
+          </a:prstGeom>
+          <a:noFill/>
+          <a:ln w="19050">
+            <a:solidFill>
+              <a:schemeClr val="accent4"/>
+            </a:solidFill>
+            <a:prstDash val="solid"/>
+            <a:tailEnd type="triangle"/>
+          </a:ln>
+        </p:spPr>
+      </p:sp>
+      <p:sp>
+        <p:nvSpPr>
+          <p:cNvPr id="14" name="Shape 12"/>
+          <p:cNvSpPr/>
+          <p:nvPr/>
+        </p:nvSpPr>
+        <p:spPr>
+          <a:xfrm>
+            <a:off x="6675120" y="2267712"/>
+            <a:ext cx="320040" cy="0"/>
+          </a:xfrm>
+          <a:prstGeom prst="line">
+            <a:avLst/>
+          </a:prstGeom>
+          <a:noFill/>
+          <a:ln w="19050">
+            <a:solidFill>
+              <a:schemeClr val="accent4"/>
+            </a:solidFill>
+            <a:prstDash val="solid"/>
+            <a:tailEnd type="triangle"/>
+          </a:ln>
+        </p:spPr>
+      </p:sp>
+      <p:sp>
+        <p:nvSpPr>
+          <p:cNvPr id="15" name="make_panel3_uncertainty"/>
+          <p:cNvSpPr txBox="1"/>
+          <p:nvPr/>
+        </p:nvSpPr>
+        <p:spPr>
+          <a:xfrm>
+            <a:off x="3246120" y="2560320"/>
+            <a:ext cx="3429000" cy="402336"/>
+          </a:xfrm>
+          <a:prstGeom prst="roundRect">
+            <a:avLst>
+              <a:gd name="adj" fmla="val 18182"/>
+            </a:avLst>
+          </a:prstGeom>
+          <a:solidFill>
+            <a:schemeClr val="accent1"/>
+          </a:solidFill>
+          <a:ln/>
+        </p:spPr>
+        <p:txBody>
+          <a:bodyPr wrap="square" lIns="63500" tIns="63500" rIns="63500" bIns="63500" rtlCol="0" anchor="ctr"/>
+          <a:lstStyle/>
+          <a:p>
+            <a:pPr algn="ctr" indent="0" marL="0">
+              <a:buNone/>
+            </a:pPr>
+            <a:r>
+              <a:rPr lang="en-US" sz="1200" b="1" dirty="0">
+                <a:solidFill>
+                  <a:schemeClr val="bg1"/>
+                </a:solidFill>
+                <a:latin typeface="Courier New" pitchFamily="34" charset="0"/>
+                <a:ea typeface="Courier New" pitchFamily="34" charset="-122"/>
+                <a:cs typeface="Courier New" pitchFamily="34" charset="-120"/>
+              </a:rPr>
+              <a:t>make_panel3_uncertainty</a:t>
+            </a:r>
+            <a:endParaRPr lang="en-US" sz="1200" dirty="0"/>
+          </a:p>
+        </p:txBody>
+      </p:sp>
+      <p:sp>
+        <p:nvSpPr>
+          <p:cNvPr id="16" name="panel3_uncertainty  ·  step 3 uncertainty vs stations"/>
+          <p:cNvSpPr txBox="1"/>
+          <p:nvPr/>
+        </p:nvSpPr>
+        <p:spPr>
+          <a:xfrm>
+            <a:off x="6995160" y="2560320"/>
+            <a:ext cx="4645152" cy="402336"/>
+          </a:xfrm>
+          <a:prstGeom prst="roundRect">
+            <a:avLst>
+              <a:gd name="adj" fmla="val 18182"/>
+            </a:avLst>
+          </a:prstGeom>
+          <a:solidFill>
+            <a:schemeClr val="accent2"/>
+          </a:solidFill>
+          <a:ln/>
+        </p:spPr>
+        <p:txBody>
+          <a:bodyPr wrap="square" lIns="63500" tIns="63500" rIns="63500" bIns="63500" rtlCol="0" anchor="ctr"/>
+          <a:lstStyle/>
+          <a:p>
+            <a:pPr algn="ctr" indent="0" marL="0">
+              <a:buNone/>
+            </a:pPr>
+            <a:r>
+              <a:rPr lang="en-US" sz="1250" b="1" dirty="0">
+                <a:solidFill>
+                  <a:schemeClr val="tx1"/>
+                </a:solidFill>
+              </a:rPr>
+              <a:t>panel3_uncertainty  ·  step 3 uncertainty vs stations</a:t>
+            </a:r>
+            <a:endParaRPr lang="en-US" sz="1250" dirty="0"/>
+          </a:p>
+        </p:txBody>
+      </p:sp>
+      <p:sp>
+        <p:nvSpPr>
+          <p:cNvPr id="17" name="Shape 15"/>
+          <p:cNvSpPr/>
+          <p:nvPr/>
+        </p:nvSpPr>
+        <p:spPr>
+          <a:xfrm>
+            <a:off x="2697480" y="2761488"/>
+            <a:ext cx="548640" cy="0"/>
+          </a:xfrm>
+          <a:prstGeom prst="line">
+            <a:avLst/>
+          </a:prstGeom>
+          <a:noFill/>
+          <a:ln w="19050">
+            <a:solidFill>
+              <a:schemeClr val="accent4"/>
+            </a:solidFill>
+            <a:prstDash val="solid"/>
+            <a:tailEnd type="triangle"/>
+          </a:ln>
+        </p:spPr>
+      </p:sp>
+      <p:sp>
+        <p:nvSpPr>
+          <p:cNvPr id="18" name="Shape 16"/>
+          <p:cNvSpPr/>
+          <p:nvPr/>
+        </p:nvSpPr>
+        <p:spPr>
+          <a:xfrm>
+            <a:off x="6675120" y="2761488"/>
+            <a:ext cx="320040" cy="0"/>
+          </a:xfrm>
+          <a:prstGeom prst="line">
+            <a:avLst/>
+          </a:prstGeom>
+          <a:noFill/>
+          <a:ln w="19050">
+            <a:solidFill>
+              <a:schemeClr val="accent4"/>
+            </a:solidFill>
+            <a:prstDash val="solid"/>
+            <a:tailEnd type="triangle"/>
+          </a:ln>
+        </p:spPr>
+      </p:sp>
+      <p:sp>
+        <p:nvSpPr>
+          <p:cNvPr id="19" name="make_panel4_characteristics"/>
+          <p:cNvSpPr txBox="1"/>
+          <p:nvPr/>
+        </p:nvSpPr>
+        <p:spPr>
+          <a:xfrm>
+            <a:off x="3246120" y="3054096"/>
+            <a:ext cx="3429000" cy="402336"/>
+          </a:xfrm>
+          <a:prstGeom prst="roundRect">
+            <a:avLst>
+              <a:gd name="adj" fmla="val 18182"/>
+            </a:avLst>
+          </a:prstGeom>
+          <a:solidFill>
+            <a:schemeClr val="accent1"/>
+          </a:solidFill>
+          <a:ln/>
+        </p:spPr>
+        <p:txBody>
+          <a:bodyPr wrap="square" lIns="63500" tIns="63500" rIns="63500" bIns="63500" rtlCol="0" anchor="ctr"/>
+          <a:lstStyle/>
+          <a:p>
+            <a:pPr algn="ctr" indent="0" marL="0">
+              <a:buNone/>
+            </a:pPr>
+            <a:r>
+              <a:rPr lang="en-US" sz="1200" b="1" dirty="0">
+                <a:solidFill>
+                  <a:schemeClr val="bg1"/>
+                </a:solidFill>
+                <a:latin typeface="Courier New" pitchFamily="34" charset="0"/>
+                <a:ea typeface="Courier New" pitchFamily="34" charset="-122"/>
+                <a:cs typeface="Courier New" pitchFamily="34" charset="-120"/>
+              </a:rPr>
+              <a:t>make_panel4_characteristics</a:t>
+            </a:r>
+            <a:endParaRPr lang="en-US" sz="1200" dirty="0"/>
+          </a:p>
+        </p:txBody>
+      </p:sp>
+      <p:sp>
+        <p:nvSpPr>
+          <p:cNvPr id="20" name="panel4_characteristics  ·  step 4 tolerance types"/>
+          <p:cNvSpPr txBox="1"/>
+          <p:nvPr/>
+        </p:nvSpPr>
+        <p:spPr>
+          <a:xfrm>
+            <a:off x="6995160" y="3054096"/>
+            <a:ext cx="4645152" cy="402336"/>
+          </a:xfrm>
+          <a:prstGeom prst="roundRect">
+            <a:avLst>
+              <a:gd name="adj" fmla="val 18182"/>
+            </a:avLst>
+          </a:prstGeom>
+          <a:solidFill>
+            <a:schemeClr val="accent2"/>
+          </a:solidFill>
+          <a:ln/>
+        </p:spPr>
+        <p:txBody>
+          <a:bodyPr wrap="square" lIns="63500" tIns="63500" rIns="63500" bIns="63500" rtlCol="0" anchor="ctr"/>
+          <a:lstStyle/>
+          <a:p>
+            <a:pPr algn="ctr" indent="0" marL="0">
+              <a:buNone/>
+            </a:pPr>
+            <a:r>
+              <a:rPr lang="en-US" sz="1250" b="1" dirty="0">
+                <a:solidFill>
+                  <a:schemeClr val="tx1"/>
+                </a:solidFill>
+              </a:rPr>
+              <a:t>panel4_characteristics  ·  step 4 tolerance types</a:t>
+            </a:r>
+            <a:endParaRPr lang="en-US" sz="1250" dirty="0"/>
+          </a:p>
+        </p:txBody>
+      </p:sp>
+      <p:sp>
+        <p:nvSpPr>
+          <p:cNvPr id="21" name="Shape 19"/>
+          <p:cNvSpPr/>
+          <p:nvPr/>
+        </p:nvSpPr>
+        <p:spPr>
+          <a:xfrm>
+            <a:off x="2697480" y="3255264"/>
+            <a:ext cx="548640" cy="0"/>
+          </a:xfrm>
+          <a:prstGeom prst="line">
+            <a:avLst/>
+          </a:prstGeom>
+          <a:noFill/>
+          <a:ln w="19050">
+            <a:solidFill>
+              <a:schemeClr val="accent4"/>
+            </a:solidFill>
+            <a:prstDash val="solid"/>
+            <a:tailEnd type="triangle"/>
+          </a:ln>
+        </p:spPr>
+      </p:sp>
+      <p:sp>
+        <p:nvSpPr>
+          <p:cNvPr id="22" name="Shape 20"/>
+          <p:cNvSpPr/>
+          <p:nvPr/>
+        </p:nvSpPr>
+        <p:spPr>
+          <a:xfrm>
+            <a:off x="6675120" y="3255264"/>
+            <a:ext cx="320040" cy="0"/>
+          </a:xfrm>
+          <a:prstGeom prst="line">
+            <a:avLst/>
+          </a:prstGeom>
+          <a:noFill/>
+          <a:ln w="19050">
+            <a:solidFill>
+              <a:schemeClr val="accent4"/>
+            </a:solidFill>
+            <a:prstDash val="solid"/>
+            <a:tailEnd type="triangle"/>
+          </a:ln>
+        </p:spPr>
+      </p:sp>
+      <p:sp>
+        <p:nvSpPr>
+          <p:cNvPr id="23" name="make_panel5_risk"/>
+          <p:cNvSpPr txBox="1"/>
+          <p:nvPr/>
+        </p:nvSpPr>
+        <p:spPr>
+          <a:xfrm>
+            <a:off x="3246120" y="3547872"/>
+            <a:ext cx="3429000" cy="402336"/>
+          </a:xfrm>
+          <a:prstGeom prst="roundRect">
+            <a:avLst>
+              <a:gd name="adj" fmla="val 18182"/>
+            </a:avLst>
+          </a:prstGeom>
+          <a:solidFill>
+            <a:schemeClr val="accent1"/>
+          </a:solidFill>
+          <a:ln/>
+        </p:spPr>
+        <p:txBody>
+          <a:bodyPr wrap="square" lIns="63500" tIns="63500" rIns="63500" bIns="63500" rtlCol="0" anchor="ctr"/>
+          <a:lstStyle/>
+          <a:p>
+            <a:pPr algn="ctr" indent="0" marL="0">
+              <a:buNone/>
+            </a:pPr>
+            <a:r>
+              <a:rPr lang="en-US" sz="1200" b="1" dirty="0">
+                <a:solidFill>
+                  <a:schemeClr val="bg1"/>
+                </a:solidFill>
+                <a:latin typeface="Courier New" pitchFamily="34" charset="0"/>
+                <a:ea typeface="Courier New" pitchFamily="34" charset="-122"/>
+                <a:cs typeface="Courier New" pitchFamily="34" charset="-120"/>
+              </a:rPr>
+              <a:t>make_panel5_risk</a:t>
+            </a:r>
+            <a:endParaRPr lang="en-US" sz="1200" dirty="0"/>
+          </a:p>
+        </p:txBody>
+      </p:sp>
+      <p:sp>
+        <p:nvSpPr>
+          <p:cNvPr id="24" name="panel5_risk  ·  step 5 risk vs uncertainty"/>
+          <p:cNvSpPr txBox="1"/>
+          <p:nvPr/>
+        </p:nvSpPr>
+        <p:spPr>
+          <a:xfrm>
+            <a:off x="6995160" y="3547872"/>
+            <a:ext cx="4645152" cy="402336"/>
+          </a:xfrm>
+          <a:prstGeom prst="roundRect">
+            <a:avLst>
+              <a:gd name="adj" fmla="val 18182"/>
+            </a:avLst>
+          </a:prstGeom>
+          <a:solidFill>
+            <a:schemeClr val="accent2"/>
+          </a:solidFill>
+          <a:ln/>
+        </p:spPr>
+        <p:txBody>
+          <a:bodyPr wrap="square" lIns="63500" tIns="63500" rIns="63500" bIns="63500" rtlCol="0" anchor="ctr"/>
+          <a:lstStyle/>
+          <a:p>
+            <a:pPr algn="ctr" indent="0" marL="0">
+              <a:buNone/>
+            </a:pPr>
+            <a:r>
+              <a:rPr lang="en-US" sz="1250" b="1" dirty="0">
+                <a:solidFill>
+                  <a:schemeClr val="tx1"/>
+                </a:solidFill>
+              </a:rPr>
+              <a:t>panel5_risk  ·  step 5 risk vs uncertainty</a:t>
+            </a:r>
+            <a:endParaRPr lang="en-US" sz="1250" dirty="0"/>
+          </a:p>
+        </p:txBody>
+      </p:sp>
+      <p:sp>
+        <p:nvSpPr>
+          <p:cNvPr id="25" name="Shape 23"/>
+          <p:cNvSpPr/>
+          <p:nvPr/>
+        </p:nvSpPr>
+        <p:spPr>
+          <a:xfrm>
+            <a:off x="2697480" y="3749040"/>
+            <a:ext cx="548640" cy="0"/>
+          </a:xfrm>
+          <a:prstGeom prst="line">
+            <a:avLst/>
+          </a:prstGeom>
+          <a:noFill/>
+          <a:ln w="19050">
+            <a:solidFill>
+              <a:schemeClr val="accent4"/>
+            </a:solidFill>
+            <a:prstDash val="solid"/>
+            <a:tailEnd type="triangle"/>
+          </a:ln>
+        </p:spPr>
+      </p:sp>
+      <p:sp>
+        <p:nvSpPr>
+          <p:cNvPr id="26" name="Shape 24"/>
+          <p:cNvSpPr/>
+          <p:nvPr/>
+        </p:nvSpPr>
+        <p:spPr>
+          <a:xfrm>
+            <a:off x="6675120" y="3749040"/>
+            <a:ext cx="320040" cy="0"/>
+          </a:xfrm>
+          <a:prstGeom prst="line">
+            <a:avLst/>
+          </a:prstGeom>
+          <a:noFill/>
+          <a:ln w="19050">
+            <a:solidFill>
+              <a:schemeClr val="accent4"/>
+            </a:solidFill>
+            <a:prstDash val="solid"/>
+            <a:tailEnd type="triangle"/>
+          </a:ln>
+        </p:spPr>
+      </p:sp>
+      <p:sp>
+        <p:nvSpPr>
+          <p:cNvPr id="27" name="make_panel6_and_7"/>
+          <p:cNvSpPr txBox="1"/>
+          <p:nvPr/>
+        </p:nvSpPr>
+        <p:spPr>
+          <a:xfrm>
+            <a:off x="3246120" y="4041648"/>
+            <a:ext cx="3429000" cy="402336"/>
+          </a:xfrm>
+          <a:prstGeom prst="roundRect">
+            <a:avLst>
+              <a:gd name="adj" fmla="val 18182"/>
+            </a:avLst>
+          </a:prstGeom>
+          <a:solidFill>
+            <a:schemeClr val="accent1"/>
+          </a:solidFill>
+          <a:ln/>
+        </p:spPr>
+        <p:txBody>
+          <a:bodyPr wrap="square" lIns="63500" tIns="63500" rIns="63500" bIns="63500" rtlCol="0" anchor="ctr"/>
+          <a:lstStyle/>
+          <a:p>
+            <a:pPr algn="ctr" indent="0" marL="0">
+              <a:buNone/>
+            </a:pPr>
+            <a:r>
+              <a:rPr lang="en-US" sz="1200" b="1" dirty="0">
+                <a:solidFill>
+                  <a:schemeClr val="bg1"/>
+                </a:solidFill>
+                <a:latin typeface="Courier New" pitchFamily="34" charset="0"/>
+                <a:ea typeface="Courier New" pitchFamily="34" charset="-122"/>
+                <a:cs typeface="Courier New" pitchFamily="34" charset="-120"/>
+              </a:rPr>
+              <a:t>make_panel6_and_7</a:t>
+            </a:r>
+            <a:endParaRPr lang="en-US" sz="1200" dirty="0"/>
+          </a:p>
+        </p:txBody>
+      </p:sp>
+      <p:sp>
+        <p:nvSpPr>
+          <p:cNvPr id="28" name="panel6a, 6b, 7 (+ _systematic10um)  ·  step 6 headline"/>
+          <p:cNvSpPr txBox="1"/>
+          <p:nvPr/>
+        </p:nvSpPr>
+        <p:spPr>
+          <a:xfrm>
+            <a:off x="6995160" y="4041648"/>
+            <a:ext cx="4645152" cy="402336"/>
+          </a:xfrm>
+          <a:prstGeom prst="roundRect">
+            <a:avLst>
+              <a:gd name="adj" fmla="val 18182"/>
+            </a:avLst>
+          </a:prstGeom>
+          <a:solidFill>
+            <a:schemeClr val="accent2"/>
+          </a:solidFill>
+          <a:ln/>
+        </p:spPr>
+        <p:txBody>
+          <a:bodyPr wrap="square" lIns="63500" tIns="63500" rIns="63500" bIns="63500" rtlCol="0" anchor="ctr"/>
+          <a:lstStyle/>
+          <a:p>
+            <a:pPr algn="ctr" indent="0" marL="0">
+              <a:buNone/>
+            </a:pPr>
+            <a:r>
+              <a:rPr lang="en-US" sz="1250" b="1" dirty="0">
+                <a:solidFill>
+                  <a:schemeClr val="tx1"/>
+                </a:solidFill>
+              </a:rPr>
+              <a:t>panel6a, 6b, 7 (+ _systematic10um)  ·  step 6 headline</a:t>
+            </a:r>
+            <a:endParaRPr lang="en-US" sz="1250" dirty="0"/>
+          </a:p>
+        </p:txBody>
+      </p:sp>
+      <p:sp>
+        <p:nvSpPr>
+          <p:cNvPr id="29" name="Shape 27"/>
+          <p:cNvSpPr/>
+          <p:nvPr/>
+        </p:nvSpPr>
+        <p:spPr>
+          <a:xfrm>
+            <a:off x="2697480" y="4242816"/>
+            <a:ext cx="548640" cy="0"/>
+          </a:xfrm>
+          <a:prstGeom prst="line">
+            <a:avLst/>
+          </a:prstGeom>
+          <a:noFill/>
+          <a:ln w="19050">
+            <a:solidFill>
+              <a:schemeClr val="accent4"/>
+            </a:solidFill>
+            <a:prstDash val="solid"/>
+            <a:tailEnd type="triangle"/>
+          </a:ln>
+        </p:spPr>
+      </p:sp>
+      <p:sp>
+        <p:nvSpPr>
+          <p:cNvPr id="30" name="Shape 28"/>
+          <p:cNvSpPr/>
+          <p:nvPr/>
+        </p:nvSpPr>
+        <p:spPr>
+          <a:xfrm>
+            <a:off x="6675120" y="4242816"/>
+            <a:ext cx="320040" cy="0"/>
+          </a:xfrm>
+          <a:prstGeom prst="line">
+            <a:avLst/>
+          </a:prstGeom>
+          <a:noFill/>
+          <a:ln w="19050">
+            <a:solidFill>
+              <a:schemeClr val="accent4"/>
+            </a:solidFill>
+            <a:prstDash val="solid"/>
+            <a:tailEnd type="triangle"/>
+          </a:ln>
+        </p:spPr>
+      </p:sp>
+      <p:sp>
+        <p:nvSpPr>
+          <p:cNvPr id="31" name="make_panel8_mixed_tolerance"/>
+          <p:cNvSpPr txBox="1"/>
+          <p:nvPr/>
+        </p:nvSpPr>
+        <p:spPr>
+          <a:xfrm>
+            <a:off x="3246120" y="4535424"/>
+            <a:ext cx="3429000" cy="402336"/>
+          </a:xfrm>
+          <a:prstGeom prst="roundRect">
+            <a:avLst>
+              <a:gd name="adj" fmla="val 18182"/>
+            </a:avLst>
+          </a:prstGeom>
+          <a:solidFill>
+            <a:schemeClr val="accent1"/>
+          </a:solidFill>
+          <a:ln/>
+        </p:spPr>
+        <p:txBody>
+          <a:bodyPr wrap="square" lIns="63500" tIns="63500" rIns="63500" bIns="63500" rtlCol="0" anchor="ctr"/>
+          <a:lstStyle/>
+          <a:p>
+            <a:pPr algn="ctr" indent="0" marL="0">
+              <a:buNone/>
+            </a:pPr>
+            <a:r>
+              <a:rPr lang="en-US" sz="1200" b="1" dirty="0">
+                <a:solidFill>
+                  <a:schemeClr val="bg1"/>
+                </a:solidFill>
+                <a:latin typeface="Courier New" pitchFamily="34" charset="0"/>
+                <a:ea typeface="Courier New" pitchFamily="34" charset="-122"/>
+                <a:cs typeface="Courier New" pitchFamily="34" charset="-120"/>
+              </a:rPr>
+              <a:t>make_panel8_mixed_tolerance</a:t>
+            </a:r>
+            <a:endParaRPr lang="en-US" sz="1200" dirty="0"/>
+          </a:p>
+        </p:txBody>
+      </p:sp>
+      <p:sp>
+        <p:nvSpPr>
+          <p:cNvPr id="32" name="panel6a/6b_mixedtol, panel8c  ·  tolerance-mix check"/>
+          <p:cNvSpPr txBox="1"/>
+          <p:nvPr/>
+        </p:nvSpPr>
+        <p:spPr>
+          <a:xfrm>
+            <a:off x="6995160" y="4535424"/>
+            <a:ext cx="4645152" cy="402336"/>
+          </a:xfrm>
+          <a:prstGeom prst="roundRect">
+            <a:avLst>
+              <a:gd name="adj" fmla="val 18182"/>
+            </a:avLst>
+          </a:prstGeom>
+          <a:solidFill>
+            <a:schemeClr val="accent2"/>
+          </a:solidFill>
+          <a:ln/>
+        </p:spPr>
+        <p:txBody>
+          <a:bodyPr wrap="square" lIns="63500" tIns="63500" rIns="63500" bIns="63500" rtlCol="0" anchor="ctr"/>
+          <a:lstStyle/>
+          <a:p>
+            <a:pPr algn="ctr" indent="0" marL="0">
+              <a:buNone/>
+            </a:pPr>
+            <a:r>
+              <a:rPr lang="en-US" sz="1250" b="1" dirty="0">
+                <a:solidFill>
+                  <a:schemeClr val="tx1"/>
+                </a:solidFill>
+              </a:rPr>
+              <a:t>panel6a/6b_mixedtol, panel8c  ·  tolerance-mix check</a:t>
+            </a:r>
+            <a:endParaRPr lang="en-US" sz="1250" dirty="0"/>
+          </a:p>
+        </p:txBody>
+      </p:sp>
+      <p:sp>
+        <p:nvSpPr>
+          <p:cNvPr id="33" name="Shape 31"/>
+          <p:cNvSpPr/>
+          <p:nvPr/>
+        </p:nvSpPr>
+        <p:spPr>
+          <a:xfrm>
+            <a:off x="2697480" y="4736592"/>
+            <a:ext cx="548640" cy="0"/>
+          </a:xfrm>
+          <a:prstGeom prst="line">
+            <a:avLst/>
+          </a:prstGeom>
+          <a:noFill/>
+          <a:ln w="19050">
+            <a:solidFill>
+              <a:schemeClr val="accent4"/>
+            </a:solidFill>
+            <a:prstDash val="solid"/>
+            <a:tailEnd type="triangle"/>
+          </a:ln>
+        </p:spPr>
+      </p:sp>
+      <p:sp>
+        <p:nvSpPr>
+          <p:cNvPr id="34" name="Shape 32"/>
+          <p:cNvSpPr/>
+          <p:nvPr/>
+        </p:nvSpPr>
+        <p:spPr>
+          <a:xfrm>
+            <a:off x="6675120" y="4736592"/>
+            <a:ext cx="320040" cy="0"/>
+          </a:xfrm>
+          <a:prstGeom prst="line">
+            <a:avLst/>
+          </a:prstGeom>
+          <a:noFill/>
+          <a:ln w="19050">
+            <a:solidFill>
+              <a:schemeClr val="accent4"/>
+            </a:solidFill>
+            <a:prstDash val="solid"/>
+            <a:tailEnd type="triangle"/>
+          </a:ln>
+        </p:spPr>
+      </p:sp>
+      <p:sp>
+        <p:nvSpPr>
+          <p:cNvPr id="35" name="make_panel9_wing"/>
+          <p:cNvSpPr txBox="1"/>
+          <p:nvPr/>
+        </p:nvSpPr>
+        <p:spPr>
+          <a:xfrm>
+            <a:off x="3246120" y="5029200"/>
+            <a:ext cx="3429000" cy="402336"/>
+          </a:xfrm>
+          <a:prstGeom prst="roundRect">
+            <a:avLst>
+              <a:gd name="adj" fmla="val 18182"/>
+            </a:avLst>
+          </a:prstGeom>
+          <a:solidFill>
+            <a:schemeClr val="accent1"/>
+          </a:solidFill>
+          <a:ln/>
+        </p:spPr>
+        <p:txBody>
+          <a:bodyPr wrap="square" lIns="63500" tIns="63500" rIns="63500" bIns="63500" rtlCol="0" anchor="ctr"/>
+          <a:lstStyle/>
+          <a:p>
+            <a:pPr algn="ctr" indent="0" marL="0">
+              <a:buNone/>
+            </a:pPr>
+            <a:r>
+              <a:rPr lang="en-US" sz="1200" b="1" dirty="0">
+                <a:solidFill>
+                  <a:schemeClr val="bg1"/>
+                </a:solidFill>
+                <a:latin typeface="Courier New" pitchFamily="34" charset="0"/>
+                <a:ea typeface="Courier New" pitchFamily="34" charset="-122"/>
+                <a:cs typeface="Courier New" pitchFamily="34" charset="-120"/>
+              </a:rPr>
+              <a:t>make_panel9_wing</a:t>
+            </a:r>
+            <a:endParaRPr lang="en-US" sz="1200" dirty="0"/>
+          </a:p>
+        </p:txBody>
+      </p:sp>
+      <p:sp>
+        <p:nvSpPr>
+          <p:cNvPr id="36" name="panel9a, 9b (+ _tower)  ·  wing scenario"/>
+          <p:cNvSpPr txBox="1"/>
+          <p:nvPr/>
+        </p:nvSpPr>
+        <p:spPr>
+          <a:xfrm>
+            <a:off x="6995160" y="5029200"/>
+            <a:ext cx="4645152" cy="402336"/>
+          </a:xfrm>
+          <a:prstGeom prst="roundRect">
+            <a:avLst>
+              <a:gd name="adj" fmla="val 18182"/>
+            </a:avLst>
+          </a:prstGeom>
+          <a:solidFill>
+            <a:schemeClr val="accent2"/>
+          </a:solidFill>
+          <a:ln/>
+        </p:spPr>
+        <p:txBody>
+          <a:bodyPr wrap="square" lIns="63500" tIns="63500" rIns="63500" bIns="63500" rtlCol="0" anchor="ctr"/>
+          <a:lstStyle/>
+          <a:p>
+            <a:pPr algn="ctr" indent="0" marL="0">
+              <a:buNone/>
+            </a:pPr>
+            <a:r>
+              <a:rPr lang="en-US" sz="1250" b="1" dirty="0">
+                <a:solidFill>
+                  <a:schemeClr val="tx1"/>
+                </a:solidFill>
+              </a:rPr>
+              <a:t>panel9a, 9b (+ _tower)  ·  wing scenario</a:t>
+            </a:r>
+            <a:endParaRPr lang="en-US" sz="1250" dirty="0"/>
+          </a:p>
+        </p:txBody>
+      </p:sp>
+      <p:sp>
+        <p:nvSpPr>
+          <p:cNvPr id="37" name="Shape 35"/>
+          <p:cNvSpPr/>
+          <p:nvPr/>
+        </p:nvSpPr>
+        <p:spPr>
+          <a:xfrm>
+            <a:off x="2697480" y="5230368"/>
+            <a:ext cx="548640" cy="0"/>
+          </a:xfrm>
+          <a:prstGeom prst="line">
+            <a:avLst/>
+          </a:prstGeom>
+          <a:noFill/>
+          <a:ln w="19050">
+            <a:solidFill>
+              <a:schemeClr val="accent4"/>
+            </a:solidFill>
+            <a:prstDash val="solid"/>
+            <a:tailEnd type="triangle"/>
+          </a:ln>
+        </p:spPr>
+      </p:sp>
+      <p:sp>
+        <p:nvSpPr>
+          <p:cNvPr id="38" name="Shape 36"/>
+          <p:cNvSpPr/>
+          <p:nvPr/>
+        </p:nvSpPr>
+        <p:spPr>
+          <a:xfrm>
+            <a:off x="6675120" y="5230368"/>
+            <a:ext cx="320040" cy="0"/>
+          </a:xfrm>
+          <a:prstGeom prst="line">
+            <a:avLst/>
+          </a:prstGeom>
+          <a:noFill/>
+          <a:ln w="19050">
+            <a:solidFill>
+              <a:schemeClr val="accent4"/>
+            </a:solidFill>
+            <a:prstDash val="solid"/>
+            <a:tailEnd type="triangle"/>
+          </a:ln>
+        </p:spPr>
+      </p:sp>
+      <p:sp>
+        <p:nvSpPr>
+          <p:cNvPr id="39" name="make_wingbox_figures"/>
+          <p:cNvSpPr txBox="1"/>
+          <p:nvPr/>
+        </p:nvSpPr>
+        <p:spPr>
+          <a:xfrm>
+            <a:off x="3246120" y="5522976"/>
+            <a:ext cx="3429000" cy="402336"/>
+          </a:xfrm>
+          <a:prstGeom prst="roundRect">
+            <a:avLst>
+              <a:gd name="adj" fmla="val 18182"/>
+            </a:avLst>
+          </a:prstGeom>
+          <a:solidFill>
+            <a:schemeClr val="accent1"/>
+          </a:solidFill>
+          <a:ln/>
+        </p:spPr>
+        <p:txBody>
+          <a:bodyPr wrap="square" lIns="63500" tIns="63500" rIns="63500" bIns="63500" rtlCol="0" anchor="ctr"/>
+          <a:lstStyle/>
+          <a:p>
+            <a:pPr algn="ctr" indent="0" marL="0">
+              <a:buNone/>
+            </a:pPr>
+            <a:r>
+              <a:rPr lang="en-US" sz="1200" b="1" dirty="0">
+                <a:solidFill>
+                  <a:schemeClr val="bg1"/>
+                </a:solidFill>
+                <a:latin typeface="Courier New" pitchFamily="34" charset="0"/>
+                <a:ea typeface="Courier New" pitchFamily="34" charset="-122"/>
+                <a:cs typeface="Courier New" pitchFamily="34" charset="-120"/>
+              </a:rPr>
+              <a:t>make_wingbox_figures</a:t>
+            </a:r>
+            <a:endParaRPr lang="en-US" sz="1200" dirty="0"/>
+          </a:p>
+        </p:txBody>
+      </p:sp>
+      <p:sp>
+        <p:nvSpPr>
+          <p:cNvPr id="40" name="panel10a–e  ·  wing-box experiment and ML"/>
+          <p:cNvSpPr txBox="1"/>
+          <p:nvPr/>
+        </p:nvSpPr>
+        <p:spPr>
+          <a:xfrm>
+            <a:off x="6995160" y="5522976"/>
+            <a:ext cx="4645152" cy="402336"/>
+          </a:xfrm>
+          <a:prstGeom prst="roundRect">
+            <a:avLst>
+              <a:gd name="adj" fmla="val 18182"/>
+            </a:avLst>
+          </a:prstGeom>
+          <a:solidFill>
+            <a:schemeClr val="accent2"/>
+          </a:solidFill>
+          <a:ln/>
+        </p:spPr>
+        <p:txBody>
+          <a:bodyPr wrap="square" lIns="63500" tIns="63500" rIns="63500" bIns="63500" rtlCol="0" anchor="ctr"/>
+          <a:lstStyle/>
+          <a:p>
+            <a:pPr algn="ctr" indent="0" marL="0">
+              <a:buNone/>
+            </a:pPr>
+            <a:r>
+              <a:rPr lang="en-US" sz="1250" b="1" dirty="0">
+                <a:solidFill>
+                  <a:schemeClr val="tx1"/>
+                </a:solidFill>
+              </a:rPr>
+              <a:t>panel10a–e  ·  wing-box experiment and ML</a:t>
+            </a:r>
+            <a:endParaRPr lang="en-US" sz="1250" dirty="0"/>
+          </a:p>
+        </p:txBody>
+      </p:sp>
+      <p:sp>
+        <p:nvSpPr>
+          <p:cNvPr id="41" name="Shape 39"/>
+          <p:cNvSpPr/>
+          <p:nvPr/>
+        </p:nvSpPr>
+        <p:spPr>
+          <a:xfrm>
+            <a:off x="2697480" y="5724144"/>
+            <a:ext cx="548640" cy="0"/>
+          </a:xfrm>
+          <a:prstGeom prst="line">
+            <a:avLst/>
+          </a:prstGeom>
+          <a:noFill/>
+          <a:ln w="19050">
+            <a:solidFill>
+              <a:schemeClr val="accent4"/>
+            </a:solidFill>
+            <a:prstDash val="solid"/>
+            <a:tailEnd type="triangle"/>
+          </a:ln>
+        </p:spPr>
+      </p:sp>
+      <p:sp>
+        <p:nvSpPr>
+          <p:cNvPr id="42" name="Shape 40"/>
+          <p:cNvSpPr/>
+          <p:nvPr/>
+        </p:nvSpPr>
+        <p:spPr>
+          <a:xfrm>
+            <a:off x="6675120" y="5724144"/>
+            <a:ext cx="320040" cy="0"/>
+          </a:xfrm>
+          <a:prstGeom prst="line">
+            <a:avLst/>
+          </a:prstGeom>
+          <a:noFill/>
+          <a:ln w="19050">
+            <a:solidFill>
+              <a:schemeClr val="accent4"/>
+            </a:solidFill>
+            <a:prstDash val="solid"/>
+            <a:tailEnd type="triangle"/>
+          </a:ln>
+        </p:spPr>
+      </p:sp>
+      <p:sp>
+        <p:nvSpPr>
+          <p:cNvPr id="43" name="Text 41"/>
+          <p:cNvSpPr txBox="1"/>
+          <p:nvPr/>
+        </p:nvSpPr>
+        <p:spPr>
+          <a:xfrm>
+            <a:off x="548640" y="6108192"/>
+            <a:ext cx="5486400" cy="274320"/>
+          </a:xfrm>
+          <a:prstGeom prst="rect">
+            <a:avLst/>
+          </a:prstGeom>
+          <a:noFill/>
+          <a:ln/>
+        </p:spPr>
+        <p:txBody>
+          <a:bodyPr wrap="square" lIns="0" tIns="0" rIns="0" bIns="0" rtlCol="0" anchor="ctr"/>
+          <a:lstStyle/>
+          <a:p>
+            <a:pPr algn="l" indent="0" marL="0">
+              <a:buNone/>
+            </a:pPr>
+            <a:r>
+              <a:rPr lang="en-US" sz="1100" i="1" dirty="0">
+                <a:solidFill>
+                  <a:schemeClr val="tx2"/>
+                </a:solidFill>
+              </a:rPr>
+              <a:t>All outputs are written to results/ as .png</a:t>
+            </a:r>
+            <a:endParaRPr lang="en-US" sz="1100" dirty="0"/>
+          </a:p>
+        </p:txBody>
+      </p:sp>
+      <p:sp>
+        <p:nvSpPr>
+          <p:cNvPr id="25" name="Slide Number Placeholder 0"/>
+          <p:cNvSpPr>
+            <a:spLocks noGrp="1"/>
+          </p:cNvSpPr>
+          <p:nvPr>
+            <p:ph type="sldNum" sz="quarter" idx="4294967295"/>
+          </p:nvPr>
+        </p:nvSpPr>
+        <p:spPr>
+          <a:xfrm>
+            <a:off x="11183112" y="6400800"/>
+            <a:ext cx="457200" cy="274320"/>
+          </a:xfrm>
+          <a:prstGeom prst="rect">
+            <a:avLst/>
+          </a:prstGeom>
+          <a:extLst>
+            <a:ext uri="{C572A759-6A51-4108-AA02-DFA0A04FC94B}">
+              <ma14:wrappingTextBoxFlag xmlns:ma14="http://schemas.microsoft.com/office/mac/drawingml/2011/main" val="0"/>
+            </a:ext>
+          </a:extLst>
+        </p:spPr>
+        <p:txBody>
+          <a:bodyPr/>
+          <a:lstStyle>
+            <a:lvl1pPr>
+              <a:defRPr sz="1000">
+                <a:solidFill>
+                  <a:schemeClr val="accent4"/>
+                </a:solidFill>
+              </a:defRPr>
+            </a:lvl1pPr>
+          </a:lstStyle>
+          <a:p>
+            <a:pPr algn="r"/>
+            <a:fld id="{F7021451-1387-4CA6-816F-3879F97B5CBC}" type="slidenum">
+              <a:rPr b="0" lang="en-US"/>
+              <a:t>19</a:t>
             </a:fld>
             <a:endParaRPr lang="en-US"/>
           </a:p>
@@ -13454,6 +15282,1166 @@
             <a:fld id="{F7021451-1387-4CA6-816F-3879F97B5CBC}" type="slidenum">
               <a:rPr b="0" lang="en-US"/>
               <a:t>2</a:t>
+            </a:fld>
+            <a:endParaRPr lang="en-US"/>
+          </a:p>
+        </p:txBody>
+      </p:sp>
+    </p:spTree>
+  </p:cSld>
+  <p:clrMapOvr>
+    <a:masterClrMapping/>
+  </p:clrMapOvr>
+</p:sld>
+</file>
+
+<file path=ppt/slides/slide20.xml><?xml version="1.0" encoding="utf-8"?>
+<p:sld xmlns:a="http://schemas.openxmlformats.org/drawingml/2006/main" xmlns:r="http://schemas.openxmlformats.org/officeDocument/2006/relationships" xmlns:p="http://schemas.openxmlformats.org/presentationml/2006/main">
+  <p:cSld name="Slide 20">
+    <p:spTree>
+      <p:nvGrpSpPr>
+        <p:cNvPr id="1" name=""/>
+        <p:cNvGrpSpPr/>
+        <p:nvPr/>
+      </p:nvGrpSpPr>
+      <p:grpSpPr>
+        <a:xfrm>
+          <a:off x="0" y="0"/>
+          <a:ext cx="0" cy="0"/>
+          <a:chOff x="0" y="0"/>
+          <a:chExt cx="0" cy="0"/>
+        </a:xfrm>
+      </p:grpSpPr>
+      <p:sp>
+        <p:nvSpPr>
+          <p:cNvPr id="2" name="Text 0"/>
+          <p:cNvSpPr/>
+          <p:nvPr>
+            <p:ph idx="100" type="title" hasCustomPrompt="1"/>
+          </p:nvPr>
+        </p:nvSpPr>
+        <p:spPr>
+          <a:xfrm>
+            <a:off x="548640" y="274320"/>
+            <a:ext cx="9966960" cy="685800"/>
+          </a:xfrm>
+          <a:prstGeom prst="rect">
+            <a:avLst/>
+          </a:prstGeom>
+          <a:noFill/>
+          <a:ln/>
+        </p:spPr>
+        <p:txBody>
+          <a:bodyPr wrap="square" rtlCol="0" anchor="ctr"/>
+          <a:lstStyle/>
+          <a:p>
+            <a:pPr algn="l" indent="0" marL="0">
+              <a:buNone/>
+            </a:pPr>
+            <a:r>
+              <a:rPr lang="en-US" sz="3400" b="1" dirty="0">
+                <a:solidFill>
+                  <a:schemeClr val="tx1"/>
+                </a:solidFill>
+              </a:rPr>
+              <a:t>How each result is checked</a:t>
+            </a:r>
+            <a:endParaRPr lang="en-US" sz="3400" dirty="0"/>
+          </a:p>
+        </p:txBody>
+      </p:sp>
+      <p:sp>
+        <p:nvSpPr>
+          <p:cNvPr id="3" name="Text 0"/>
+          <p:cNvSpPr/>
+          <p:nvPr>
+            <p:ph idx="101" type="body" hasCustomPrompt="1"/>
+          </p:nvPr>
+        </p:nvSpPr>
+        <p:spPr>
+          <a:xfrm>
+            <a:off x="548640" y="941832"/>
+            <a:ext cx="9966960" cy="411480"/>
+          </a:xfrm>
+          <a:prstGeom prst="rect">
+            <a:avLst/>
+          </a:prstGeom>
+          <a:noFill/>
+          <a:ln/>
+        </p:spPr>
+        <p:txBody>
+          <a:bodyPr wrap="square" rtlCol="0" anchor="ctr"/>
+          <a:lstStyle/>
+          <a:p>
+            <a:pPr indent="0" marL="0">
+              <a:buNone/>
+            </a:pPr>
+            <a:r>
+              <a:rPr lang="en-US" sz="1600" i="1" dirty="0">
+                <a:solidFill>
+                  <a:schemeClr val="tx2"/>
+                </a:solidFill>
+              </a:rPr>
+              <a:t>Every link has a gate, and no number is reported without a cross-check</a:t>
+            </a:r>
+            <a:endParaRPr lang="en-US" sz="1600" dirty="0"/>
+          </a:p>
+        </p:txBody>
+      </p:sp>
+      <p:sp>
+        <p:nvSpPr>
+          <p:cNvPr id="4" name="check card automated tests"/>
+          <p:cNvSpPr/>
+          <p:nvPr/>
+        </p:nvSpPr>
+        <p:spPr>
+          <a:xfrm>
+            <a:off x="548640" y="1737360"/>
+            <a:ext cx="2615184" cy="3611880"/>
+          </a:xfrm>
+          <a:prstGeom prst="roundRect">
+            <a:avLst>
+              <a:gd name="adj" fmla="val 3497"/>
+            </a:avLst>
+          </a:prstGeom>
+          <a:solidFill>
+            <a:schemeClr val="bg2"/>
+          </a:solidFill>
+          <a:ln/>
+        </p:spPr>
+      </p:sp>
+      <p:sp>
+        <p:nvSpPr>
+          <p:cNvPr id="5" name="Text 3"/>
+          <p:cNvSpPr txBox="1"/>
+          <p:nvPr/>
+        </p:nvSpPr>
+        <p:spPr>
+          <a:xfrm>
+            <a:off x="777240" y="2011680"/>
+            <a:ext cx="2157984" cy="1051560"/>
+          </a:xfrm>
+          <a:prstGeom prst="rect">
+            <a:avLst/>
+          </a:prstGeom>
+          <a:noFill/>
+          <a:ln/>
+        </p:spPr>
+        <p:txBody>
+          <a:bodyPr wrap="square" lIns="0" tIns="0" rIns="0" bIns="0" rtlCol="0" anchor="b"/>
+          <a:lstStyle/>
+          <a:p>
+            <a:pPr indent="0" marL="0">
+              <a:buNone/>
+            </a:pPr>
+            <a:r>
+              <a:rPr lang="en-US" sz="5400" b="1" dirty="0">
+                <a:solidFill>
+                  <a:schemeClr val="accent1"/>
+                </a:solidFill>
+                <a:latin typeface="Cambria" pitchFamily="34" charset="0"/>
+                <a:ea typeface="Cambria" pitchFamily="34" charset="-122"/>
+                <a:cs typeface="Cambria" pitchFamily="34" charset="-120"/>
+              </a:rPr>
+              <a:t>185</a:t>
+            </a:r>
+            <a:endParaRPr lang="en-US" sz="5400" dirty="0"/>
+          </a:p>
+        </p:txBody>
+      </p:sp>
+      <p:sp>
+        <p:nvSpPr>
+          <p:cNvPr id="6" name="Text 4"/>
+          <p:cNvSpPr txBox="1"/>
+          <p:nvPr/>
+        </p:nvSpPr>
+        <p:spPr>
+          <a:xfrm>
+            <a:off x="777240" y="3154680"/>
+            <a:ext cx="2157984" cy="685800"/>
+          </a:xfrm>
+          <a:prstGeom prst="rect">
+            <a:avLst/>
+          </a:prstGeom>
+          <a:noFill/>
+          <a:ln/>
+        </p:spPr>
+        <p:txBody>
+          <a:bodyPr wrap="square" lIns="0" tIns="0" rIns="0" bIns="0" rtlCol="0" anchor="t"/>
+          <a:lstStyle/>
+          <a:p>
+            <a:pPr indent="0" marL="0">
+              <a:buNone/>
+            </a:pPr>
+            <a:r>
+              <a:rPr lang="en-US" sz="1600" b="1" dirty="0">
+                <a:solidFill>
+                  <a:schemeClr val="tx1"/>
+                </a:solidFill>
+              </a:rPr>
+              <a:t>automated tests</a:t>
+            </a:r>
+            <a:endParaRPr lang="en-US" sz="1600" dirty="0"/>
+          </a:p>
+        </p:txBody>
+      </p:sp>
+      <p:sp>
+        <p:nvSpPr>
+          <p:cNvPr id="7" name="Text 5"/>
+          <p:cNvSpPr txBox="1"/>
+          <p:nvPr/>
+        </p:nvSpPr>
+        <p:spPr>
+          <a:xfrm>
+            <a:off x="777240" y="3886200"/>
+            <a:ext cx="2157984" cy="1783080"/>
+          </a:xfrm>
+          <a:prstGeom prst="rect">
+            <a:avLst/>
+          </a:prstGeom>
+          <a:noFill/>
+          <a:ln/>
+        </p:spPr>
+        <p:txBody>
+          <a:bodyPr wrap="square" lIns="0" tIns="0" rIns="0" bIns="0" rtlCol="0" anchor="t"/>
+          <a:lstStyle/>
+          <a:p>
+            <a:pPr indent="0" marL="0">
+              <a:buNone/>
+            </a:pPr>
+            <a:r>
+              <a:rPr lang="en-US" sz="1400" dirty="0">
+                <a:solidFill>
+                  <a:schemeClr val="tx2"/>
+                </a:solidFill>
+              </a:rPr>
+              <a:t>One gate per build step, checked against CLAUDE.md §4 reference numbers, e.g. 5–7 : 1 anisotropy at 2.5 m.</a:t>
+            </a:r>
+            <a:endParaRPr lang="en-US" sz="1400" dirty="0"/>
+          </a:p>
+        </p:txBody>
+      </p:sp>
+      <p:sp>
+        <p:nvSpPr>
+          <p:cNvPr id="8" name="check card figures changed on regeneration"/>
+          <p:cNvSpPr/>
+          <p:nvPr/>
+        </p:nvSpPr>
+        <p:spPr>
+          <a:xfrm>
+            <a:off x="3346704" y="1737360"/>
+            <a:ext cx="2615184" cy="3611880"/>
+          </a:xfrm>
+          <a:prstGeom prst="roundRect">
+            <a:avLst>
+              <a:gd name="adj" fmla="val 3497"/>
+            </a:avLst>
+          </a:prstGeom>
+          <a:solidFill>
+            <a:schemeClr val="bg2"/>
+          </a:solidFill>
+          <a:ln/>
+        </p:spPr>
+      </p:sp>
+      <p:sp>
+        <p:nvSpPr>
+          <p:cNvPr id="9" name="Text 7"/>
+          <p:cNvSpPr txBox="1"/>
+          <p:nvPr/>
+        </p:nvSpPr>
+        <p:spPr>
+          <a:xfrm>
+            <a:off x="3575304" y="2011680"/>
+            <a:ext cx="2157984" cy="1051560"/>
+          </a:xfrm>
+          <a:prstGeom prst="rect">
+            <a:avLst/>
+          </a:prstGeom>
+          <a:noFill/>
+          <a:ln/>
+        </p:spPr>
+        <p:txBody>
+          <a:bodyPr wrap="square" lIns="0" tIns="0" rIns="0" bIns="0" rtlCol="0" anchor="b"/>
+          <a:lstStyle/>
+          <a:p>
+            <a:pPr indent="0" marL="0">
+              <a:buNone/>
+            </a:pPr>
+            <a:r>
+              <a:rPr lang="en-US" sz="5400" b="1" dirty="0">
+                <a:solidFill>
+                  <a:schemeClr val="accent1"/>
+                </a:solidFill>
+                <a:latin typeface="Cambria" pitchFamily="34" charset="0"/>
+                <a:ea typeface="Cambria" pitchFamily="34" charset="-122"/>
+                <a:cs typeface="Cambria" pitchFamily="34" charset="-120"/>
+              </a:rPr>
+              <a:t>0</a:t>
+            </a:r>
+            <a:endParaRPr lang="en-US" sz="5400" dirty="0"/>
+          </a:p>
+        </p:txBody>
+      </p:sp>
+      <p:sp>
+        <p:nvSpPr>
+          <p:cNvPr id="10" name="Text 8"/>
+          <p:cNvSpPr txBox="1"/>
+          <p:nvPr/>
+        </p:nvSpPr>
+        <p:spPr>
+          <a:xfrm>
+            <a:off x="3575304" y="3154680"/>
+            <a:ext cx="2157984" cy="685800"/>
+          </a:xfrm>
+          <a:prstGeom prst="rect">
+            <a:avLst/>
+          </a:prstGeom>
+          <a:noFill/>
+          <a:ln/>
+        </p:spPr>
+        <p:txBody>
+          <a:bodyPr wrap="square" lIns="0" tIns="0" rIns="0" bIns="0" rtlCol="0" anchor="t"/>
+          <a:lstStyle/>
+          <a:p>
+            <a:pPr indent="0" marL="0">
+              <a:buNone/>
+            </a:pPr>
+            <a:r>
+              <a:rPr lang="en-US" sz="1600" b="1" dirty="0">
+                <a:solidFill>
+                  <a:schemeClr val="tx1"/>
+                </a:solidFill>
+              </a:rPr>
+              <a:t>figures changed on regeneration</a:t>
+            </a:r>
+            <a:endParaRPr lang="en-US" sz="1600" dirty="0"/>
+          </a:p>
+        </p:txBody>
+      </p:sp>
+      <p:sp>
+        <p:nvSpPr>
+          <p:cNvPr id="11" name="Text 9"/>
+          <p:cNvSpPr txBox="1"/>
+          <p:nvPr/>
+        </p:nvSpPr>
+        <p:spPr>
+          <a:xfrm>
+            <a:off x="3575304" y="3886200"/>
+            <a:ext cx="2157984" cy="1783080"/>
+          </a:xfrm>
+          <a:prstGeom prst="rect">
+            <a:avLst/>
+          </a:prstGeom>
+          <a:noFill/>
+          <a:ln/>
+        </p:spPr>
+        <p:txBody>
+          <a:bodyPr wrap="square" lIns="0" tIns="0" rIns="0" bIns="0" rtlCol="0" anchor="t"/>
+          <a:lstStyle/>
+          <a:p>
+            <a:pPr indent="0" marL="0">
+              <a:buNone/>
+            </a:pPr>
+            <a:r>
+              <a:rPr lang="en-US" sz="1400" dirty="0">
+                <a:solidFill>
+                  <a:schemeClr val="tx2"/>
+                </a:solidFill>
+              </a:rPr>
+              <a:t>Fixed seeds and noiseless observations: re-running make_figures leaves git diff results/ empty.</a:t>
+            </a:r>
+            <a:endParaRPr lang="en-US" sz="1400" dirty="0"/>
+          </a:p>
+        </p:txBody>
+      </p:sp>
+      <p:sp>
+        <p:nvSpPr>
+          <p:cNvPr id="12" name="check card design vs noisy covariance"/>
+          <p:cNvSpPr/>
+          <p:nvPr/>
+        </p:nvSpPr>
+        <p:spPr>
+          <a:xfrm>
+            <a:off x="6144768" y="1737360"/>
+            <a:ext cx="2615184" cy="3611880"/>
+          </a:xfrm>
+          <a:prstGeom prst="roundRect">
+            <a:avLst>
+              <a:gd name="adj" fmla="val 3497"/>
+            </a:avLst>
+          </a:prstGeom>
+          <a:solidFill>
+            <a:schemeClr val="bg2"/>
+          </a:solidFill>
+          <a:ln/>
+        </p:spPr>
+      </p:sp>
+      <p:sp>
+        <p:nvSpPr>
+          <p:cNvPr id="13" name="Text 11"/>
+          <p:cNvSpPr txBox="1"/>
+          <p:nvPr/>
+        </p:nvSpPr>
+        <p:spPr>
+          <a:xfrm>
+            <a:off x="6373368" y="2011680"/>
+            <a:ext cx="2157984" cy="1051560"/>
+          </a:xfrm>
+          <a:prstGeom prst="rect">
+            <a:avLst/>
+          </a:prstGeom>
+          <a:noFill/>
+          <a:ln/>
+        </p:spPr>
+        <p:txBody>
+          <a:bodyPr wrap="square" lIns="0" tIns="0" rIns="0" bIns="0" rtlCol="0" anchor="b"/>
+          <a:lstStyle/>
+          <a:p>
+            <a:pPr indent="0" marL="0">
+              <a:buNone/>
+            </a:pPr>
+            <a:r>
+              <a:rPr lang="en-US" sz="5400" b="1" dirty="0">
+                <a:solidFill>
+                  <a:schemeClr val="accent1"/>
+                </a:solidFill>
+                <a:latin typeface="Cambria" pitchFamily="34" charset="0"/>
+                <a:ea typeface="Cambria" pitchFamily="34" charset="-122"/>
+                <a:cs typeface="Cambria" pitchFamily="34" charset="-120"/>
+              </a:rPr>
+              <a:t>≤ 5%</a:t>
+            </a:r>
+            <a:endParaRPr lang="en-US" sz="5400" dirty="0"/>
+          </a:p>
+        </p:txBody>
+      </p:sp>
+      <p:sp>
+        <p:nvSpPr>
+          <p:cNvPr id="14" name="Text 12"/>
+          <p:cNvSpPr txBox="1"/>
+          <p:nvPr/>
+        </p:nvSpPr>
+        <p:spPr>
+          <a:xfrm>
+            <a:off x="6373368" y="3154680"/>
+            <a:ext cx="2157984" cy="685800"/>
+          </a:xfrm>
+          <a:prstGeom prst="rect">
+            <a:avLst/>
+          </a:prstGeom>
+          <a:noFill/>
+          <a:ln/>
+        </p:spPr>
+        <p:txBody>
+          <a:bodyPr wrap="square" lIns="0" tIns="0" rIns="0" bIns="0" rtlCol="0" anchor="t"/>
+          <a:lstStyle/>
+          <a:p>
+            <a:pPr indent="0" marL="0">
+              <a:buNone/>
+            </a:pPr>
+            <a:r>
+              <a:rPr lang="en-US" sz="1600" b="1" dirty="0">
+                <a:solidFill>
+                  <a:schemeClr val="tx1"/>
+                </a:solidFill>
+              </a:rPr>
+              <a:t>design vs noisy covariance</a:t>
+            </a:r>
+            <a:endParaRPr lang="en-US" sz="1600" dirty="0"/>
+          </a:p>
+        </p:txBody>
+      </p:sp>
+      <p:sp>
+        <p:nvSpPr>
+          <p:cNvPr id="15" name="Text 13"/>
+          <p:cNvSpPr txBox="1"/>
+          <p:nvPr/>
+        </p:nvSpPr>
+        <p:spPr>
+          <a:xfrm>
+            <a:off x="6373368" y="3886200"/>
+            <a:ext cx="2157984" cy="1783080"/>
+          </a:xfrm>
+          <a:prstGeom prst="rect">
+            <a:avLst/>
+          </a:prstGeom>
+          <a:noFill/>
+          <a:ln/>
+        </p:spPr>
+        <p:txBody>
+          <a:bodyPr wrap="square" lIns="0" tIns="0" rIns="0" bIns="0" rtlCol="0" anchor="t"/>
+          <a:lstStyle/>
+          <a:p>
+            <a:pPr indent="0" marL="0">
+              <a:buNone/>
+            </a:pPr>
+            <a:r>
+              <a:rPr lang="en-US" sz="1400" dirty="0">
+                <a:solidFill>
+                  <a:schemeClr val="tx2"/>
+                </a:solidFill>
+              </a:rPr>
+              <a:t>A test pins the noiseless design covariance to a genuinely noisy network solve.</a:t>
+            </a:r>
+            <a:endParaRPr lang="en-US" sz="1400" dirty="0"/>
+          </a:p>
+        </p:txBody>
+      </p:sp>
+      <p:sp>
+        <p:nvSpPr>
+          <p:cNvPr id="16" name="check card GA cross-checks per scene"/>
+          <p:cNvSpPr/>
+          <p:nvPr/>
+        </p:nvSpPr>
+        <p:spPr>
+          <a:xfrm>
+            <a:off x="8942832" y="1737360"/>
+            <a:ext cx="2615184" cy="3611880"/>
+          </a:xfrm>
+          <a:prstGeom prst="roundRect">
+            <a:avLst>
+              <a:gd name="adj" fmla="val 3497"/>
+            </a:avLst>
+          </a:prstGeom>
+          <a:solidFill>
+            <a:schemeClr val="bg2"/>
+          </a:solidFill>
+          <a:ln/>
+        </p:spPr>
+      </p:sp>
+      <p:sp>
+        <p:nvSpPr>
+          <p:cNvPr id="17" name="Text 15"/>
+          <p:cNvSpPr txBox="1"/>
+          <p:nvPr/>
+        </p:nvSpPr>
+        <p:spPr>
+          <a:xfrm>
+            <a:off x="9171432" y="2011680"/>
+            <a:ext cx="2157984" cy="1051560"/>
+          </a:xfrm>
+          <a:prstGeom prst="rect">
+            <a:avLst/>
+          </a:prstGeom>
+          <a:noFill/>
+          <a:ln/>
+        </p:spPr>
+        <p:txBody>
+          <a:bodyPr wrap="square" lIns="0" tIns="0" rIns="0" bIns="0" rtlCol="0" anchor="b"/>
+          <a:lstStyle/>
+          <a:p>
+            <a:pPr indent="0" marL="0">
+              <a:buNone/>
+            </a:pPr>
+            <a:r>
+              <a:rPr lang="en-US" sz="5400" b="1" dirty="0">
+                <a:solidFill>
+                  <a:schemeClr val="accent3"/>
+                </a:solidFill>
+                <a:latin typeface="Cambria" pitchFamily="34" charset="0"/>
+                <a:ea typeface="Cambria" pitchFamily="34" charset="-122"/>
+                <a:cs typeface="Cambria" pitchFamily="34" charset="-120"/>
+              </a:rPr>
+              <a:t>16</a:t>
+            </a:r>
+            <a:endParaRPr lang="en-US" sz="5400" dirty="0"/>
+          </a:p>
+        </p:txBody>
+      </p:sp>
+      <p:sp>
+        <p:nvSpPr>
+          <p:cNvPr id="18" name="Text 16"/>
+          <p:cNvSpPr txBox="1"/>
+          <p:nvPr/>
+        </p:nvSpPr>
+        <p:spPr>
+          <a:xfrm>
+            <a:off x="9171432" y="3154680"/>
+            <a:ext cx="2157984" cy="685800"/>
+          </a:xfrm>
+          <a:prstGeom prst="rect">
+            <a:avLst/>
+          </a:prstGeom>
+          <a:noFill/>
+          <a:ln/>
+        </p:spPr>
+        <p:txBody>
+          <a:bodyPr wrap="square" lIns="0" tIns="0" rIns="0" bIns="0" rtlCol="0" anchor="t"/>
+          <a:lstStyle/>
+          <a:p>
+            <a:pPr indent="0" marL="0">
+              <a:buNone/>
+            </a:pPr>
+            <a:r>
+              <a:rPr lang="en-US" sz="1600" b="1" dirty="0">
+                <a:solidFill>
+                  <a:schemeClr val="tx1"/>
+                </a:solidFill>
+              </a:rPr>
+              <a:t>GA cross-checks per scene</a:t>
+            </a:r>
+            <a:endParaRPr lang="en-US" sz="1600" dirty="0"/>
+          </a:p>
+        </p:txBody>
+      </p:sp>
+      <p:sp>
+        <p:nvSpPr>
+          <p:cNvPr id="19" name="Text 17"/>
+          <p:cNvSpPr txBox="1"/>
+          <p:nvPr/>
+        </p:nvSpPr>
+        <p:spPr>
+          <a:xfrm>
+            <a:off x="9171432" y="3886200"/>
+            <a:ext cx="2157984" cy="1783080"/>
+          </a:xfrm>
+          <a:prstGeom prst="rect">
+            <a:avLst/>
+          </a:prstGeom>
+          <a:noFill/>
+          <a:ln/>
+        </p:spPr>
+        <p:txBody>
+          <a:bodyPr wrap="square" lIns="0" tIns="0" rIns="0" bIns="0" rtlCol="0" anchor="t"/>
+          <a:lstStyle/>
+          <a:p>
+            <a:pPr indent="0" marL="0">
+              <a:buNone/>
+            </a:pPr>
+            <a:r>
+              <a:rPr lang="en-US" sz="1400" dirty="0">
+                <a:solidFill>
+                  <a:schemeClr val="tx2"/>
+                </a:solidFill>
+              </a:rPr>
+              <a:t>Each of 4 winning plans scored under all 4 objectives' formulas. This caught two wrong searches, and re-scoring later exposed an invalid-network loophole.</a:t>
+            </a:r>
+            <a:endParaRPr lang="en-US" sz="1400" dirty="0"/>
+          </a:p>
+        </p:txBody>
+      </p:sp>
+      <p:sp>
+        <p:nvSpPr>
+          <p:cNvPr id="25" name="Slide Number Placeholder 0"/>
+          <p:cNvSpPr>
+            <a:spLocks noGrp="1"/>
+          </p:cNvSpPr>
+          <p:nvPr>
+            <p:ph type="sldNum" sz="quarter" idx="4294967295"/>
+          </p:nvPr>
+        </p:nvSpPr>
+        <p:spPr>
+          <a:xfrm>
+            <a:off x="11183112" y="6400800"/>
+            <a:ext cx="457200" cy="274320"/>
+          </a:xfrm>
+          <a:prstGeom prst="rect">
+            <a:avLst/>
+          </a:prstGeom>
+          <a:extLst>
+            <a:ext uri="{C572A759-6A51-4108-AA02-DFA0A04FC94B}">
+              <ma14:wrappingTextBoxFlag xmlns:ma14="http://schemas.microsoft.com/office/mac/drawingml/2011/main" val="0"/>
+            </a:ext>
+          </a:extLst>
+        </p:spPr>
+        <p:txBody>
+          <a:bodyPr/>
+          <a:lstStyle>
+            <a:lvl1pPr>
+              <a:defRPr sz="1000">
+                <a:solidFill>
+                  <a:schemeClr val="accent4"/>
+                </a:solidFill>
+              </a:defRPr>
+            </a:lvl1pPr>
+          </a:lstStyle>
+          <a:p>
+            <a:pPr algn="r"/>
+            <a:fld id="{F7021451-1387-4CA6-816F-3879F97B5CBC}" type="slidenum">
+              <a:rPr b="0" lang="en-US"/>
+              <a:t>20</a:t>
+            </a:fld>
+            <a:endParaRPr lang="en-US"/>
+          </a:p>
+        </p:txBody>
+      </p:sp>
+    </p:spTree>
+  </p:cSld>
+  <p:clrMapOvr>
+    <a:masterClrMapping/>
+  </p:clrMapOvr>
+</p:sld>
+</file>
+
+<file path=ppt/slides/slide21.xml><?xml version="1.0" encoding="utf-8"?>
+<p:sld xmlns:a="http://schemas.openxmlformats.org/drawingml/2006/main" xmlns:r="http://schemas.openxmlformats.org/officeDocument/2006/relationships" xmlns:p="http://schemas.openxmlformats.org/presentationml/2006/main">
+  <p:cSld name="Slide 21">
+    <p:spTree>
+      <p:nvGrpSpPr>
+        <p:cNvPr id="1" name=""/>
+        <p:cNvGrpSpPr/>
+        <p:nvPr/>
+      </p:nvGrpSpPr>
+      <p:grpSpPr>
+        <a:xfrm>
+          <a:off x="0" y="0"/>
+          <a:ext cx="0" cy="0"/>
+          <a:chOff x="0" y="0"/>
+          <a:chExt cx="0" cy="0"/>
+        </a:xfrm>
+      </p:grpSpPr>
+      <p:sp>
+        <p:nvSpPr>
+          <p:cNvPr id="2" name="Text 0"/>
+          <p:cNvSpPr/>
+          <p:nvPr>
+            <p:ph idx="100" type="title" hasCustomPrompt="1"/>
+          </p:nvPr>
+        </p:nvSpPr>
+        <p:spPr>
+          <a:xfrm>
+            <a:off x="731520" y="502920"/>
+            <a:ext cx="10698480" cy="822960"/>
+          </a:xfrm>
+          <a:prstGeom prst="rect">
+            <a:avLst/>
+          </a:prstGeom>
+          <a:noFill/>
+          <a:ln/>
+        </p:spPr>
+        <p:txBody>
+          <a:bodyPr wrap="square" rtlCol="0" anchor="ctr"/>
+          <a:lstStyle/>
+          <a:p>
+            <a:pPr algn="l" indent="0" marL="0">
+              <a:buNone/>
+            </a:pPr>
+            <a:r>
+              <a:rPr lang="en-US" sz="3800" b="1" dirty="0">
+                <a:solidFill>
+                  <a:schemeClr val="bg1"/>
+                </a:solidFill>
+              </a:rPr>
+              <a:t>Reproducing every figure</a:t>
+            </a:r>
+            <a:endParaRPr lang="en-US" sz="3800" dirty="0"/>
+          </a:p>
+        </p:txBody>
+      </p:sp>
+      <p:sp>
+        <p:nvSpPr>
+          <p:cNvPr id="3" name="Text 0"/>
+          <p:cNvSpPr/>
+          <p:nvPr>
+            <p:ph idx="101" type="body" hasCustomPrompt="1"/>
+          </p:nvPr>
+        </p:nvSpPr>
+        <p:spPr>
+          <a:xfrm>
+            <a:off x="731520" y="1280160"/>
+            <a:ext cx="10698480" cy="457200"/>
+          </a:xfrm>
+          <a:prstGeom prst="rect">
+            <a:avLst/>
+          </a:prstGeom>
+          <a:noFill/>
+          <a:ln/>
+        </p:spPr>
+        <p:txBody>
+          <a:bodyPr wrap="square" rtlCol="0" anchor="ctr"/>
+          <a:lstStyle/>
+          <a:p>
+            <a:pPr indent="0" marL="0">
+              <a:buNone/>
+            </a:pPr>
+            <a:r>
+              <a:rPr lang="en-US" sz="1800" dirty="0">
+                <a:solidFill>
+                  <a:schemeClr val="accent5"/>
+                </a:solidFill>
+              </a:rPr>
+              <a:t>Four commands from a fresh clone; full write-ups live in docs/</a:t>
+            </a:r>
+            <a:endParaRPr lang="en-US" sz="1800" dirty="0"/>
+          </a:p>
+        </p:txBody>
+      </p:sp>
+      <p:sp>
+        <p:nvSpPr>
+          <p:cNvPr id="4" name="commands"/>
+          <p:cNvSpPr txBox="1"/>
+          <p:nvPr/>
+        </p:nvSpPr>
+        <p:spPr>
+          <a:xfrm>
+            <a:off x="731520" y="2103120"/>
+            <a:ext cx="10698480" cy="2377440"/>
+          </a:xfrm>
+          <a:prstGeom prst="roundRect">
+            <a:avLst>
+              <a:gd name="adj" fmla="val 3846"/>
+            </a:avLst>
+          </a:prstGeom>
+          <a:solidFill>
+            <a:schemeClr val="tx2"/>
+          </a:solidFill>
+          <a:ln/>
+        </p:spPr>
+        <p:txBody>
+          <a:bodyPr wrap="square" lIns="228600" tIns="228600" rIns="228600" bIns="228600" rtlCol="0" anchor="ctr"/>
+          <a:lstStyle/>
+          <a:p>
+            <a:pPr algn="l" indent="0" marL="0">
+              <a:spcAft>
+                <a:spcPts val="600"/>
+              </a:spcAft>
+              <a:buNone/>
+            </a:pPr>
+            <a:r>
+              <a:rPr lang="en-US" sz="1500" dirty="0">
+                <a:solidFill>
+                  <a:schemeClr val="bg1"/>
+                </a:solidFill>
+                <a:latin typeface="Courier New" pitchFamily="34" charset="0"/>
+                <a:ea typeface="Courier New" pitchFamily="34" charset="-122"/>
+                <a:cs typeface="Courier New" pitchFamily="34" charset="-120"/>
+              </a:rPr>
+              <a:t>pip install -r requirements.txt &amp;&amp; pip install -e .</a:t>
+            </a:r>
+            <a:endParaRPr lang="en-US" sz="1500" dirty="0"/>
+          </a:p>
+          <a:p>
+            <a:pPr algn="l" indent="0" marL="0">
+              <a:spcAft>
+                <a:spcPts val="600"/>
+              </a:spcAft>
+              <a:buNone/>
+            </a:pPr>
+            <a:r>
+              <a:rPr lang="en-US" sz="1500" dirty="0">
+                <a:solidFill>
+                  <a:schemeClr val="bg1"/>
+                </a:solidFill>
+                <a:latin typeface="Courier New" pitchFamily="34" charset="0"/>
+                <a:ea typeface="Courier New" pitchFamily="34" charset="-122"/>
+                <a:cs typeface="Courier New" pitchFamily="34" charset="-120"/>
+              </a:rPr>
+              <a:t>pytest</a:t>
+            </a:r>
+            <a:pPr algn="l" indent="0" marL="0">
+              <a:spcAft>
+                <a:spcPts val="600"/>
+              </a:spcAft>
+              <a:buNone/>
+            </a:pPr>
+            <a:r>
+              <a:rPr lang="en-US" sz="1500" dirty="0">
+                <a:solidFill>
+                  <a:schemeClr val="accent5"/>
+                </a:solidFill>
+                <a:latin typeface="Courier New" pitchFamily="34" charset="0"/>
+                <a:ea typeface="Courier New" pitchFamily="34" charset="-122"/>
+                <a:cs typeface="Courier New" pitchFamily="34" charset="-120"/>
+              </a:rPr>
+              <a:t>   # 185 tests, about four minutes</a:t>
+            </a:r>
+            <a:endParaRPr lang="en-US" sz="1500" dirty="0"/>
+          </a:p>
+          <a:p>
+            <a:pPr algn="l" indent="0" marL="0">
+              <a:spcAft>
+                <a:spcPts val="600"/>
+              </a:spcAft>
+              <a:buNone/>
+            </a:pPr>
+            <a:r>
+              <a:rPr lang="en-US" sz="1500" dirty="0">
+                <a:solidFill>
+                  <a:schemeClr val="bg1"/>
+                </a:solidFill>
+                <a:latin typeface="Courier New" pitchFamily="34" charset="0"/>
+                <a:ea typeface="Courier New" pitchFamily="34" charset="-122"/>
+                <a:cs typeface="Courier New" pitchFamily="34" charset="-120"/>
+              </a:rPr>
+              <a:t>python -m viz.make_figures</a:t>
+            </a:r>
+            <a:pPr algn="l" indent="0" marL="0">
+              <a:spcAft>
+                <a:spcPts val="600"/>
+              </a:spcAft>
+              <a:buNone/>
+            </a:pPr>
+            <a:r>
+              <a:rPr lang="en-US" sz="1500" dirty="0">
+                <a:solidFill>
+                  <a:schemeClr val="accent5"/>
+                </a:solidFill>
+                <a:latin typeface="Courier New" pitchFamily="34" charset="0"/>
+                <a:ea typeface="Courier New" pitchFamily="34" charset="-122"/>
+                <a:cs typeface="Courier New" pitchFamily="34" charset="-120"/>
+              </a:rPr>
+              <a:t>   # panels 1–8, 2–3 min, identical every run</a:t>
+            </a:r>
+            <a:endParaRPr lang="en-US" sz="1500" dirty="0"/>
+          </a:p>
+          <a:p>
+            <a:pPr algn="l" indent="0" marL="0">
+              <a:spcAft>
+                <a:spcPts val="600"/>
+              </a:spcAft>
+              <a:buNone/>
+            </a:pPr>
+            <a:r>
+              <a:rPr lang="en-US" sz="1500" dirty="0">
+                <a:solidFill>
+                  <a:schemeClr val="bg1"/>
+                </a:solidFill>
+                <a:latin typeface="Courier New" pitchFamily="34" charset="0"/>
+                <a:ea typeface="Courier New" pitchFamily="34" charset="-122"/>
+                <a:cs typeface="Courier New" pitchFamily="34" charset="-120"/>
+              </a:rPr>
+              <a:t>OMP_NUM_THREADS=1 OPENBLAS_NUM_THREADS=1 MKL_NUM_THREADS=1 \</a:t>
+            </a:r>
+            <a:endParaRPr lang="en-US" sz="1500" dirty="0"/>
+          </a:p>
+          <a:p>
+            <a:pPr algn="l" indent="0" marL="0">
+              <a:spcAft>
+                <a:spcPts val="600"/>
+              </a:spcAft>
+              <a:buNone/>
+            </a:pPr>
+            <a:r>
+              <a:rPr lang="en-US" sz="1500" dirty="0">
+                <a:solidFill>
+                  <a:schemeClr val="bg1"/>
+                </a:solidFill>
+                <a:latin typeface="Courier New" pitchFamily="34" charset="0"/>
+                <a:ea typeface="Courier New" pitchFamily="34" charset="-122"/>
+                <a:cs typeface="Courier New" pitchFamily="34" charset="-120"/>
+              </a:rPr>
+              <a:t>  NUMEXPR_NUM_THREADS=1 python -m viz.make_wing_figures</a:t>
+            </a:r>
+            <a:pPr algn="l" indent="0" marL="0">
+              <a:spcAft>
+                <a:spcPts val="600"/>
+              </a:spcAft>
+              <a:buNone/>
+            </a:pPr>
+            <a:r>
+              <a:rPr lang="en-US" sz="1500" dirty="0">
+                <a:solidFill>
+                  <a:schemeClr val="accent5"/>
+                </a:solidFill>
+                <a:latin typeface="Courier New" pitchFamily="34" charset="0"/>
+                <a:ea typeface="Courier New" pitchFamily="34" charset="-122"/>
+                <a:cs typeface="Courier New" pitchFamily="34" charset="-120"/>
+              </a:rPr>
+              <a:t>   # panel 9, ~14 min</a:t>
+            </a:r>
+            <a:endParaRPr lang="en-US" sz="1500" dirty="0"/>
+          </a:p>
+        </p:txBody>
+      </p:sp>
+      <p:sp>
+        <p:nvSpPr>
+          <p:cNvPr id="5" name="Text 3"/>
+          <p:cNvSpPr txBox="1"/>
+          <p:nvPr/>
+        </p:nvSpPr>
+        <p:spPr>
+          <a:xfrm>
+            <a:off x="731520" y="4892040"/>
+            <a:ext cx="3429000" cy="868680"/>
+          </a:xfrm>
+          <a:prstGeom prst="rect">
+            <a:avLst/>
+          </a:prstGeom>
+          <a:noFill/>
+          <a:ln/>
+        </p:spPr>
+        <p:txBody>
+          <a:bodyPr wrap="square" lIns="0" tIns="0" rIns="0" bIns="0" rtlCol="0" anchor="t"/>
+          <a:lstStyle/>
+          <a:p>
+            <a:pPr indent="0" marL="0">
+              <a:buNone/>
+            </a:pPr>
+            <a:r>
+              <a:rPr lang="en-US" sz="1300" b="1" dirty="0">
+                <a:solidFill>
+                  <a:schemeClr val="accent2"/>
+                </a:solidFill>
+                <a:latin typeface="Courier New" pitchFamily="34" charset="0"/>
+                <a:ea typeface="Courier New" pitchFamily="34" charset="-122"/>
+                <a:cs typeface="Courier New" pitchFamily="34" charset="-120"/>
+              </a:rPr>
+              <a:t>docs/step1–step6_*.md</a:t>
+            </a:r>
+            <a:endParaRPr lang="en-US" sz="1300" dirty="0"/>
+          </a:p>
+          <a:p>
+            <a:pPr indent="0" marL="0">
+              <a:buNone/>
+            </a:pPr>
+            <a:r>
+              <a:rPr lang="en-US" sz="1300" dirty="0">
+                <a:solidFill>
+                  <a:schemeClr val="bg2"/>
+                </a:solidFill>
+              </a:rPr>
+              <a:t>the physics and results behind each build step</a:t>
+            </a:r>
+            <a:endParaRPr lang="en-US" sz="1300" dirty="0"/>
+          </a:p>
+        </p:txBody>
+      </p:sp>
+      <p:sp>
+        <p:nvSpPr>
+          <p:cNvPr id="6" name="Text 4"/>
+          <p:cNvSpPr txBox="1"/>
+          <p:nvPr/>
+        </p:nvSpPr>
+        <p:spPr>
+          <a:xfrm>
+            <a:off x="4361688" y="4892040"/>
+            <a:ext cx="3429000" cy="868680"/>
+          </a:xfrm>
+          <a:prstGeom prst="rect">
+            <a:avLst/>
+          </a:prstGeom>
+          <a:noFill/>
+          <a:ln/>
+        </p:spPr>
+        <p:txBody>
+          <a:bodyPr wrap="square" lIns="0" tIns="0" rIns="0" bIns="0" rtlCol="0" anchor="t"/>
+          <a:lstStyle/>
+          <a:p>
+            <a:pPr indent="0" marL="0">
+              <a:buNone/>
+            </a:pPr>
+            <a:r>
+              <a:rPr lang="en-US" sz="1300" b="1" dirty="0">
+                <a:solidFill>
+                  <a:schemeClr val="accent2"/>
+                </a:solidFill>
+                <a:latin typeface="Courier New" pitchFamily="34" charset="0"/>
+                <a:ea typeface="Courier New" pitchFamily="34" charset="-122"/>
+                <a:cs typeface="Courier New" pitchFamily="34" charset="-120"/>
+              </a:rPr>
+              <a:t>CLAUDE.md</a:t>
+            </a:r>
+            <a:endParaRPr lang="en-US" sz="1300" dirty="0"/>
+          </a:p>
+          <a:p>
+            <a:pPr indent="0" marL="0">
+              <a:buNone/>
+            </a:pPr>
+            <a:r>
+              <a:rPr lang="en-US" sz="1300" dirty="0">
+                <a:solidFill>
+                  <a:schemeClr val="bg2"/>
+                </a:solidFill>
+              </a:rPr>
+              <a:t>reference numbers, design decisions, build order</a:t>
+            </a:r>
+            <a:endParaRPr lang="en-US" sz="1300" dirty="0"/>
+          </a:p>
+        </p:txBody>
+      </p:sp>
+      <p:sp>
+        <p:nvSpPr>
+          <p:cNvPr id="7" name="Text 5"/>
+          <p:cNvSpPr txBox="1"/>
+          <p:nvPr/>
+        </p:nvSpPr>
+        <p:spPr>
+          <a:xfrm>
+            <a:off x="7991856" y="4892040"/>
+            <a:ext cx="3429000" cy="868680"/>
+          </a:xfrm>
+          <a:prstGeom prst="rect">
+            <a:avLst/>
+          </a:prstGeom>
+          <a:noFill/>
+          <a:ln/>
+        </p:spPr>
+        <p:txBody>
+          <a:bodyPr wrap="square" lIns="0" tIns="0" rIns="0" bIns="0" rtlCol="0" anchor="t"/>
+          <a:lstStyle/>
+          <a:p>
+            <a:pPr indent="0" marL="0">
+              <a:buNone/>
+            </a:pPr>
+            <a:r>
+              <a:rPr lang="en-US" sz="1300" b="1" dirty="0">
+                <a:solidFill>
+                  <a:schemeClr val="accent2"/>
+                </a:solidFill>
+                <a:latin typeface="Courier New" pitchFamily="34" charset="0"/>
+                <a:ea typeface="Courier New" pitchFamily="34" charset="-122"/>
+                <a:cs typeface="Courier New" pitchFamily="34" charset="-120"/>
+              </a:rPr>
+              <a:t>README.md / SETUP.md</a:t>
+            </a:r>
+            <a:endParaRPr lang="en-US" sz="1300" dirty="0"/>
+          </a:p>
+          <a:p>
+            <a:pPr indent="0" marL="0">
+              <a:buNone/>
+            </a:pPr>
+            <a:r>
+              <a:rPr lang="en-US" sz="1300" dirty="0">
+                <a:solidFill>
+                  <a:schemeClr val="bg2"/>
+                </a:solidFill>
+              </a:rPr>
+              <a:t>setup on Windows / VS Code, interactive app.py explorer</a:t>
+            </a:r>
+            <a:endParaRPr lang="en-US" sz="1300" dirty="0"/>
+          </a:p>
+        </p:txBody>
+      </p:sp>
+      <p:sp>
+        <p:nvSpPr>
+          <p:cNvPr id="25" name="Slide Number Placeholder 0"/>
+          <p:cNvSpPr>
+            <a:spLocks noGrp="1"/>
+          </p:cNvSpPr>
+          <p:nvPr>
+            <p:ph type="sldNum" sz="quarter" idx="4294967295"/>
+          </p:nvPr>
+        </p:nvSpPr>
+        <p:spPr>
+          <a:xfrm>
+            <a:off x="11183112" y="6400800"/>
+            <a:ext cx="457200" cy="274320"/>
+          </a:xfrm>
+          <a:prstGeom prst="rect">
+            <a:avLst/>
+          </a:prstGeom>
+          <a:extLst>
+            <a:ext uri="{C572A759-6A51-4108-AA02-DFA0A04FC94B}">
+              <ma14:wrappingTextBoxFlag xmlns:ma14="http://schemas.microsoft.com/office/mac/drawingml/2011/main" val="0"/>
+            </a:ext>
+          </a:extLst>
+        </p:spPr>
+        <p:txBody>
+          <a:bodyPr/>
+          <a:lstStyle>
+            <a:lvl1pPr>
+              <a:defRPr sz="1000">
+                <a:solidFill>
+                  <a:schemeClr val="accent4"/>
+                </a:solidFill>
+              </a:defRPr>
+            </a:lvl1pPr>
+          </a:lstStyle>
+          <a:p>
+            <a:pPr algn="r"/>
+            <a:fld id="{F7021451-1387-4CA6-816F-3879F97B5CBC}" type="slidenum">
+              <a:rPr b="0" lang="en-US"/>
+              <a:t>21</a:t>
             </a:fld>
             <a:endParaRPr lang="en-US"/>
           </a:p>
